--- a/Caso de la bodega.pptx
+++ b/Caso de la bodega.pptx
@@ -4699,6 +4699,14 @@
 <file path=ppt/slides/slide12.xml><?xml version="1.0" encoding="utf-8"?>
 <p:sld xmlns:a="http://schemas.openxmlformats.org/drawingml/2006/main" xmlns:r="http://schemas.openxmlformats.org/officeDocument/2006/relationships" xmlns:p="http://schemas.openxmlformats.org/presentationml/2006/main">
   <p:cSld>
+    <p:bg>
+      <p:bgPr>
+        <a:solidFill>
+          <a:schemeClr val="bg1"/>
+        </a:solidFill>
+        <a:effectLst/>
+      </p:bgPr>
+    </p:bg>
     <p:spTree>
       <p:nvGrpSpPr>
         <p:cNvPr id="1" name=""/>
@@ -4713,12 +4721,964 @@
           <a:chExt cx="0" cy="0"/>
         </a:xfrm>
       </p:grpSpPr>
+      <p:sp useBgFill="1">
+        <p:nvSpPr>
+          <p:cNvPr id="13" name="Rectangle 12">
+            <a:extLst>
+              <a:ext uri="{FF2B5EF4-FFF2-40B4-BE49-F238E27FC236}">
+                <a16:creationId xmlns:a16="http://schemas.microsoft.com/office/drawing/2014/main" id="{0D7B6173-1D58-48E2-83CF-37350F315F75}"/>
+              </a:ext>
+              <a:ext uri="{C183D7F6-B498-43B3-948B-1728B52AA6E4}">
+                <adec:decorative xmlns:adec="http://schemas.microsoft.com/office/drawing/2017/decorative" val="1"/>
+              </a:ext>
+            </a:extLst>
+          </p:cNvPr>
+          <p:cNvSpPr>
+            <a:spLocks noGrp="1" noRot="1" noChangeAspect="1" noMove="1" noResize="1" noEditPoints="1" noAdjustHandles="1" noChangeArrowheads="1" noChangeShapeType="1" noTextEdit="1"/>
+          </p:cNvSpPr>
+          <p:nvPr>
+            <p:extLst>
+              <p:ext uri="{386F3935-93C4-4BCD-93E2-E3B085C9AB24}">
+                <p16:designElem xmlns:p16="http://schemas.microsoft.com/office/powerpoint/2015/main" val="1"/>
+              </p:ext>
+            </p:extLst>
+          </p:nvPr>
+        </p:nvSpPr>
+        <p:spPr>
+          <a:xfrm>
+            <a:off x="0" y="-1"/>
+            <a:ext cx="12188952" cy="6858000"/>
+          </a:xfrm>
+          <a:prstGeom prst="rect">
+            <a:avLst/>
+          </a:prstGeom>
+          <a:ln>
+            <a:noFill/>
+          </a:ln>
+        </p:spPr>
+        <p:style>
+          <a:lnRef idx="2">
+            <a:schemeClr val="accent1">
+              <a:shade val="50000"/>
+            </a:schemeClr>
+          </a:lnRef>
+          <a:fillRef idx="1">
+            <a:schemeClr val="accent1"/>
+          </a:fillRef>
+          <a:effectRef idx="0">
+            <a:schemeClr val="accent1"/>
+          </a:effectRef>
+          <a:fontRef idx="minor">
+            <a:schemeClr val="lt1"/>
+          </a:fontRef>
+        </p:style>
+        <p:txBody>
+          <a:bodyPr rtlCol="0" anchor="ctr"/>
+          <a:lstStyle/>
+          <a:p>
+            <a:pPr algn="ctr"/>
+            <a:endParaRPr lang="en-US"/>
+          </a:p>
+        </p:txBody>
+      </p:sp>
+      <p:sp>
+        <p:nvSpPr>
+          <p:cNvPr id="15" name="Rectangle 14">
+            <a:extLst>
+              <a:ext uri="{FF2B5EF4-FFF2-40B4-BE49-F238E27FC236}">
+                <a16:creationId xmlns:a16="http://schemas.microsoft.com/office/drawing/2014/main" id="{35D813D1-BA6B-40B4-A101-04BB89445561}"/>
+              </a:ext>
+              <a:ext uri="{C183D7F6-B498-43B3-948B-1728B52AA6E4}">
+                <adec:decorative xmlns:adec="http://schemas.microsoft.com/office/drawing/2017/decorative" val="1"/>
+              </a:ext>
+            </a:extLst>
+          </p:cNvPr>
+          <p:cNvSpPr>
+            <a:spLocks noGrp="1" noRot="1" noChangeAspect="1" noMove="1" noResize="1" noEditPoints="1" noAdjustHandles="1" noChangeArrowheads="1" noChangeShapeType="1" noTextEdit="1"/>
+          </p:cNvSpPr>
+          <p:nvPr>
+            <p:extLst>
+              <p:ext uri="{386F3935-93C4-4BCD-93E2-E3B085C9AB24}">
+                <p16:designElem xmlns:p16="http://schemas.microsoft.com/office/powerpoint/2015/main" val="1"/>
+              </p:ext>
+            </p:extLst>
+          </p:nvPr>
+        </p:nvSpPr>
+        <p:spPr>
+          <a:xfrm>
+            <a:off x="0" y="0"/>
+            <a:ext cx="12188952" cy="6858000"/>
+          </a:xfrm>
+          <a:prstGeom prst="rect">
+            <a:avLst/>
+          </a:prstGeom>
+          <a:solidFill>
+            <a:schemeClr val="bg2">
+              <a:alpha val="50000"/>
+            </a:schemeClr>
+          </a:solidFill>
+          <a:ln>
+            <a:noFill/>
+          </a:ln>
+        </p:spPr>
+        <p:style>
+          <a:lnRef idx="2">
+            <a:schemeClr val="accent1">
+              <a:shade val="50000"/>
+            </a:schemeClr>
+          </a:lnRef>
+          <a:fillRef idx="1">
+            <a:schemeClr val="accent1"/>
+          </a:fillRef>
+          <a:effectRef idx="0">
+            <a:schemeClr val="accent1"/>
+          </a:effectRef>
+          <a:fontRef idx="minor">
+            <a:schemeClr val="lt1"/>
+          </a:fontRef>
+        </p:style>
+        <p:txBody>
+          <a:bodyPr rtlCol="0" anchor="ctr"/>
+          <a:lstStyle/>
+          <a:p>
+            <a:pPr algn="ctr"/>
+            <a:endParaRPr lang="en-US" dirty="0"/>
+          </a:p>
+        </p:txBody>
+      </p:sp>
+      <p:pic>
+        <p:nvPicPr>
+          <p:cNvPr id="20" name="Picture 19">
+            <a:extLst>
+              <a:ext uri="{FF2B5EF4-FFF2-40B4-BE49-F238E27FC236}">
+                <a16:creationId xmlns:a16="http://schemas.microsoft.com/office/drawing/2014/main" id="{B0DAC8FB-A162-44E3-A606-C855A03A5B09}"/>
+              </a:ext>
+              <a:ext uri="{C183D7F6-B498-43B3-948B-1728B52AA6E4}">
+                <adec:decorative xmlns:adec="http://schemas.microsoft.com/office/drawing/2017/decorative" val="1"/>
+              </a:ext>
+            </a:extLst>
+          </p:cNvPr>
+          <p:cNvPicPr>
+            <a:picLocks noGrp="1" noRot="1" noChangeAspect="1" noMove="1" noResize="1" noEditPoints="1" noAdjustHandles="1" noChangeArrowheads="1" noChangeShapeType="1" noCrop="1"/>
+          </p:cNvPicPr>
+          <p:nvPr>
+            <p:extLst>
+              <p:ext uri="{386F3935-93C4-4BCD-93E2-E3B085C9AB24}">
+                <p16:designElem xmlns:p16="http://schemas.microsoft.com/office/powerpoint/2015/main" val="1"/>
+              </p:ext>
+            </p:extLst>
+          </p:nvPr>
+        </p:nvPicPr>
+        <p:blipFill>
+          <a:blip r:embed="rId2">
+            <a:extLst>
+              <a:ext uri="{28A0092B-C50C-407E-A947-70E740481C1C}">
+                <a14:useLocalDpi xmlns:a14="http://schemas.microsoft.com/office/drawing/2010/main" val="0"/>
+              </a:ext>
+            </a:extLst>
+          </a:blip>
+          <a:stretch>
+            <a:fillRect/>
+          </a:stretch>
+        </p:blipFill>
+        <p:spPr>
+          <a:xfrm>
+            <a:off x="0" y="0"/>
+            <a:ext cx="12188952" cy="6862380"/>
+          </a:xfrm>
+          <a:prstGeom prst="rect">
+            <a:avLst/>
+          </a:prstGeom>
+        </p:spPr>
+      </p:pic>
+      <p:sp>
+        <p:nvSpPr>
+          <p:cNvPr id="19" name="Rectangle 18">
+            <a:extLst>
+              <a:ext uri="{FF2B5EF4-FFF2-40B4-BE49-F238E27FC236}">
+                <a16:creationId xmlns:a16="http://schemas.microsoft.com/office/drawing/2014/main" id="{21BDEC81-16A7-4451-B893-C15000083B77}"/>
+              </a:ext>
+              <a:ext uri="{C183D7F6-B498-43B3-948B-1728B52AA6E4}">
+                <adec:decorative xmlns:adec="http://schemas.microsoft.com/office/drawing/2017/decorative" val="1"/>
+              </a:ext>
+            </a:extLst>
+          </p:cNvPr>
+          <p:cNvSpPr>
+            <a:spLocks noGrp="1" noRot="1" noChangeAspect="1" noMove="1" noResize="1" noEditPoints="1" noAdjustHandles="1" noChangeArrowheads="1" noChangeShapeType="1" noTextEdit="1"/>
+          </p:cNvSpPr>
+          <p:nvPr>
+            <p:extLst>
+              <p:ext uri="{386F3935-93C4-4BCD-93E2-E3B085C9AB24}">
+                <p16:designElem xmlns:p16="http://schemas.microsoft.com/office/powerpoint/2015/main" val="1"/>
+              </p:ext>
+            </p:extLst>
+          </p:nvPr>
+        </p:nvSpPr>
+        <p:spPr>
+          <a:xfrm>
+            <a:off x="0" y="0"/>
+            <a:ext cx="12188952" cy="6858000"/>
+          </a:xfrm>
+          <a:prstGeom prst="rect">
+            <a:avLst/>
+          </a:prstGeom>
+          <a:solidFill>
+            <a:schemeClr val="accent1">
+              <a:alpha val="20000"/>
+            </a:schemeClr>
+          </a:solidFill>
+          <a:ln>
+            <a:noFill/>
+          </a:ln>
+        </p:spPr>
+        <p:style>
+          <a:lnRef idx="2">
+            <a:schemeClr val="accent1">
+              <a:shade val="50000"/>
+            </a:schemeClr>
+          </a:lnRef>
+          <a:fillRef idx="1">
+            <a:schemeClr val="accent1"/>
+          </a:fillRef>
+          <a:effectRef idx="0">
+            <a:schemeClr val="accent1"/>
+          </a:effectRef>
+          <a:fontRef idx="minor">
+            <a:schemeClr val="lt1"/>
+          </a:fontRef>
+        </p:style>
+        <p:txBody>
+          <a:bodyPr rtlCol="0" anchor="ctr"/>
+          <a:lstStyle/>
+          <a:p>
+            <a:pPr algn="ctr"/>
+            <a:endParaRPr lang="en-US" dirty="0"/>
+          </a:p>
+        </p:txBody>
+      </p:sp>
+      <p:sp>
+        <p:nvSpPr>
+          <p:cNvPr id="21" name="Rectangle 20">
+            <a:extLst>
+              <a:ext uri="{FF2B5EF4-FFF2-40B4-BE49-F238E27FC236}">
+                <a16:creationId xmlns:a16="http://schemas.microsoft.com/office/drawing/2014/main" id="{AEA3DFA5-2D7B-4989-8ED7-8321EC114CF1}"/>
+              </a:ext>
+              <a:ext uri="{C183D7F6-B498-43B3-948B-1728B52AA6E4}">
+                <adec:decorative xmlns:adec="http://schemas.microsoft.com/office/drawing/2017/decorative" val="1"/>
+              </a:ext>
+            </a:extLst>
+          </p:cNvPr>
+          <p:cNvSpPr>
+            <a:spLocks noGrp="1" noRot="1" noChangeAspect="1" noMove="1" noResize="1" noEditPoints="1" noAdjustHandles="1" noChangeArrowheads="1" noChangeShapeType="1" noTextEdit="1"/>
+          </p:cNvSpPr>
+          <p:nvPr>
+            <p:extLst>
+              <p:ext uri="{386F3935-93C4-4BCD-93E2-E3B085C9AB24}">
+                <p16:designElem xmlns:p16="http://schemas.microsoft.com/office/powerpoint/2015/main" val="1"/>
+              </p:ext>
+            </p:extLst>
+          </p:nvPr>
+        </p:nvSpPr>
+        <p:spPr>
+          <a:xfrm>
+            <a:off x="536678" y="0"/>
+            <a:ext cx="11145980" cy="6870723"/>
+          </a:xfrm>
+          <a:prstGeom prst="rect">
+            <a:avLst/>
+          </a:prstGeom>
+          <a:solidFill>
+            <a:schemeClr val="bg1"/>
+          </a:solidFill>
+          <a:ln w="34925">
+            <a:noFill/>
+          </a:ln>
+        </p:spPr>
+        <p:style>
+          <a:lnRef idx="2">
+            <a:schemeClr val="accent1">
+              <a:shade val="50000"/>
+            </a:schemeClr>
+          </a:lnRef>
+          <a:fillRef idx="1">
+            <a:schemeClr val="accent1"/>
+          </a:fillRef>
+          <a:effectRef idx="0">
+            <a:schemeClr val="accent1"/>
+          </a:effectRef>
+          <a:fontRef idx="minor">
+            <a:schemeClr val="lt1"/>
+          </a:fontRef>
+        </p:style>
+        <p:txBody>
+          <a:bodyPr rtlCol="0" anchor="ctr"/>
+          <a:lstStyle/>
+          <a:p>
+            <a:pPr algn="ctr"/>
+            <a:endParaRPr lang="en-US" b="1">
+              <a:ln w="22225">
+                <a:solidFill>
+                  <a:schemeClr val="accent2"/>
+                </a:solidFill>
+                <a:prstDash val="solid"/>
+              </a:ln>
+              <a:solidFill>
+                <a:schemeClr val="accent2">
+                  <a:lumMod val="40000"/>
+                  <a:lumOff val="60000"/>
+                </a:schemeClr>
+              </a:solidFill>
+            </a:endParaRPr>
+          </a:p>
+        </p:txBody>
+      </p:sp>
+      <p:sp>
+        <p:nvSpPr>
+          <p:cNvPr id="3" name="TextBox 2">
+            <a:extLst>
+              <a:ext uri="{FF2B5EF4-FFF2-40B4-BE49-F238E27FC236}">
+                <a16:creationId xmlns:a16="http://schemas.microsoft.com/office/drawing/2014/main" id="{E7448D63-01AD-029B-8953-68275564C5B6}"/>
+              </a:ext>
+            </a:extLst>
+          </p:cNvPr>
+          <p:cNvSpPr txBox="1"/>
+          <p:nvPr/>
+        </p:nvSpPr>
+        <p:spPr>
+          <a:xfrm>
+            <a:off x="1191966" y="2965593"/>
+            <a:ext cx="3629555" cy="2941544"/>
+          </a:xfrm>
+          <a:prstGeom prst="rect">
+            <a:avLst/>
+          </a:prstGeom>
+        </p:spPr>
+        <p:txBody>
+          <a:bodyPr vert="horz" lIns="91440" tIns="45720" rIns="91440" bIns="45720" rtlCol="0">
+            <a:normAutofit/>
+          </a:bodyPr>
+          <a:lstStyle/>
+          <a:p>
+            <a:pPr>
+              <a:lnSpc>
+                <a:spcPct val="90000"/>
+              </a:lnSpc>
+              <a:spcAft>
+                <a:spcPts val="600"/>
+              </a:spcAft>
+            </a:pPr>
+            <a:r>
+              <a:rPr lang="en-US" sz="1700" dirty="0"/>
+              <a:t>Lo </a:t>
+            </a:r>
+            <a:r>
+              <a:rPr lang="en-US" sz="1700" dirty="0" err="1"/>
+              <a:t>que</a:t>
+            </a:r>
+            <a:r>
+              <a:rPr lang="en-US" sz="1700" dirty="0"/>
+              <a:t> </a:t>
+            </a:r>
+            <a:r>
+              <a:rPr lang="en-US" sz="1700" dirty="0" err="1"/>
+              <a:t>tenemos</a:t>
+            </a:r>
+            <a:r>
+              <a:rPr lang="en-US" sz="1700" dirty="0"/>
+              <a:t> a </a:t>
+            </a:r>
+            <a:r>
+              <a:rPr lang="en-US" sz="1700" dirty="0" err="1"/>
+              <a:t>continuación</a:t>
+            </a:r>
+            <a:r>
+              <a:rPr lang="en-US" sz="1700" dirty="0"/>
+              <a:t> son las </a:t>
+            </a:r>
+            <a:r>
+              <a:rPr lang="en-US" sz="1700" dirty="0" err="1"/>
+              <a:t>ultimas</a:t>
+            </a:r>
+            <a:r>
+              <a:rPr lang="en-US" sz="1700" dirty="0"/>
+              <a:t> </a:t>
+            </a:r>
+            <a:r>
+              <a:rPr lang="en-US" sz="1700" dirty="0" err="1"/>
+              <a:t>funciones</a:t>
+            </a:r>
+            <a:r>
+              <a:rPr lang="en-US" sz="1700" dirty="0"/>
+              <a:t> con las </a:t>
+            </a:r>
+            <a:r>
+              <a:rPr lang="en-US" sz="1700" dirty="0" err="1"/>
+              <a:t>cuales</a:t>
+            </a:r>
+            <a:r>
+              <a:rPr lang="en-US" sz="1700" dirty="0"/>
+              <a:t> </a:t>
+            </a:r>
+            <a:r>
+              <a:rPr lang="en-US" sz="1700" dirty="0" err="1"/>
+              <a:t>cuenta</a:t>
+            </a:r>
+            <a:r>
+              <a:rPr lang="en-US" sz="1700" dirty="0"/>
+              <a:t> el </a:t>
+            </a:r>
+            <a:r>
+              <a:rPr lang="en-US" sz="1700" dirty="0" err="1"/>
+              <a:t>usuario</a:t>
+            </a:r>
+            <a:r>
+              <a:rPr lang="en-US" sz="1700" dirty="0"/>
+              <a:t> de </a:t>
+            </a:r>
+            <a:r>
+              <a:rPr lang="en-US" sz="1700" dirty="0" err="1"/>
+              <a:t>rol</a:t>
+            </a:r>
+            <a:r>
+              <a:rPr lang="en-US" sz="1700" dirty="0"/>
+              <a:t> de </a:t>
+            </a:r>
+            <a:r>
+              <a:rPr lang="en-US" sz="1700" dirty="0" err="1"/>
+              <a:t>vendedor</a:t>
+            </a:r>
+            <a:r>
+              <a:rPr lang="en-US" sz="1700" dirty="0"/>
+              <a:t>, </a:t>
+            </a:r>
+            <a:r>
+              <a:rPr lang="en-US" sz="1700" dirty="0" err="1"/>
+              <a:t>estas</a:t>
+            </a:r>
+            <a:r>
+              <a:rPr lang="en-US" sz="1700" dirty="0"/>
+              <a:t> </a:t>
+            </a:r>
+            <a:r>
+              <a:rPr lang="en-US" sz="1700" dirty="0" err="1"/>
+              <a:t>funciones</a:t>
+            </a:r>
+            <a:r>
+              <a:rPr lang="en-US" sz="1700" dirty="0"/>
+              <a:t> </a:t>
+            </a:r>
+            <a:r>
+              <a:rPr lang="en-US" sz="1700" dirty="0" err="1"/>
+              <a:t>evalúan</a:t>
+            </a:r>
+            <a:r>
+              <a:rPr lang="en-US" sz="1700" dirty="0"/>
+              <a:t> tanto el </a:t>
+            </a:r>
+            <a:r>
+              <a:rPr lang="en-US" sz="1700" dirty="0" err="1"/>
+              <a:t>rendimiento</a:t>
+            </a:r>
+            <a:r>
+              <a:rPr lang="en-US" sz="1700" dirty="0"/>
+              <a:t> </a:t>
+            </a:r>
+            <a:r>
+              <a:rPr lang="en-US" sz="1700" dirty="0" err="1"/>
+              <a:t>como</a:t>
+            </a:r>
+            <a:r>
+              <a:rPr lang="en-US" sz="1700" dirty="0"/>
+              <a:t> el stock restante del </a:t>
+            </a:r>
+            <a:r>
+              <a:rPr lang="en-US" sz="1700" dirty="0" err="1"/>
+              <a:t>almacen</a:t>
+            </a:r>
+            <a:r>
+              <a:rPr lang="en-US" sz="1700" dirty="0"/>
+              <a:t>, lo </a:t>
+            </a:r>
+            <a:r>
+              <a:rPr lang="en-US" sz="1700" dirty="0" err="1"/>
+              <a:t>cual</a:t>
+            </a:r>
+            <a:r>
+              <a:rPr lang="en-US" sz="1700" dirty="0"/>
+              <a:t> </a:t>
+            </a:r>
+            <a:r>
+              <a:rPr lang="en-US" sz="1700" dirty="0" err="1"/>
+              <a:t>calculará</a:t>
+            </a:r>
+            <a:r>
+              <a:rPr lang="en-US" sz="1700" dirty="0"/>
+              <a:t> las </a:t>
+            </a:r>
+            <a:r>
+              <a:rPr lang="en-US" sz="1700" dirty="0" err="1"/>
+              <a:t>ventas</a:t>
+            </a:r>
+            <a:r>
+              <a:rPr lang="en-US" sz="1700" dirty="0"/>
+              <a:t> </a:t>
+            </a:r>
+            <a:r>
+              <a:rPr lang="en-US" sz="1700" dirty="0" err="1"/>
+              <a:t>que</a:t>
+            </a:r>
+            <a:r>
+              <a:rPr lang="en-US" sz="1700" dirty="0"/>
+              <a:t> </a:t>
+            </a:r>
+            <a:r>
+              <a:rPr lang="en-US" sz="1700" dirty="0" err="1"/>
+              <a:t>tendrían</a:t>
+            </a:r>
+            <a:r>
+              <a:rPr lang="en-US" sz="1700" dirty="0"/>
+              <a:t> </a:t>
+            </a:r>
+            <a:r>
+              <a:rPr lang="en-US" sz="1700" dirty="0" err="1"/>
+              <a:t>que</a:t>
+            </a:r>
+            <a:r>
+              <a:rPr lang="en-US" sz="1700" dirty="0"/>
+              <a:t> </a:t>
+            </a:r>
+            <a:r>
+              <a:rPr lang="en-US" sz="1700" dirty="0" err="1"/>
+              <a:t>haber</a:t>
+            </a:r>
+            <a:r>
+              <a:rPr lang="en-US" sz="1700" dirty="0"/>
+              <a:t> </a:t>
+            </a:r>
+            <a:r>
+              <a:rPr lang="en-US" sz="1700" dirty="0" err="1"/>
+              <a:t>realizado</a:t>
+            </a:r>
+            <a:r>
+              <a:rPr lang="en-US" sz="1700" dirty="0"/>
+              <a:t> </a:t>
+            </a:r>
+            <a:r>
+              <a:rPr lang="en-US" sz="1700" dirty="0" err="1"/>
+              <a:t>los</a:t>
+            </a:r>
+            <a:r>
+              <a:rPr lang="en-US" sz="1700" dirty="0"/>
+              <a:t> </a:t>
+            </a:r>
+            <a:r>
+              <a:rPr lang="en-US" sz="1700" dirty="0" err="1"/>
+              <a:t>vendedores</a:t>
+            </a:r>
+            <a:r>
+              <a:rPr lang="en-US" sz="1700" dirty="0"/>
+              <a:t> </a:t>
+            </a:r>
+            <a:r>
+              <a:rPr lang="en-US" sz="1700" dirty="0" err="1"/>
+              <a:t>en</a:t>
+            </a:r>
+            <a:r>
+              <a:rPr lang="en-US" sz="1700" dirty="0"/>
+              <a:t> total, con lo </a:t>
+            </a:r>
+            <a:r>
+              <a:rPr lang="en-US" sz="1700" dirty="0" err="1"/>
+              <a:t>cual</a:t>
+            </a:r>
+            <a:r>
+              <a:rPr lang="en-US" sz="1700" dirty="0"/>
+              <a:t>, el </a:t>
+            </a:r>
+            <a:r>
+              <a:rPr lang="en-US" sz="1700" dirty="0" err="1"/>
+              <a:t>administrador</a:t>
+            </a:r>
+            <a:r>
+              <a:rPr lang="en-US" sz="1700" dirty="0"/>
+              <a:t> </a:t>
+            </a:r>
+            <a:r>
+              <a:rPr lang="en-US" sz="1700" dirty="0" err="1"/>
+              <a:t>podrá</a:t>
+            </a:r>
+            <a:r>
+              <a:rPr lang="en-US" sz="1700" dirty="0"/>
+              <a:t> </a:t>
+            </a:r>
+            <a:r>
+              <a:rPr lang="en-US" sz="1700" dirty="0" err="1"/>
+              <a:t>hacer</a:t>
+            </a:r>
+            <a:r>
+              <a:rPr lang="en-US" sz="1700" dirty="0"/>
+              <a:t> un </a:t>
+            </a:r>
+            <a:r>
+              <a:rPr lang="en-US" sz="1700" dirty="0" err="1"/>
+              <a:t>mejor</a:t>
+            </a:r>
+            <a:r>
+              <a:rPr lang="en-US" sz="1700" dirty="0"/>
+              <a:t> </a:t>
+            </a:r>
+            <a:r>
+              <a:rPr lang="en-US" sz="1700" dirty="0" err="1"/>
+              <a:t>calculo</a:t>
+            </a:r>
+            <a:r>
+              <a:rPr lang="en-US" sz="1700" dirty="0"/>
+              <a:t> de las </a:t>
+            </a:r>
+            <a:r>
+              <a:rPr lang="en-US" sz="1700" dirty="0" err="1"/>
+              <a:t>ganancias</a:t>
+            </a:r>
+            <a:r>
+              <a:rPr lang="en-US" sz="1700" dirty="0"/>
+              <a:t> y </a:t>
+            </a:r>
+            <a:r>
+              <a:rPr lang="en-US" sz="1700" dirty="0" err="1"/>
+              <a:t>repartir</a:t>
+            </a:r>
+            <a:r>
+              <a:rPr lang="en-US" sz="1700" dirty="0"/>
+              <a:t> </a:t>
+            </a:r>
+            <a:r>
+              <a:rPr lang="en-US" sz="1700" dirty="0" err="1"/>
+              <a:t>dichas</a:t>
+            </a:r>
+            <a:r>
+              <a:rPr lang="en-US" sz="1700" dirty="0"/>
+              <a:t> </a:t>
+            </a:r>
+            <a:r>
+              <a:rPr lang="en-US" sz="1700" dirty="0" err="1"/>
+              <a:t>ganancias</a:t>
+            </a:r>
+            <a:r>
+              <a:rPr lang="en-US" sz="1700" dirty="0"/>
+              <a:t> entre </a:t>
+            </a:r>
+            <a:r>
+              <a:rPr lang="en-US" sz="1700" dirty="0" err="1"/>
+              <a:t>salarios</a:t>
+            </a:r>
+            <a:r>
+              <a:rPr lang="en-US" sz="1700" dirty="0"/>
+              <a:t>.</a:t>
+            </a:r>
+          </a:p>
+        </p:txBody>
+      </p:sp>
       <p:pic>
         <p:nvPicPr>
           <p:cNvPr id="6" name="Content Placeholder 5">
             <a:extLst>
               <a:ext uri="{FF2B5EF4-FFF2-40B4-BE49-F238E27FC236}">
                 <a16:creationId xmlns:a16="http://schemas.microsoft.com/office/drawing/2014/main" id="{D1F33235-654D-695D-6C23-D56C2C425159}"/>
+              </a:ext>
+            </a:extLst>
+          </p:cNvPr>
+          <p:cNvPicPr>
+            <a:picLocks noGrp="1" noChangeAspect="1"/>
+          </p:cNvPicPr>
+          <p:nvPr>
+            <p:ph sz="half" idx="1"/>
+          </p:nvPr>
+        </p:nvPicPr>
+        <p:blipFill>
+          <a:blip r:embed="rId3"/>
+          <a:stretch>
+            <a:fillRect/>
+          </a:stretch>
+        </p:blipFill>
+        <p:spPr>
+          <a:xfrm>
+            <a:off x="5803072" y="171716"/>
+            <a:ext cx="5087393" cy="3179620"/>
+          </a:xfrm>
+          <a:prstGeom prst="rect">
+            <a:avLst/>
+          </a:prstGeom>
+        </p:spPr>
+      </p:pic>
+      <p:pic>
+        <p:nvPicPr>
+          <p:cNvPr id="8" name="Content Placeholder 7">
+            <a:extLst>
+              <a:ext uri="{FF2B5EF4-FFF2-40B4-BE49-F238E27FC236}">
+                <a16:creationId xmlns:a16="http://schemas.microsoft.com/office/drawing/2014/main" id="{91A5C107-E17E-082A-7586-34D709115366}"/>
+              </a:ext>
+            </a:extLst>
+          </p:cNvPr>
+          <p:cNvPicPr>
+            <a:picLocks noGrp="1" noChangeAspect="1"/>
+          </p:cNvPicPr>
+          <p:nvPr>
+            <p:ph sz="half" idx="2"/>
+          </p:nvPr>
+        </p:nvPicPr>
+        <p:blipFill>
+          <a:blip r:embed="rId4"/>
+          <a:stretch>
+            <a:fillRect/>
+          </a:stretch>
+        </p:blipFill>
+        <p:spPr>
+          <a:xfrm>
+            <a:off x="5754330" y="3498320"/>
+            <a:ext cx="5191215" cy="3179620"/>
+          </a:xfrm>
+          <a:prstGeom prst="rect">
+            <a:avLst/>
+          </a:prstGeom>
+        </p:spPr>
+      </p:pic>
+    </p:spTree>
+    <p:extLst>
+      <p:ext uri="{BB962C8B-B14F-4D97-AF65-F5344CB8AC3E}">
+        <p14:creationId xmlns:p14="http://schemas.microsoft.com/office/powerpoint/2010/main" val="411844111"/>
+      </p:ext>
+    </p:extLst>
+  </p:cSld>
+  <p:clrMapOvr>
+    <a:masterClrMapping/>
+  </p:clrMapOvr>
+</p:sld>
+</file>
+
+<file path=ppt/slides/slide13.xml><?xml version="1.0" encoding="utf-8"?>
+<p:sld xmlns:a="http://schemas.openxmlformats.org/drawingml/2006/main" xmlns:r="http://schemas.openxmlformats.org/officeDocument/2006/relationships" xmlns:p="http://schemas.openxmlformats.org/presentationml/2006/main">
+  <p:cSld>
+    <p:bg>
+      <p:bgPr>
+        <a:solidFill>
+          <a:schemeClr val="bg1"/>
+        </a:solidFill>
+        <a:effectLst/>
+      </p:bgPr>
+    </p:bg>
+    <p:spTree>
+      <p:nvGrpSpPr>
+        <p:cNvPr id="1" name=""/>
+        <p:cNvGrpSpPr/>
+        <p:nvPr/>
+      </p:nvGrpSpPr>
+      <p:grpSpPr>
+        <a:xfrm>
+          <a:off x="0" y="0"/>
+          <a:ext cx="0" cy="0"/>
+          <a:chOff x="0" y="0"/>
+          <a:chExt cx="0" cy="0"/>
+        </a:xfrm>
+      </p:grpSpPr>
+      <p:sp useBgFill="1">
+        <p:nvSpPr>
+          <p:cNvPr id="34" name="Rectangle 33">
+            <a:extLst>
+              <a:ext uri="{FF2B5EF4-FFF2-40B4-BE49-F238E27FC236}">
+                <a16:creationId xmlns:a16="http://schemas.microsoft.com/office/drawing/2014/main" id="{1022CA72-2A63-428F-B586-37BA5AB6D265}"/>
+              </a:ext>
+              <a:ext uri="{C183D7F6-B498-43B3-948B-1728B52AA6E4}">
+                <adec:decorative xmlns:adec="http://schemas.microsoft.com/office/drawing/2017/decorative" val="1"/>
+              </a:ext>
+            </a:extLst>
+          </p:cNvPr>
+          <p:cNvSpPr>
+            <a:spLocks noGrp="1" noRot="1" noChangeAspect="1" noMove="1" noResize="1" noEditPoints="1" noAdjustHandles="1" noChangeArrowheads="1" noChangeShapeType="1" noTextEdit="1"/>
+          </p:cNvSpPr>
+          <p:nvPr>
+            <p:extLst>
+              <p:ext uri="{386F3935-93C4-4BCD-93E2-E3B085C9AB24}">
+                <p16:designElem xmlns:p16="http://schemas.microsoft.com/office/powerpoint/2015/main" val="1"/>
+              </p:ext>
+            </p:extLst>
+          </p:nvPr>
+        </p:nvSpPr>
+        <p:spPr>
+          <a:xfrm>
+            <a:off x="0" y="0"/>
+            <a:ext cx="12191999" cy="6857365"/>
+          </a:xfrm>
+          <a:prstGeom prst="rect">
+            <a:avLst/>
+          </a:prstGeom>
+          <a:ln>
+            <a:noFill/>
+          </a:ln>
+        </p:spPr>
+        <p:style>
+          <a:lnRef idx="2">
+            <a:schemeClr val="accent1">
+              <a:shade val="50000"/>
+            </a:schemeClr>
+          </a:lnRef>
+          <a:fillRef idx="1">
+            <a:schemeClr val="accent1"/>
+          </a:fillRef>
+          <a:effectRef idx="0">
+            <a:schemeClr val="accent1"/>
+          </a:effectRef>
+          <a:fontRef idx="minor">
+            <a:schemeClr val="lt1"/>
+          </a:fontRef>
+        </p:style>
+        <p:txBody>
+          <a:bodyPr rtlCol="0" anchor="ctr"/>
+          <a:lstStyle/>
+          <a:p>
+            <a:pPr algn="ctr"/>
+            <a:endParaRPr lang="en-US"/>
+          </a:p>
+        </p:txBody>
+      </p:sp>
+      <p:sp>
+        <p:nvSpPr>
+          <p:cNvPr id="36" name="Rectangle 35">
+            <a:extLst>
+              <a:ext uri="{FF2B5EF4-FFF2-40B4-BE49-F238E27FC236}">
+                <a16:creationId xmlns:a16="http://schemas.microsoft.com/office/drawing/2014/main" id="{95C8260E-968F-44E8-A823-ABB431311926}"/>
+              </a:ext>
+              <a:ext uri="{C183D7F6-B498-43B3-948B-1728B52AA6E4}">
+                <adec:decorative xmlns:adec="http://schemas.microsoft.com/office/drawing/2017/decorative" val="1"/>
+              </a:ext>
+            </a:extLst>
+          </p:cNvPr>
+          <p:cNvSpPr>
+            <a:spLocks noGrp="1" noRot="1" noChangeAspect="1" noMove="1" noResize="1" noEditPoints="1" noAdjustHandles="1" noChangeArrowheads="1" noChangeShapeType="1" noTextEdit="1"/>
+          </p:cNvSpPr>
+          <p:nvPr>
+            <p:extLst>
+              <p:ext uri="{386F3935-93C4-4BCD-93E2-E3B085C9AB24}">
+                <p16:designElem xmlns:p16="http://schemas.microsoft.com/office/powerpoint/2015/main" val="1"/>
+              </p:ext>
+            </p:extLst>
+          </p:nvPr>
+        </p:nvSpPr>
+        <p:spPr>
+          <a:xfrm>
+            <a:off x="0" y="0"/>
+            <a:ext cx="12192000" cy="865848"/>
+          </a:xfrm>
+          <a:prstGeom prst="rect">
+            <a:avLst/>
+          </a:prstGeom>
+          <a:solidFill>
+            <a:schemeClr val="accent4"/>
+          </a:solidFill>
+          <a:ln>
+            <a:noFill/>
+          </a:ln>
+        </p:spPr>
+        <p:style>
+          <a:lnRef idx="2">
+            <a:schemeClr val="accent1">
+              <a:shade val="50000"/>
+            </a:schemeClr>
+          </a:lnRef>
+          <a:fillRef idx="1">
+            <a:schemeClr val="accent1"/>
+          </a:fillRef>
+          <a:effectRef idx="0">
+            <a:schemeClr val="accent1"/>
+          </a:effectRef>
+          <a:fontRef idx="minor">
+            <a:schemeClr val="lt1"/>
+          </a:fontRef>
+        </p:style>
+        <p:txBody>
+          <a:bodyPr rtlCol="0" anchor="ctr"/>
+          <a:lstStyle/>
+          <a:p>
+            <a:pPr algn="ctr"/>
+            <a:endParaRPr lang="en-US"/>
+          </a:p>
+        </p:txBody>
+      </p:sp>
+      <p:sp>
+        <p:nvSpPr>
+          <p:cNvPr id="38" name="Rectangle 37">
+            <a:extLst>
+              <a:ext uri="{FF2B5EF4-FFF2-40B4-BE49-F238E27FC236}">
+                <a16:creationId xmlns:a16="http://schemas.microsoft.com/office/drawing/2014/main" id="{2C1BBA94-3F40-40AA-8BB9-E69E25E537C1}"/>
+              </a:ext>
+              <a:ext uri="{C183D7F6-B498-43B3-948B-1728B52AA6E4}">
+                <adec:decorative xmlns:adec="http://schemas.microsoft.com/office/drawing/2017/decorative" val="1"/>
+              </a:ext>
+            </a:extLst>
+          </p:cNvPr>
+          <p:cNvSpPr>
+            <a:spLocks noGrp="1" noRot="1" noChangeAspect="1" noMove="1" noResize="1" noEditPoints="1" noAdjustHandles="1" noChangeArrowheads="1" noChangeShapeType="1" noTextEdit="1"/>
+          </p:cNvSpPr>
+          <p:nvPr>
+            <p:extLst>
+              <p:ext uri="{386F3935-93C4-4BCD-93E2-E3B085C9AB24}">
+                <p16:designElem xmlns:p16="http://schemas.microsoft.com/office/powerpoint/2015/main" val="1"/>
+              </p:ext>
+            </p:extLst>
+          </p:nvPr>
+        </p:nvSpPr>
+        <p:spPr>
+          <a:xfrm>
+            <a:off x="517889" y="-1"/>
+            <a:ext cx="11231745" cy="4131425"/>
+          </a:xfrm>
+          <a:prstGeom prst="rect">
+            <a:avLst/>
+          </a:prstGeom>
+          <a:solidFill>
+            <a:schemeClr val="bg1"/>
+          </a:solidFill>
+          <a:ln>
+            <a:noFill/>
+          </a:ln>
+          <a:effectLst>
+            <a:outerShdw blurRad="139700" dist="127000" dir="5400000" algn="t" rotWithShape="0">
+              <a:prstClr val="black">
+                <a:alpha val="15000"/>
+              </a:prstClr>
+            </a:outerShdw>
+          </a:effectLst>
+        </p:spPr>
+        <p:style>
+          <a:lnRef idx="2">
+            <a:schemeClr val="accent1">
+              <a:shade val="50000"/>
+            </a:schemeClr>
+          </a:lnRef>
+          <a:fillRef idx="1">
+            <a:schemeClr val="accent1"/>
+          </a:fillRef>
+          <a:effectRef idx="0">
+            <a:schemeClr val="accent1"/>
+          </a:effectRef>
+          <a:fontRef idx="minor">
+            <a:schemeClr val="lt1"/>
+          </a:fontRef>
+        </p:style>
+        <p:txBody>
+          <a:bodyPr rtlCol="0" anchor="ctr"/>
+          <a:lstStyle/>
+          <a:p>
+            <a:pPr algn="ctr"/>
+            <a:endParaRPr lang="en-US"/>
+          </a:p>
+        </p:txBody>
+      </p:sp>
+      <p:pic>
+        <p:nvPicPr>
+          <p:cNvPr id="6" name="Content Placeholder 5">
+            <a:extLst>
+              <a:ext uri="{FF2B5EF4-FFF2-40B4-BE49-F238E27FC236}">
+                <a16:creationId xmlns:a16="http://schemas.microsoft.com/office/drawing/2014/main" id="{B1AEB669-B7D1-BA19-0928-885CFE151C81}"/>
               </a:ext>
             </a:extLst>
           </p:cNvPr>
@@ -4737,8 +5697,8 @@
         </p:blipFill>
         <p:spPr>
           <a:xfrm>
-            <a:off x="6172200" y="193061"/>
-            <a:ext cx="5181600" cy="3235939"/>
+            <a:off x="1431691" y="364143"/>
+            <a:ext cx="3949812" cy="3426462"/>
           </a:xfrm>
           <a:prstGeom prst="rect">
             <a:avLst/>
@@ -4750,7 +5710,7 @@
           <p:cNvPr id="8" name="Content Placeholder 7">
             <a:extLst>
               <a:ext uri="{FF2B5EF4-FFF2-40B4-BE49-F238E27FC236}">
-                <a16:creationId xmlns:a16="http://schemas.microsoft.com/office/drawing/2014/main" id="{91A5C107-E17E-082A-7586-34D709115366}"/>
+                <a16:creationId xmlns:a16="http://schemas.microsoft.com/office/drawing/2014/main" id="{0ECCD281-5773-5FA0-0AB8-66BDD6BC3F45}"/>
               </a:ext>
             </a:extLst>
           </p:cNvPr>
@@ -4769,8 +5729,8 @@
         </p:blipFill>
         <p:spPr>
           <a:xfrm>
-            <a:off x="6172200" y="3548584"/>
-            <a:ext cx="5181600" cy="3175236"/>
+            <a:off x="6297264" y="1351801"/>
+            <a:ext cx="5136795" cy="1451144"/>
           </a:xfrm>
           <a:prstGeom prst="rect">
             <a:avLst/>
@@ -4779,10 +5739,73 @@
       </p:pic>
       <p:sp>
         <p:nvSpPr>
-          <p:cNvPr id="3" name="TextBox 2">
+          <p:cNvPr id="40" name="Rectangle 39">
             <a:extLst>
               <a:ext uri="{FF2B5EF4-FFF2-40B4-BE49-F238E27FC236}">
-                <a16:creationId xmlns:a16="http://schemas.microsoft.com/office/drawing/2014/main" id="{E7448D63-01AD-029B-8953-68275564C5B6}"/>
+                <a16:creationId xmlns:a16="http://schemas.microsoft.com/office/drawing/2014/main" id="{FE43805F-24A6-46A4-B19B-54F28347355C}"/>
+              </a:ext>
+              <a:ext uri="{C183D7F6-B498-43B3-948B-1728B52AA6E4}">
+                <adec:decorative xmlns:adec="http://schemas.microsoft.com/office/drawing/2017/decorative" val="1"/>
+              </a:ext>
+            </a:extLst>
+          </p:cNvPr>
+          <p:cNvSpPr>
+            <a:spLocks noGrp="1" noRot="1" noChangeAspect="1" noMove="1" noResize="1" noEditPoints="1" noAdjustHandles="1" noChangeArrowheads="1" noChangeShapeType="1" noTextEdit="1"/>
+          </p:cNvSpPr>
+          <p:nvPr>
+            <p:extLst>
+              <p:ext uri="{386F3935-93C4-4BCD-93E2-E3B085C9AB24}">
+                <p16:designElem xmlns:p16="http://schemas.microsoft.com/office/powerpoint/2015/main" val="1"/>
+              </p:ext>
+            </p:extLst>
+          </p:nvPr>
+        </p:nvSpPr>
+        <p:spPr>
+          <a:xfrm rot="5400000" flipH="1">
+            <a:off x="3837444" y="5460209"/>
+            <a:ext cx="1790365" cy="45719"/>
+          </a:xfrm>
+          <a:prstGeom prst="rect">
+            <a:avLst/>
+          </a:prstGeom>
+          <a:solidFill>
+            <a:schemeClr val="accent4"/>
+          </a:solidFill>
+          <a:ln>
+            <a:noFill/>
+          </a:ln>
+        </p:spPr>
+        <p:style>
+          <a:lnRef idx="2">
+            <a:schemeClr val="accent1">
+              <a:shade val="50000"/>
+            </a:schemeClr>
+          </a:lnRef>
+          <a:fillRef idx="1">
+            <a:schemeClr val="accent1"/>
+          </a:fillRef>
+          <a:effectRef idx="0">
+            <a:schemeClr val="accent1"/>
+          </a:effectRef>
+          <a:fontRef idx="minor">
+            <a:schemeClr val="lt1"/>
+          </a:fontRef>
+        </p:style>
+        <p:txBody>
+          <a:bodyPr rtlCol="0" anchor="ctr"/>
+          <a:lstStyle/>
+          <a:p>
+            <a:pPr algn="ctr"/>
+            <a:endParaRPr lang="en-US"/>
+          </a:p>
+        </p:txBody>
+      </p:sp>
+      <p:sp>
+        <p:nvSpPr>
+          <p:cNvPr id="4" name="TextBox 3">
+            <a:extLst>
+              <a:ext uri="{FF2B5EF4-FFF2-40B4-BE49-F238E27FC236}">
+                <a16:creationId xmlns:a16="http://schemas.microsoft.com/office/drawing/2014/main" id="{985CB271-E9B8-5834-7A88-350D00103DDB}"/>
               </a:ext>
             </a:extLst>
           </p:cNvPr>
@@ -4791,153 +5814,36 @@
         </p:nvSpPr>
         <p:spPr>
           <a:xfrm>
-            <a:off x="494675" y="193061"/>
-            <a:ext cx="5306518" cy="923330"/>
-          </a:xfrm>
-          <a:prstGeom prst="rect">
-            <a:avLst/>
-          </a:prstGeom>
-          <a:noFill/>
-        </p:spPr>
-        <p:txBody>
-          <a:bodyPr wrap="square" rtlCol="0">
-            <a:spAutoFit/>
-          </a:bodyPr>
-          <a:lstStyle/>
-          <a:p>
-            <a:r>
-              <a:rPr lang="es-MX" dirty="0"/>
-              <a:t>Lo que tenemos a continuación son las ultimas funciones con las cuales cuenta el usuario de rol de vendedor, estas </a:t>
-            </a:r>
-            <a:r>
-              <a:rPr lang="es-MX"/>
-              <a:t>funciones evalúan </a:t>
-            </a:r>
-            <a:endParaRPr lang="es-PE" dirty="0"/>
-          </a:p>
-        </p:txBody>
-      </p:sp>
-    </p:spTree>
-    <p:extLst>
-      <p:ext uri="{BB962C8B-B14F-4D97-AF65-F5344CB8AC3E}">
-        <p14:creationId xmlns:p14="http://schemas.microsoft.com/office/powerpoint/2010/main" val="411844111"/>
-      </p:ext>
-    </p:extLst>
-  </p:cSld>
-  <p:clrMapOvr>
-    <a:masterClrMapping/>
-  </p:clrMapOvr>
-</p:sld>
-</file>
-
-<file path=ppt/slides/slide13.xml><?xml version="1.0" encoding="utf-8"?>
-<p:sld xmlns:a="http://schemas.openxmlformats.org/drawingml/2006/main" xmlns:r="http://schemas.openxmlformats.org/officeDocument/2006/relationships" xmlns:p="http://schemas.openxmlformats.org/presentationml/2006/main">
-  <p:cSld>
-    <p:spTree>
-      <p:nvGrpSpPr>
-        <p:cNvPr id="1" name=""/>
-        <p:cNvGrpSpPr/>
-        <p:nvPr/>
-      </p:nvGrpSpPr>
-      <p:grpSpPr>
-        <a:xfrm>
-          <a:off x="0" y="0"/>
-          <a:ext cx="0" cy="0"/>
-          <a:chOff x="0" y="0"/>
-          <a:chExt cx="0" cy="0"/>
-        </a:xfrm>
-      </p:grpSpPr>
-      <p:sp>
-        <p:nvSpPr>
-          <p:cNvPr id="2" name="Title 1">
-            <a:extLst>
-              <a:ext uri="{FF2B5EF4-FFF2-40B4-BE49-F238E27FC236}">
-                <a16:creationId xmlns:a16="http://schemas.microsoft.com/office/drawing/2014/main" id="{733730BD-F85E-2BAE-0A49-3FDC0CBE6C90}"/>
-              </a:ext>
-            </a:extLst>
-          </p:cNvPr>
-          <p:cNvSpPr>
-            <a:spLocks noGrp="1"/>
-          </p:cNvSpPr>
-          <p:nvPr>
-            <p:ph type="title"/>
-          </p:nvPr>
-        </p:nvSpPr>
-        <p:spPr/>
-        <p:txBody>
-          <a:bodyPr>
-            <a:normAutofit/>
-          </a:bodyPr>
-          <a:lstStyle/>
-          <a:p>
-            <a:endParaRPr lang="es-PE" sz="1100" dirty="0"/>
-          </a:p>
-        </p:txBody>
-      </p:sp>
-      <p:pic>
-        <p:nvPicPr>
-          <p:cNvPr id="6" name="Content Placeholder 5">
-            <a:extLst>
-              <a:ext uri="{FF2B5EF4-FFF2-40B4-BE49-F238E27FC236}">
-                <a16:creationId xmlns:a16="http://schemas.microsoft.com/office/drawing/2014/main" id="{B1AEB669-B7D1-BA19-0928-885CFE151C81}"/>
-              </a:ext>
-            </a:extLst>
-          </p:cNvPr>
-          <p:cNvPicPr>
-            <a:picLocks noGrp="1" noChangeAspect="1"/>
-          </p:cNvPicPr>
-          <p:nvPr>
-            <p:ph sz="half" idx="1"/>
-          </p:nvPr>
-        </p:nvPicPr>
-        <p:blipFill>
-          <a:blip r:embed="rId2"/>
-          <a:stretch>
-            <a:fillRect/>
-          </a:stretch>
-        </p:blipFill>
-        <p:spPr>
-          <a:xfrm>
-            <a:off x="922969" y="1825625"/>
-            <a:ext cx="5012061" cy="4351338"/>
+            <a:off x="5162719" y="4495568"/>
+            <a:ext cx="6586915" cy="1905232"/>
           </a:xfrm>
           <a:prstGeom prst="rect">
             <a:avLst/>
           </a:prstGeom>
         </p:spPr>
-      </p:pic>
-      <p:pic>
-        <p:nvPicPr>
-          <p:cNvPr id="8" name="Content Placeholder 7">
-            <a:extLst>
-              <a:ext uri="{FF2B5EF4-FFF2-40B4-BE49-F238E27FC236}">
-                <a16:creationId xmlns:a16="http://schemas.microsoft.com/office/drawing/2014/main" id="{0ECCD281-5773-5FA0-0AB8-66BDD6BC3F45}"/>
-              </a:ext>
-            </a:extLst>
-          </p:cNvPr>
-          <p:cNvPicPr>
-            <a:picLocks noGrp="1" noChangeAspect="1"/>
-          </p:cNvPicPr>
-          <p:nvPr>
-            <p:ph sz="half" idx="2"/>
-          </p:nvPr>
-        </p:nvPicPr>
-        <p:blipFill>
-          <a:blip r:embed="rId3"/>
-          <a:stretch>
-            <a:fillRect/>
-          </a:stretch>
-        </p:blipFill>
-        <p:spPr>
-          <a:xfrm>
-            <a:off x="6172200" y="3266858"/>
-            <a:ext cx="5181600" cy="1468871"/>
-          </a:xfrm>
-          <a:prstGeom prst="rect">
-            <a:avLst/>
-          </a:prstGeom>
-        </p:spPr>
-      </p:pic>
+        <p:txBody>
+          <a:bodyPr vert="horz" lIns="91440" tIns="45720" rIns="91440" bIns="45720" rtlCol="0" anchor="ctr">
+            <a:normAutofit/>
+          </a:bodyPr>
+          <a:lstStyle/>
+          <a:p>
+            <a:pPr indent="-228600">
+              <a:lnSpc>
+                <a:spcPct val="90000"/>
+              </a:lnSpc>
+              <a:spcAft>
+                <a:spcPts val="600"/>
+              </a:spcAft>
+              <a:buFont typeface="Arial" panose="020B0604020202020204" pitchFamily="34" charset="0"/>
+              <a:buChar char="•"/>
+            </a:pPr>
+            <a:r>
+              <a:rPr lang="en-US" sz="1500"/>
+              <a:t>En este caso, tenemos dos de las funciones del rol de administrador, en el caso de la dos, esta se encargara de evaluar la ganancia neto con la cual cuenta el administrador, esto descontando cosas como el coste del inventario, el igv, e incluso el pago de alquiler en caso de que sus ganancias anuales sean mayores a la medida de la UIT, este es en el caso de la segunda función, mientras que la tercera función reparte estas ganancias en salarios equitativos.</a:t>
+            </a:r>
+          </a:p>
+        </p:txBody>
+      </p:sp>
     </p:spTree>
     <p:extLst>
       <p:ext uri="{BB962C8B-B14F-4D97-AF65-F5344CB8AC3E}">
@@ -4954,6 +5860,14 @@
 <file path=ppt/slides/slide14.xml><?xml version="1.0" encoding="utf-8"?>
 <p:sld xmlns:a="http://schemas.openxmlformats.org/drawingml/2006/main" xmlns:r="http://schemas.openxmlformats.org/officeDocument/2006/relationships" xmlns:p="http://schemas.openxmlformats.org/presentationml/2006/main">
   <p:cSld>
+    <p:bg>
+      <p:bgPr>
+        <a:solidFill>
+          <a:schemeClr val="bg1"/>
+        </a:solidFill>
+        <a:effectLst/>
+      </p:bgPr>
+    </p:bg>
     <p:spTree>
       <p:nvGrpSpPr>
         <p:cNvPr id="1" name=""/>
@@ -4968,78 +5882,643 @@
           <a:chExt cx="0" cy="0"/>
         </a:xfrm>
       </p:grpSpPr>
-      <p:sp>
+      <p:sp useBgFill="1">
         <p:nvSpPr>
-          <p:cNvPr id="2" name="Title 1">
+          <p:cNvPr id="16" name="Rectangle 15">
             <a:extLst>
               <a:ext uri="{FF2B5EF4-FFF2-40B4-BE49-F238E27FC236}">
-                <a16:creationId xmlns:a16="http://schemas.microsoft.com/office/drawing/2014/main" id="{1631EE65-0DA7-CFC7-B5FD-8F917C84EEFA}"/>
+                <a16:creationId xmlns:a16="http://schemas.microsoft.com/office/drawing/2014/main" id="{08BC803E-13F3-4DAB-B17C-BEB0076164B7}"/>
+              </a:ext>
+              <a:ext uri="{C183D7F6-B498-43B3-948B-1728B52AA6E4}">
+                <adec:decorative xmlns:adec="http://schemas.microsoft.com/office/drawing/2017/decorative" val="1"/>
               </a:ext>
             </a:extLst>
           </p:cNvPr>
           <p:cNvSpPr>
-            <a:spLocks noGrp="1"/>
+            <a:spLocks noGrp="1" noRot="1" noChangeAspect="1" noMove="1" noResize="1" noEditPoints="1" noAdjustHandles="1" noChangeArrowheads="1" noChangeShapeType="1" noTextEdit="1"/>
           </p:cNvSpPr>
           <p:nvPr>
-            <p:ph type="title"/>
+            <p:extLst>
+              <p:ext uri="{386F3935-93C4-4BCD-93E2-E3B085C9AB24}">
+                <p16:designElem xmlns:p16="http://schemas.microsoft.com/office/powerpoint/2015/main" val="1"/>
+              </p:ext>
+            </p:extLst>
           </p:nvPr>
         </p:nvSpPr>
-        <p:spPr/>
+        <p:spPr>
+          <a:xfrm>
+            <a:off x="0" y="0"/>
+            <a:ext cx="12192000" cy="6858000"/>
+          </a:xfrm>
+          <a:prstGeom prst="rect">
+            <a:avLst/>
+          </a:prstGeom>
+          <a:ln w="12700" cap="flat" cmpd="sng" algn="ctr">
+            <a:noFill/>
+            <a:prstDash val="solid"/>
+            <a:miter lim="800000"/>
+          </a:ln>
+          <a:effectLst/>
+          <a:extLst>
+            <a:ext uri="{91240B29-F687-4F45-9708-019B960494DF}">
+              <a14:hiddenLine xmlns:a14="http://schemas.microsoft.com/office/drawing/2010/main" w="12700" cap="flat" cmpd="sng" algn="ctr">
+                <a:solidFill>
+                  <a:schemeClr val="accent1">
+                    <a:shade val="50000"/>
+                  </a:schemeClr>
+                </a:solidFill>
+                <a:prstDash val="solid"/>
+                <a:miter lim="800000"/>
+              </a14:hiddenLine>
+            </a:ext>
+          </a:extLst>
+        </p:spPr>
+        <p:style>
+          <a:lnRef idx="2">
+            <a:schemeClr val="accent1">
+              <a:shade val="50000"/>
+            </a:schemeClr>
+          </a:lnRef>
+          <a:fillRef idx="1">
+            <a:schemeClr val="accent1"/>
+          </a:fillRef>
+          <a:effectRef idx="0">
+            <a:schemeClr val="accent1"/>
+          </a:effectRef>
+          <a:fontRef idx="minor">
+            <a:schemeClr val="lt1"/>
+          </a:fontRef>
+        </p:style>
         <p:txBody>
-          <a:bodyPr/>
+          <a:bodyPr rtlCol="0" anchor="ctr"/>
           <a:lstStyle/>
           <a:p>
-            <a:endParaRPr lang="es-PE"/>
+            <a:pPr algn="ctr"/>
+            <a:endParaRPr lang="en-US"/>
           </a:p>
         </p:txBody>
       </p:sp>
       <p:sp>
         <p:nvSpPr>
-          <p:cNvPr id="3" name="Content Placeholder 2">
+          <p:cNvPr id="18" name="Rectangle 17">
             <a:extLst>
               <a:ext uri="{FF2B5EF4-FFF2-40B4-BE49-F238E27FC236}">
-                <a16:creationId xmlns:a16="http://schemas.microsoft.com/office/drawing/2014/main" id="{E6DFB0D1-D284-A158-CA77-DC3CB3B192E9}"/>
+                <a16:creationId xmlns:a16="http://schemas.microsoft.com/office/drawing/2014/main" id="{39D85F1B-3302-4DB9-81B1-038ADCE4DEAC}"/>
+              </a:ext>
+              <a:ext uri="{C183D7F6-B498-43B3-948B-1728B52AA6E4}">
+                <adec:decorative xmlns:adec="http://schemas.microsoft.com/office/drawing/2017/decorative" val="1"/>
               </a:ext>
             </a:extLst>
           </p:cNvPr>
           <p:cNvSpPr>
-            <a:spLocks noGrp="1"/>
+            <a:spLocks noGrp="1" noRot="1" noChangeAspect="1" noMove="1" noResize="1" noEditPoints="1" noAdjustHandles="1" noChangeArrowheads="1" noChangeShapeType="1" noTextEdit="1"/>
           </p:cNvSpPr>
+          <p:nvPr>
+            <p:extLst>
+              <p:ext uri="{386F3935-93C4-4BCD-93E2-E3B085C9AB24}">
+                <p16:designElem xmlns:p16="http://schemas.microsoft.com/office/powerpoint/2015/main" val="1"/>
+              </p:ext>
+            </p:extLst>
+          </p:nvPr>
+        </p:nvSpPr>
+        <p:spPr>
+          <a:xfrm>
+            <a:off x="0" y="-2"/>
+            <a:ext cx="12191999" cy="6858000"/>
+          </a:xfrm>
+          <a:prstGeom prst="rect">
+            <a:avLst/>
+          </a:prstGeom>
+          <a:solidFill>
+            <a:srgbClr val="82766A">
+              <a:alpha val="15000"/>
+            </a:srgbClr>
+          </a:solidFill>
+          <a:ln w="12700" cap="flat" cmpd="sng" algn="ctr">
+            <a:noFill/>
+            <a:prstDash val="solid"/>
+            <a:miter lim="800000"/>
+          </a:ln>
+          <a:effectLst/>
+        </p:spPr>
+        <p:style>
+          <a:lnRef idx="2">
+            <a:schemeClr val="accent1">
+              <a:shade val="50000"/>
+            </a:schemeClr>
+          </a:lnRef>
+          <a:fillRef idx="1">
+            <a:schemeClr val="accent1"/>
+          </a:fillRef>
+          <a:effectRef idx="0">
+            <a:schemeClr val="accent1"/>
+          </a:effectRef>
+          <a:fontRef idx="minor">
+            <a:schemeClr val="lt1"/>
+          </a:fontRef>
+        </p:style>
+        <p:txBody>
+          <a:bodyPr rtlCol="0" anchor="ctr"/>
+          <a:lstStyle/>
+          <a:p>
+            <a:pPr algn="ctr"/>
+            <a:endParaRPr lang="en-US"/>
+          </a:p>
+        </p:txBody>
+      </p:sp>
+      <p:pic>
+        <p:nvPicPr>
+          <p:cNvPr id="11" name="Content Placeholder 10">
+            <a:extLst>
+              <a:ext uri="{FF2B5EF4-FFF2-40B4-BE49-F238E27FC236}">
+                <a16:creationId xmlns:a16="http://schemas.microsoft.com/office/drawing/2014/main" id="{50EEAD3E-14FB-3749-A6AF-1D4486D9206B}"/>
+              </a:ext>
+            </a:extLst>
+          </p:cNvPr>
+          <p:cNvPicPr>
+            <a:picLocks noGrp="1" noChangeAspect="1"/>
+          </p:cNvPicPr>
+          <p:nvPr>
+            <p:ph sz="half" idx="2"/>
+          </p:nvPr>
+        </p:nvPicPr>
+        <p:blipFill>
+          <a:blip r:embed="rId2"/>
+          <a:srcRect t="9539" b="12411"/>
+          <a:stretch>
+            <a:fillRect/>
+          </a:stretch>
+        </p:blipFill>
+        <p:spPr>
+          <a:xfrm>
+            <a:off x="20" y="10"/>
+            <a:ext cx="6095980" cy="3175906"/>
+          </a:xfrm>
+          <a:custGeom>
+            <a:avLst/>
+            <a:gdLst/>
+            <a:ahLst/>
+            <a:cxnLst/>
+            <a:rect l="l" t="t" r="r" b="b"/>
+            <a:pathLst>
+              <a:path w="6096000" h="3175916">
+                <a:moveTo>
+                  <a:pt x="0" y="0"/>
+                </a:moveTo>
+                <a:lnTo>
+                  <a:pt x="6096000" y="0"/>
+                </a:lnTo>
+                <a:lnTo>
+                  <a:pt x="6096000" y="3175916"/>
+                </a:lnTo>
+                <a:lnTo>
+                  <a:pt x="6074953" y="3168556"/>
+                </a:lnTo>
+                <a:cubicBezTo>
+                  <a:pt x="6065180" y="3165138"/>
+                  <a:pt x="6054705" y="3162334"/>
+                  <a:pt x="6041425" y="3161984"/>
+                </a:cubicBezTo>
+                <a:lnTo>
+                  <a:pt x="5978335" y="3173176"/>
+                </a:lnTo>
+                <a:cubicBezTo>
+                  <a:pt x="5953369" y="3176890"/>
+                  <a:pt x="5845857" y="3169112"/>
+                  <a:pt x="5827638" y="3169738"/>
+                </a:cubicBezTo>
+                <a:cubicBezTo>
+                  <a:pt x="5821882" y="3178743"/>
+                  <a:pt x="5799256" y="3174685"/>
+                  <a:pt x="5761310" y="3170760"/>
+                </a:cubicBezTo>
+                <a:cubicBezTo>
+                  <a:pt x="5731057" y="3170684"/>
+                  <a:pt x="5713719" y="3171961"/>
+                  <a:pt x="5696588" y="3173023"/>
+                </a:cubicBezTo>
+                <a:lnTo>
+                  <a:pt x="5682596" y="3173661"/>
+                </a:lnTo>
+                <a:lnTo>
+                  <a:pt x="5575844" y="3148218"/>
+                </a:lnTo>
+                <a:cubicBezTo>
+                  <a:pt x="5455823" y="3136706"/>
+                  <a:pt x="5377668" y="3144388"/>
+                  <a:pt x="5287401" y="3135195"/>
+                </a:cubicBezTo>
+                <a:cubicBezTo>
+                  <a:pt x="5197135" y="3126002"/>
+                  <a:pt x="5202548" y="3115782"/>
+                  <a:pt x="5034243" y="3093057"/>
+                </a:cubicBezTo>
+                <a:cubicBezTo>
+                  <a:pt x="4879585" y="3031690"/>
+                  <a:pt x="4724928" y="3048859"/>
+                  <a:pt x="4570270" y="3026761"/>
+                </a:cubicBezTo>
+                <a:cubicBezTo>
+                  <a:pt x="4488718" y="3050631"/>
+                  <a:pt x="4344263" y="2990436"/>
+                  <a:pt x="4232462" y="2981221"/>
+                </a:cubicBezTo>
+                <a:cubicBezTo>
+                  <a:pt x="4120662" y="2972005"/>
+                  <a:pt x="3986179" y="2970108"/>
+                  <a:pt x="3899469" y="2971466"/>
+                </a:cubicBezTo>
+                <a:cubicBezTo>
+                  <a:pt x="3892272" y="2982518"/>
+                  <a:pt x="3768985" y="2995342"/>
+                  <a:pt x="3710933" y="2958642"/>
+                </a:cubicBezTo>
+                <a:cubicBezTo>
+                  <a:pt x="3583105" y="2956402"/>
+                  <a:pt x="3623640" y="2964712"/>
+                  <a:pt x="3495164" y="2941478"/>
+                </a:cubicBezTo>
+                <a:cubicBezTo>
+                  <a:pt x="3419432" y="2942273"/>
+                  <a:pt x="3339383" y="2952386"/>
+                  <a:pt x="3282944" y="2951628"/>
+                </a:cubicBezTo>
+                <a:cubicBezTo>
+                  <a:pt x="3281769" y="2953455"/>
+                  <a:pt x="3129759" y="2929645"/>
+                  <a:pt x="3085959" y="2922940"/>
+                </a:cubicBezTo>
+                <a:cubicBezTo>
+                  <a:pt x="3042159" y="2916235"/>
+                  <a:pt x="3054740" y="2920103"/>
+                  <a:pt x="3020146" y="2911397"/>
+                </a:cubicBezTo>
+                <a:cubicBezTo>
+                  <a:pt x="2871334" y="2883584"/>
+                  <a:pt x="2762563" y="2883465"/>
+                  <a:pt x="2653542" y="2876899"/>
+                </a:cubicBezTo>
+                <a:cubicBezTo>
+                  <a:pt x="2533423" y="2872448"/>
+                  <a:pt x="2683271" y="2915174"/>
+                  <a:pt x="2510424" y="2888407"/>
+                </a:cubicBezTo>
+                <a:cubicBezTo>
+                  <a:pt x="2506340" y="2898923"/>
+                  <a:pt x="2449170" y="2888049"/>
+                  <a:pt x="2412523" y="2882673"/>
+                </a:cubicBezTo>
+                <a:cubicBezTo>
+                  <a:pt x="2355021" y="2881306"/>
+                  <a:pt x="2382991" y="2891314"/>
+                  <a:pt x="2308292" y="2874695"/>
+                </a:cubicBezTo>
+                <a:lnTo>
+                  <a:pt x="2233764" y="2908195"/>
+                </a:lnTo>
+                <a:cubicBezTo>
+                  <a:pt x="2234416" y="2903929"/>
+                  <a:pt x="2112578" y="2949704"/>
+                  <a:pt x="2089169" y="2948983"/>
+                </a:cubicBezTo>
+                <a:lnTo>
+                  <a:pt x="1901626" y="2945454"/>
+                </a:lnTo>
+                <a:cubicBezTo>
+                  <a:pt x="1851336" y="2959106"/>
+                  <a:pt x="1870664" y="2971169"/>
+                  <a:pt x="1825089" y="2978820"/>
+                </a:cubicBezTo>
+                <a:cubicBezTo>
+                  <a:pt x="1779514" y="2986471"/>
+                  <a:pt x="1746268" y="2976574"/>
+                  <a:pt x="1628175" y="2991359"/>
+                </a:cubicBezTo>
+                <a:cubicBezTo>
+                  <a:pt x="1580792" y="3002760"/>
+                  <a:pt x="1459893" y="2977867"/>
+                  <a:pt x="1367439" y="2991184"/>
+                </a:cubicBezTo>
+                <a:cubicBezTo>
+                  <a:pt x="1369407" y="3003218"/>
+                  <a:pt x="1303810" y="3002393"/>
+                  <a:pt x="1260431" y="2993313"/>
+                </a:cubicBezTo>
+                <a:lnTo>
+                  <a:pt x="1131986" y="3017812"/>
+                </a:lnTo>
+                <a:cubicBezTo>
+                  <a:pt x="1134074" y="3034431"/>
+                  <a:pt x="1115111" y="3023292"/>
+                  <a:pt x="1062297" y="3034267"/>
+                </a:cubicBezTo>
+                <a:cubicBezTo>
+                  <a:pt x="1046148" y="3044857"/>
+                  <a:pt x="1019464" y="3043729"/>
+                  <a:pt x="979009" y="3052795"/>
+                </a:cubicBezTo>
+                <a:cubicBezTo>
+                  <a:pt x="963885" y="3062784"/>
+                  <a:pt x="844270" y="3032960"/>
+                  <a:pt x="809514" y="3039765"/>
+                </a:cubicBezTo>
+                <a:cubicBezTo>
+                  <a:pt x="773761" y="3042869"/>
+                  <a:pt x="775984" y="3025792"/>
+                  <a:pt x="686053" y="3027101"/>
+                </a:cubicBezTo>
+                <a:cubicBezTo>
+                  <a:pt x="600190" y="3024844"/>
+                  <a:pt x="595882" y="3019147"/>
+                  <a:pt x="504370" y="3015625"/>
+                </a:cubicBezTo>
+                <a:cubicBezTo>
+                  <a:pt x="442615" y="3013617"/>
+                  <a:pt x="455531" y="3005845"/>
+                  <a:pt x="421644" y="3004997"/>
+                </a:cubicBezTo>
+                <a:cubicBezTo>
+                  <a:pt x="377193" y="3017912"/>
+                  <a:pt x="307611" y="2981496"/>
+                  <a:pt x="274973" y="2996304"/>
+                </a:cubicBezTo>
+                <a:lnTo>
+                  <a:pt x="116340" y="2982098"/>
+                </a:lnTo>
+                <a:lnTo>
+                  <a:pt x="35300" y="2993836"/>
+                </a:lnTo>
+                <a:cubicBezTo>
+                  <a:pt x="29001" y="2994370"/>
+                  <a:pt x="18688" y="2993580"/>
+                  <a:pt x="6479" y="2992085"/>
+                </a:cubicBezTo>
+                <a:lnTo>
+                  <a:pt x="0" y="2991123"/>
+                </a:lnTo>
+                <a:close/>
+              </a:path>
+            </a:pathLst>
+          </a:custGeom>
+        </p:spPr>
+      </p:pic>
+      <p:pic>
+        <p:nvPicPr>
+          <p:cNvPr id="9" name="Content Placeholder 8">
+            <a:extLst>
+              <a:ext uri="{FF2B5EF4-FFF2-40B4-BE49-F238E27FC236}">
+                <a16:creationId xmlns:a16="http://schemas.microsoft.com/office/drawing/2014/main" id="{680975FA-19CB-F6FD-7FDD-0F021539F583}"/>
+              </a:ext>
+            </a:extLst>
+          </p:cNvPr>
+          <p:cNvPicPr>
+            <a:picLocks noGrp="1" noChangeAspect="1"/>
+          </p:cNvPicPr>
           <p:nvPr>
             <p:ph sz="half" idx="1"/>
           </p:nvPr>
-        </p:nvSpPr>
-        <p:spPr/>
-        <p:txBody>
-          <a:bodyPr/>
-          <a:lstStyle/>
-          <a:p>
-            <a:endParaRPr lang="es-PE"/>
-          </a:p>
-        </p:txBody>
-      </p:sp>
+        </p:nvPicPr>
+        <p:blipFill>
+          <a:blip r:embed="rId3"/>
+          <a:srcRect t="13656" b="14341"/>
+          <a:stretch>
+            <a:fillRect/>
+          </a:stretch>
+        </p:blipFill>
+        <p:spPr>
+          <a:xfrm>
+            <a:off x="6096000" y="10"/>
+            <a:ext cx="6096000" cy="3182262"/>
+          </a:xfrm>
+          <a:custGeom>
+            <a:avLst/>
+            <a:gdLst/>
+            <a:ahLst/>
+            <a:cxnLst/>
+            <a:rect l="l" t="t" r="r" b="b"/>
+            <a:pathLst>
+              <a:path w="6096000" h="3182272">
+                <a:moveTo>
+                  <a:pt x="0" y="0"/>
+                </a:moveTo>
+                <a:lnTo>
+                  <a:pt x="6096000" y="0"/>
+                </a:lnTo>
+                <a:lnTo>
+                  <a:pt x="6096000" y="2977881"/>
+                </a:lnTo>
+                <a:lnTo>
+                  <a:pt x="6089100" y="2979305"/>
+                </a:lnTo>
+                <a:cubicBezTo>
+                  <a:pt x="6033641" y="2989882"/>
+                  <a:pt x="5988719" y="2996128"/>
+                  <a:pt x="5963104" y="2993636"/>
+                </a:cubicBezTo>
+                <a:cubicBezTo>
+                  <a:pt x="5792949" y="3029182"/>
+                  <a:pt x="5730547" y="3002240"/>
+                  <a:pt x="5622676" y="2993454"/>
+                </a:cubicBezTo>
+                <a:cubicBezTo>
+                  <a:pt x="5358705" y="2975083"/>
+                  <a:pt x="5242862" y="2994654"/>
+                  <a:pt x="5115732" y="2989671"/>
+                </a:cubicBezTo>
+                <a:cubicBezTo>
+                  <a:pt x="4988602" y="2984687"/>
+                  <a:pt x="5029567" y="2975639"/>
+                  <a:pt x="4859897" y="2963549"/>
+                </a:cubicBezTo>
+                <a:lnTo>
+                  <a:pt x="4391870" y="2926580"/>
+                </a:lnTo>
+                <a:cubicBezTo>
+                  <a:pt x="4327296" y="2956949"/>
+                  <a:pt x="4071930" y="2902434"/>
+                  <a:pt x="4051327" y="2902384"/>
+                </a:cubicBezTo>
+                <a:cubicBezTo>
+                  <a:pt x="3968352" y="2908170"/>
+                  <a:pt x="3882315" y="2886803"/>
+                  <a:pt x="3767876" y="2899218"/>
+                </a:cubicBezTo>
+                <a:cubicBezTo>
+                  <a:pt x="3761563" y="2910695"/>
+                  <a:pt x="3759706" y="2886579"/>
+                  <a:pt x="3607318" y="2887826"/>
+                </a:cubicBezTo>
+                <a:cubicBezTo>
+                  <a:pt x="3517854" y="2911862"/>
+                  <a:pt x="3239059" y="2908898"/>
+                  <a:pt x="3200813" y="2916134"/>
+                </a:cubicBezTo>
+                <a:cubicBezTo>
+                  <a:pt x="3125330" y="2921689"/>
+                  <a:pt x="3104585" y="2900825"/>
+                  <a:pt x="3048226" y="2903616"/>
+                </a:cubicBezTo>
+                <a:cubicBezTo>
+                  <a:pt x="3047198" y="2905512"/>
+                  <a:pt x="2972947" y="2922104"/>
+                  <a:pt x="2930185" y="2925795"/>
+                </a:cubicBezTo>
+                <a:cubicBezTo>
+                  <a:pt x="2887423" y="2929486"/>
+                  <a:pt x="2826842" y="2932273"/>
+                  <a:pt x="2791651" y="2925762"/>
+                </a:cubicBezTo>
+                <a:cubicBezTo>
+                  <a:pt x="2641026" y="2907373"/>
+                  <a:pt x="2577392" y="2897262"/>
+                  <a:pt x="2468125" y="2897565"/>
+                </a:cubicBezTo>
+                <a:cubicBezTo>
+                  <a:pt x="2347953" y="2900676"/>
+                  <a:pt x="2483169" y="2941985"/>
+                  <a:pt x="2308652" y="2926146"/>
+                </a:cubicBezTo>
+                <a:cubicBezTo>
+                  <a:pt x="2305401" y="2936895"/>
+                  <a:pt x="2265130" y="2921533"/>
+                  <a:pt x="2228153" y="2918475"/>
+                </a:cubicBezTo>
+                <a:cubicBezTo>
+                  <a:pt x="2170686" y="2920724"/>
+                  <a:pt x="2206286" y="2945386"/>
+                  <a:pt x="2130469" y="2933502"/>
+                </a:cubicBezTo>
+                <a:lnTo>
+                  <a:pt x="2051835" y="2955169"/>
+                </a:lnTo>
+                <a:cubicBezTo>
+                  <a:pt x="2052153" y="2950872"/>
+                  <a:pt x="1934201" y="3004193"/>
+                  <a:pt x="1910793" y="3004946"/>
+                </a:cubicBezTo>
+                <a:lnTo>
+                  <a:pt x="1758332" y="3027886"/>
+                </a:lnTo>
+                <a:cubicBezTo>
+                  <a:pt x="1709235" y="3044665"/>
+                  <a:pt x="1700383" y="3043257"/>
+                  <a:pt x="1649704" y="3051307"/>
+                </a:cubicBezTo>
+                <a:cubicBezTo>
+                  <a:pt x="1599024" y="3059359"/>
+                  <a:pt x="1520412" y="3098900"/>
+                  <a:pt x="1454257" y="3076192"/>
+                </a:cubicBezTo>
+                <a:cubicBezTo>
+                  <a:pt x="1407884" y="3090545"/>
+                  <a:pt x="1414359" y="3062092"/>
+                  <a:pt x="1323176" y="3081187"/>
+                </a:cubicBezTo>
+                <a:cubicBezTo>
+                  <a:pt x="1269270" y="3084300"/>
+                  <a:pt x="1246499" y="3082073"/>
+                  <a:pt x="1231798" y="3083652"/>
+                </a:cubicBezTo>
+                <a:lnTo>
+                  <a:pt x="1128386" y="3096270"/>
+                </a:lnTo>
+                <a:lnTo>
+                  <a:pt x="1087572" y="3101257"/>
+                </a:lnTo>
+                <a:lnTo>
+                  <a:pt x="1075937" y="3104255"/>
+                </a:lnTo>
+                <a:lnTo>
+                  <a:pt x="992872" y="3105385"/>
+                </a:lnTo>
+                <a:cubicBezTo>
+                  <a:pt x="955021" y="3105296"/>
+                  <a:pt x="904630" y="3125038"/>
+                  <a:pt x="891882" y="3122691"/>
+                </a:cubicBezTo>
+                <a:cubicBezTo>
+                  <a:pt x="784087" y="3112356"/>
+                  <a:pt x="829281" y="3133000"/>
+                  <a:pt x="715888" y="3127380"/>
+                </a:cubicBezTo>
+                <a:cubicBezTo>
+                  <a:pt x="637116" y="3116268"/>
+                  <a:pt x="537472" y="3131012"/>
+                  <a:pt x="399964" y="3152096"/>
+                </a:cubicBezTo>
+                <a:lnTo>
+                  <a:pt x="310170" y="3146040"/>
+                </a:lnTo>
+                <a:lnTo>
+                  <a:pt x="251771" y="3165636"/>
+                </a:lnTo>
+                <a:cubicBezTo>
+                  <a:pt x="208442" y="3181313"/>
+                  <a:pt x="136178" y="3149360"/>
+                  <a:pt x="104780" y="3166182"/>
+                </a:cubicBezTo>
+                <a:cubicBezTo>
+                  <a:pt x="55782" y="3185117"/>
+                  <a:pt x="29223" y="3184417"/>
+                  <a:pt x="8274" y="3178809"/>
+                </a:cubicBezTo>
+                <a:lnTo>
+                  <a:pt x="0" y="3175916"/>
+                </a:lnTo>
+                <a:close/>
+              </a:path>
+            </a:pathLst>
+          </a:custGeom>
+        </p:spPr>
+      </p:pic>
       <p:sp>
         <p:nvSpPr>
-          <p:cNvPr id="4" name="Content Placeholder 3">
+          <p:cNvPr id="7" name="TextBox 6">
             <a:extLst>
               <a:ext uri="{FF2B5EF4-FFF2-40B4-BE49-F238E27FC236}">
-                <a16:creationId xmlns:a16="http://schemas.microsoft.com/office/drawing/2014/main" id="{4325772A-A0F8-B6AA-E62D-32367AE213F2}"/>
+                <a16:creationId xmlns:a16="http://schemas.microsoft.com/office/drawing/2014/main" id="{8C7A16AB-0352-FA2A-448A-242B1A1FD405}"/>
               </a:ext>
             </a:extLst>
           </p:cNvPr>
-          <p:cNvSpPr>
-            <a:spLocks noGrp="1"/>
-          </p:cNvSpPr>
-          <p:nvPr>
-            <p:ph sz="half" idx="2"/>
-          </p:nvPr>
+          <p:cNvSpPr txBox="1"/>
+          <p:nvPr/>
         </p:nvSpPr>
-        <p:spPr/>
+        <p:spPr>
+          <a:xfrm>
+            <a:off x="5745707" y="3493827"/>
+            <a:ext cx="5813948" cy="2856166"/>
+          </a:xfrm>
+          <a:prstGeom prst="rect">
+            <a:avLst/>
+          </a:prstGeom>
+        </p:spPr>
         <p:txBody>
-          <a:bodyPr/>
+          <a:bodyPr vert="horz" lIns="91440" tIns="45720" rIns="91440" bIns="45720" rtlCol="0" anchor="ctr">
+            <a:normAutofit/>
+          </a:bodyPr>
           <a:lstStyle/>
           <a:p>
-            <a:endParaRPr lang="es-PE"/>
+            <a:pPr indent="-228600">
+              <a:lnSpc>
+                <a:spcPct val="90000"/>
+              </a:lnSpc>
+              <a:spcAft>
+                <a:spcPts val="600"/>
+              </a:spcAft>
+              <a:buFont typeface="Arial" panose="020B0604020202020204" pitchFamily="34" charset="0"/>
+              <a:buChar char="•"/>
+            </a:pPr>
+            <a:r>
+              <a:rPr lang="en-US" sz="1700">
+                <a:solidFill>
+                  <a:schemeClr val="tx1">
+                    <a:lumMod val="85000"/>
+                    <a:lumOff val="15000"/>
+                  </a:schemeClr>
+                </a:solidFill>
+              </a:rPr>
+              <a:t>Por ultimo veremos dos de las funciones mas destacables del rol de administrador, siendo la primera el manejo de almacén, de aquí vendrán los productos que el vendedor dará a los clientes con su respectivo precio, cantidad, entre otros, asimismo, tiene las funciones de agregar y eliminar productos de la lista de la bodega. La siguiente función es una mas evaluativa, la cual se encarga de organizar entre el mejor al peor trabajador, en base a esto, el sistema recomendara el despido o la promoción del empleado, o como tal, si este se mantendrá en la empresa.</a:t>
+            </a:r>
           </a:p>
         </p:txBody>
       </p:sp>
@@ -5059,6 +6538,14 @@
 <file path=ppt/slides/slide15.xml><?xml version="1.0" encoding="utf-8"?>
 <p:sld xmlns:a="http://schemas.openxmlformats.org/drawingml/2006/main" xmlns:r="http://schemas.openxmlformats.org/officeDocument/2006/relationships" xmlns:p="http://schemas.openxmlformats.org/presentationml/2006/main">
   <p:cSld>
+    <p:bg>
+      <p:bgPr>
+        <a:solidFill>
+          <a:schemeClr val="bg1"/>
+        </a:solidFill>
+        <a:effectLst/>
+      </p:bgPr>
+    </p:bg>
     <p:spTree>
       <p:nvGrpSpPr>
         <p:cNvPr id="1" name=""/>
@@ -5075,6 +6562,72 @@
       </p:grpSpPr>
       <p:sp>
         <p:nvSpPr>
+          <p:cNvPr id="8" name="Rectangle 7">
+            <a:extLst>
+              <a:ext uri="{FF2B5EF4-FFF2-40B4-BE49-F238E27FC236}">
+                <a16:creationId xmlns:a16="http://schemas.microsoft.com/office/drawing/2014/main" id="{70DFC902-7D23-471A-B557-B6B6917D7A0D}"/>
+              </a:ext>
+              <a:ext uri="{C183D7F6-B498-43B3-948B-1728B52AA6E4}">
+                <adec:decorative xmlns:adec="http://schemas.microsoft.com/office/drawing/2017/decorative" val="1"/>
+              </a:ext>
+            </a:extLst>
+          </p:cNvPr>
+          <p:cNvSpPr>
+            <a:spLocks noGrp="1" noRot="1" noChangeAspect="1" noMove="1" noResize="1" noEditPoints="1" noAdjustHandles="1" noChangeArrowheads="1" noChangeShapeType="1" noTextEdit="1"/>
+          </p:cNvSpPr>
+          <p:nvPr>
+            <p:extLst>
+              <p:ext uri="{386F3935-93C4-4BCD-93E2-E3B085C9AB24}">
+                <p16:designElem xmlns:p16="http://schemas.microsoft.com/office/powerpoint/2015/main" val="1"/>
+              </p:ext>
+            </p:extLst>
+          </p:nvPr>
+        </p:nvSpPr>
+        <p:spPr>
+          <a:xfrm>
+            <a:off x="10" y="-5705"/>
+            <a:ext cx="12191990" cy="1694346"/>
+          </a:xfrm>
+          <a:prstGeom prst="rect">
+            <a:avLst/>
+          </a:prstGeom>
+          <a:solidFill>
+            <a:schemeClr val="tx1">
+              <a:lumMod val="85000"/>
+              <a:lumOff val="15000"/>
+            </a:schemeClr>
+          </a:solidFill>
+          <a:ln>
+            <a:noFill/>
+          </a:ln>
+        </p:spPr>
+        <p:style>
+          <a:lnRef idx="2">
+            <a:schemeClr val="accent1">
+              <a:shade val="50000"/>
+            </a:schemeClr>
+          </a:lnRef>
+          <a:fillRef idx="1">
+            <a:schemeClr val="accent1"/>
+          </a:fillRef>
+          <a:effectRef idx="0">
+            <a:schemeClr val="accent1"/>
+          </a:effectRef>
+          <a:fontRef idx="minor">
+            <a:schemeClr val="lt1"/>
+          </a:fontRef>
+        </p:style>
+        <p:txBody>
+          <a:bodyPr rtlCol="0" anchor="ctr"/>
+          <a:lstStyle/>
+          <a:p>
+            <a:pPr algn="ctr"/>
+            <a:endParaRPr lang="en-US"/>
+          </a:p>
+        </p:txBody>
+      </p:sp>
+      <p:sp>
+        <p:nvSpPr>
           <p:cNvPr id="2" name="Title 1">
             <a:extLst>
               <a:ext uri="{FF2B5EF4-FFF2-40B4-BE49-F238E27FC236}">
@@ -5089,16 +6642,159 @@
             <p:ph type="title"/>
           </p:nvPr>
         </p:nvSpPr>
-        <p:spPr/>
+        <p:spPr>
+          <a:xfrm>
+            <a:off x="1156851" y="637762"/>
+            <a:ext cx="9888496" cy="900131"/>
+          </a:xfrm>
+        </p:spPr>
         <p:txBody>
-          <a:bodyPr/>
+          <a:bodyPr anchor="t">
+            <a:normAutofit/>
+          </a:bodyPr>
           <a:lstStyle/>
           <a:p>
             <a:r>
-              <a:rPr lang="es-MX" dirty="0" err="1"/>
-              <a:t>Conclusion</a:t>
-            </a:r>
-            <a:endParaRPr lang="es-PE" dirty="0"/>
+              <a:rPr lang="es-MX" sz="4000">
+                <a:solidFill>
+                  <a:schemeClr val="bg1"/>
+                </a:solidFill>
+              </a:rPr>
+              <a:t>Conclusión</a:t>
+            </a:r>
+            <a:endParaRPr lang="es-PE" sz="4000">
+              <a:solidFill>
+                <a:schemeClr val="bg1"/>
+              </a:solidFill>
+            </a:endParaRPr>
+          </a:p>
+        </p:txBody>
+      </p:sp>
+      <p:sp>
+        <p:nvSpPr>
+          <p:cNvPr id="10" name="Rectangle 9">
+            <a:extLst>
+              <a:ext uri="{FF2B5EF4-FFF2-40B4-BE49-F238E27FC236}">
+                <a16:creationId xmlns:a16="http://schemas.microsoft.com/office/drawing/2014/main" id="{A55D5633-D557-4DCA-982C-FF36EB7A1C00}"/>
+              </a:ext>
+              <a:ext uri="{C183D7F6-B498-43B3-948B-1728B52AA6E4}">
+                <adec:decorative xmlns:adec="http://schemas.microsoft.com/office/drawing/2017/decorative" val="1"/>
+              </a:ext>
+            </a:extLst>
+          </p:cNvPr>
+          <p:cNvSpPr>
+            <a:spLocks noGrp="1" noRot="1" noChangeAspect="1" noMove="1" noResize="1" noEditPoints="1" noAdjustHandles="1" noChangeArrowheads="1" noChangeShapeType="1" noTextEdit="1"/>
+          </p:cNvSpPr>
+          <p:nvPr>
+            <p:extLst>
+              <p:ext uri="{386F3935-93C4-4BCD-93E2-E3B085C9AB24}">
+                <p16:designElem xmlns:p16="http://schemas.microsoft.com/office/powerpoint/2015/main" val="1"/>
+              </p:ext>
+            </p:extLst>
+          </p:nvPr>
+        </p:nvSpPr>
+        <p:spPr>
+          <a:xfrm>
+            <a:off x="0" y="1688641"/>
+            <a:ext cx="12191990" cy="5169359"/>
+          </a:xfrm>
+          <a:prstGeom prst="rect">
+            <a:avLst/>
+          </a:prstGeom>
+          <a:solidFill>
+            <a:schemeClr val="bg1">
+              <a:lumMod val="95000"/>
+            </a:schemeClr>
+          </a:solidFill>
+          <a:ln>
+            <a:noFill/>
+          </a:ln>
+        </p:spPr>
+        <p:style>
+          <a:lnRef idx="2">
+            <a:schemeClr val="accent1">
+              <a:shade val="50000"/>
+            </a:schemeClr>
+          </a:lnRef>
+          <a:fillRef idx="1">
+            <a:schemeClr val="accent1"/>
+          </a:fillRef>
+          <a:effectRef idx="0">
+            <a:schemeClr val="accent1"/>
+          </a:effectRef>
+          <a:fontRef idx="minor">
+            <a:schemeClr val="lt1"/>
+          </a:fontRef>
+        </p:style>
+        <p:txBody>
+          <a:bodyPr rtlCol="0" anchor="ctr"/>
+          <a:lstStyle/>
+          <a:p>
+            <a:pPr algn="ctr"/>
+            <a:endParaRPr lang="en-US"/>
+          </a:p>
+        </p:txBody>
+      </p:sp>
+      <p:sp>
+        <p:nvSpPr>
+          <p:cNvPr id="12" name="Rectangle 11">
+            <a:extLst>
+              <a:ext uri="{FF2B5EF4-FFF2-40B4-BE49-F238E27FC236}">
+                <a16:creationId xmlns:a16="http://schemas.microsoft.com/office/drawing/2014/main" id="{450D3AD2-FA80-415F-A9CE-54D884561CD7}"/>
+              </a:ext>
+              <a:ext uri="{C183D7F6-B498-43B3-948B-1728B52AA6E4}">
+                <adec:decorative xmlns:adec="http://schemas.microsoft.com/office/drawing/2017/decorative" val="1"/>
+              </a:ext>
+            </a:extLst>
+          </p:cNvPr>
+          <p:cNvSpPr>
+            <a:spLocks noGrp="1" noRot="1" noChangeAspect="1" noMove="1" noResize="1" noEditPoints="1" noAdjustHandles="1" noChangeArrowheads="1" noChangeShapeType="1" noTextEdit="1"/>
+          </p:cNvSpPr>
+          <p:nvPr>
+            <p:extLst>
+              <p:ext uri="{386F3935-93C4-4BCD-93E2-E3B085C9AB24}">
+                <p16:designElem xmlns:p16="http://schemas.microsoft.com/office/powerpoint/2015/main" val="1"/>
+              </p:ext>
+            </p:extLst>
+          </p:nvPr>
+        </p:nvSpPr>
+        <p:spPr>
+          <a:xfrm>
+            <a:off x="1156851" y="2010758"/>
+            <a:ext cx="457190" cy="45719"/>
+          </a:xfrm>
+          <a:prstGeom prst="rect">
+            <a:avLst/>
+          </a:prstGeom>
+          <a:solidFill>
+            <a:schemeClr val="tx1"/>
+          </a:solidFill>
+          <a:ln>
+            <a:noFill/>
+          </a:ln>
+        </p:spPr>
+        <p:style>
+          <a:lnRef idx="2">
+            <a:schemeClr val="accent1">
+              <a:shade val="50000"/>
+            </a:schemeClr>
+          </a:lnRef>
+          <a:fillRef idx="1">
+            <a:schemeClr val="accent1"/>
+          </a:fillRef>
+          <a:effectRef idx="0">
+            <a:schemeClr val="accent1"/>
+          </a:effectRef>
+          <a:fontRef idx="minor">
+            <a:schemeClr val="lt1"/>
+          </a:fontRef>
+        </p:style>
+        <p:txBody>
+          <a:bodyPr rtlCol="0" anchor="ctr"/>
+          <a:lstStyle/>
+          <a:p>
+            <a:pPr algn="ctr"/>
+            <a:endParaRPr lang="en-US"/>
           </a:p>
         </p:txBody>
       </p:sp>
@@ -5118,12 +6814,38 @@
             <p:ph idx="1"/>
           </p:nvPr>
         </p:nvSpPr>
-        <p:spPr/>
+        <p:spPr>
+          <a:xfrm>
+            <a:off x="1155548" y="2217343"/>
+            <a:ext cx="9880893" cy="3959619"/>
+          </a:xfrm>
+        </p:spPr>
         <p:txBody>
-          <a:bodyPr/>
+          <a:bodyPr>
+            <a:normAutofit/>
+          </a:bodyPr>
           <a:lstStyle/>
           <a:p>
-            <a:endParaRPr lang="es-PE"/>
+            <a:pPr marL="0" indent="0">
+              <a:buNone/>
+            </a:pPr>
+            <a:r>
+              <a:rPr lang="es-MX" sz="2400" dirty="0"/>
+              <a:t>Llegados a este punto, hemos logrado ofrecer a la bodega “Doña Cintia” un producto con la seguridad suficiente para permitir el acceso únicamente de empleados, hemos brindado un programa capaz de almacenar datos mediante documentos </a:t>
+            </a:r>
+            <a:r>
+              <a:rPr lang="es-MX" sz="2400" dirty="0" err="1"/>
+              <a:t>txt</a:t>
+            </a:r>
+            <a:r>
+              <a:rPr lang="es-MX" sz="2400" dirty="0"/>
+              <a:t>, que además filtra funciones dependiendo de los roles del usuario que acceda al sistema, con esto, hemos resuelto los problemas de la tienda, hemos brindado una forma mas moderna de mantener almacenado sus datos, una forma la cual no corre bajo el riesgo de perder los datos por el paso del tiempo, y que se puede mantener estable bajo una baja o alta demanda de datos ingresados, presentando así, un programa apto para un escenario tal como el de una bodega como la de “</a:t>
+            </a:r>
+            <a:r>
+              <a:rPr lang="es-MX" sz="2400"/>
+              <a:t>Doña Cintia”</a:t>
+            </a:r>
+            <a:endParaRPr lang="es-PE" sz="2400" dirty="0"/>
           </a:p>
         </p:txBody>
       </p:sp>

--- a/Caso de la bodega.pptx
+++ b/Caso de la bodega.pptx
@@ -13,13 +13,14 @@
     <p:sldId id="274" r:id="rId7"/>
     <p:sldId id="262" r:id="rId8"/>
     <p:sldId id="264" r:id="rId9"/>
-    <p:sldId id="270" r:id="rId10"/>
-    <p:sldId id="267" r:id="rId11"/>
-    <p:sldId id="268" r:id="rId12"/>
-    <p:sldId id="271" r:id="rId13"/>
-    <p:sldId id="272" r:id="rId14"/>
-    <p:sldId id="273" r:id="rId15"/>
-    <p:sldId id="269" r:id="rId16"/>
+    <p:sldId id="275" r:id="rId10"/>
+    <p:sldId id="270" r:id="rId11"/>
+    <p:sldId id="267" r:id="rId12"/>
+    <p:sldId id="268" r:id="rId13"/>
+    <p:sldId id="271" r:id="rId14"/>
+    <p:sldId id="272" r:id="rId15"/>
+    <p:sldId id="273" r:id="rId16"/>
+    <p:sldId id="269" r:id="rId17"/>
   </p:sldIdLst>
   <p:sldSz cx="12192000" cy="6858000"/>
   <p:notesSz cx="6858000" cy="9144000"/>
@@ -3580,6 +3581,564 @@
       </p:grpSpPr>
       <p:sp useBgFill="1">
         <p:nvSpPr>
+          <p:cNvPr id="11" name="Rectangle 10">
+            <a:extLst>
+              <a:ext uri="{FF2B5EF4-FFF2-40B4-BE49-F238E27FC236}">
+                <a16:creationId xmlns:a16="http://schemas.microsoft.com/office/drawing/2014/main" id="{201CC55D-ED54-4C5C-95E6-10947BD1103B}"/>
+              </a:ext>
+              <a:ext uri="{C183D7F6-B498-43B3-948B-1728B52AA6E4}">
+                <adec:decorative xmlns:adec="http://schemas.microsoft.com/office/drawing/2017/decorative" val="1"/>
+              </a:ext>
+            </a:extLst>
+          </p:cNvPr>
+          <p:cNvSpPr>
+            <a:spLocks noGrp="1" noRot="1" noChangeAspect="1" noMove="1" noResize="1" noEditPoints="1" noAdjustHandles="1" noChangeArrowheads="1" noChangeShapeType="1" noTextEdit="1"/>
+          </p:cNvSpPr>
+          <p:nvPr>
+            <p:extLst>
+              <p:ext uri="{386F3935-93C4-4BCD-93E2-E3B085C9AB24}">
+                <p16:designElem xmlns:p16="http://schemas.microsoft.com/office/powerpoint/2015/main" val="1"/>
+              </p:ext>
+            </p:extLst>
+          </p:nvPr>
+        </p:nvSpPr>
+        <p:spPr>
+          <a:xfrm>
+            <a:off x="0" y="0"/>
+            <a:ext cx="12191999" cy="6857365"/>
+          </a:xfrm>
+          <a:prstGeom prst="rect">
+            <a:avLst/>
+          </a:prstGeom>
+          <a:ln>
+            <a:noFill/>
+          </a:ln>
+        </p:spPr>
+        <p:style>
+          <a:lnRef idx="2">
+            <a:schemeClr val="accent1">
+              <a:shade val="50000"/>
+            </a:schemeClr>
+          </a:lnRef>
+          <a:fillRef idx="1">
+            <a:schemeClr val="accent1"/>
+          </a:fillRef>
+          <a:effectRef idx="0">
+            <a:schemeClr val="accent1"/>
+          </a:effectRef>
+          <a:fontRef idx="minor">
+            <a:schemeClr val="lt1"/>
+          </a:fontRef>
+        </p:style>
+        <p:txBody>
+          <a:bodyPr rtlCol="0" anchor="ctr"/>
+          <a:lstStyle/>
+          <a:p>
+            <a:pPr algn="ctr"/>
+            <a:endParaRPr lang="en-US"/>
+          </a:p>
+        </p:txBody>
+      </p:sp>
+      <p:sp>
+        <p:nvSpPr>
+          <p:cNvPr id="2" name="Title 1">
+            <a:extLst>
+              <a:ext uri="{FF2B5EF4-FFF2-40B4-BE49-F238E27FC236}">
+                <a16:creationId xmlns:a16="http://schemas.microsoft.com/office/drawing/2014/main" id="{FCCBE8FF-4575-2176-FADE-0E77419583AA}"/>
+              </a:ext>
+            </a:extLst>
+          </p:cNvPr>
+          <p:cNvSpPr>
+            <a:spLocks noGrp="1"/>
+          </p:cNvSpPr>
+          <p:nvPr>
+            <p:ph type="title"/>
+          </p:nvPr>
+        </p:nvSpPr>
+        <p:spPr>
+          <a:xfrm>
+            <a:off x="589560" y="856180"/>
+            <a:ext cx="4560584" cy="1128068"/>
+          </a:xfrm>
+        </p:spPr>
+        <p:txBody>
+          <a:bodyPr vert="horz" lIns="91440" tIns="45720" rIns="91440" bIns="45720" rtlCol="0" anchor="ctr">
+            <a:normAutofit/>
+          </a:bodyPr>
+          <a:lstStyle/>
+          <a:p>
+            <a:r>
+              <a:rPr lang="en-US" sz="4000"/>
+              <a:t>Código en C#</a:t>
+            </a:r>
+          </a:p>
+        </p:txBody>
+      </p:sp>
+      <p:grpSp>
+        <p:nvGrpSpPr>
+          <p:cNvPr id="13" name="Group 12">
+            <a:extLst>
+              <a:ext uri="{FF2B5EF4-FFF2-40B4-BE49-F238E27FC236}">
+                <a16:creationId xmlns:a16="http://schemas.microsoft.com/office/drawing/2014/main" id="{1DE889C7-FAD6-4397-98E2-05D503484459}"/>
+              </a:ext>
+              <a:ext uri="{C183D7F6-B498-43B3-948B-1728B52AA6E4}">
+                <adec:decorative xmlns:adec="http://schemas.microsoft.com/office/drawing/2017/decorative" val="1"/>
+              </a:ext>
+            </a:extLst>
+          </p:cNvPr>
+          <p:cNvGrpSpPr>
+            <a:grpSpLocks noGrp="1" noUngrp="1" noRot="1" noChangeAspect="1" noMove="1" noResize="1"/>
+          </p:cNvGrpSpPr>
+          <p:nvPr>
+            <p:extLst>
+              <p:ext uri="{386F3935-93C4-4BCD-93E2-E3B085C9AB24}">
+                <p16:designElem xmlns:p16="http://schemas.microsoft.com/office/powerpoint/2015/main" val="1"/>
+              </p:ext>
+            </p:extLst>
+          </p:nvPr>
+        </p:nvGrpSpPr>
+        <p:grpSpPr>
+          <a:xfrm>
+            <a:off x="0" y="1083484"/>
+            <a:ext cx="355196" cy="673460"/>
+            <a:chOff x="0" y="823811"/>
+            <a:chExt cx="355196" cy="673460"/>
+          </a:xfrm>
+        </p:grpSpPr>
+        <p:sp>
+          <p:nvSpPr>
+            <p:cNvPr id="14" name="Rectangle 13">
+              <a:extLst>
+                <a:ext uri="{FF2B5EF4-FFF2-40B4-BE49-F238E27FC236}">
+                  <a16:creationId xmlns:a16="http://schemas.microsoft.com/office/drawing/2014/main" id="{F399A70F-F8CD-4992-9EF5-6CF15472E73F}"/>
+                </a:ext>
+                <a:ext uri="{C183D7F6-B498-43B3-948B-1728B52AA6E4}">
+                  <adec:decorative xmlns:adec="http://schemas.microsoft.com/office/drawing/2017/decorative" val="1"/>
+                </a:ext>
+              </a:extLst>
+            </p:cNvPr>
+            <p:cNvSpPr/>
+            <p:nvPr>
+              <p:extLst>
+                <p:ext uri="{386F3935-93C4-4BCD-93E2-E3B085C9AB24}">
+                  <p16:designElem xmlns:p16="http://schemas.microsoft.com/office/powerpoint/2015/main" val="1"/>
+                </p:ext>
+              </p:extLst>
+            </p:nvPr>
+          </p:nvSpPr>
+          <p:spPr>
+            <a:xfrm>
+              <a:off x="0" y="823811"/>
+              <a:ext cx="87363" cy="673460"/>
+            </a:xfrm>
+            <a:prstGeom prst="rect">
+              <a:avLst/>
+            </a:prstGeom>
+            <a:solidFill>
+              <a:schemeClr val="accent4"/>
+            </a:solidFill>
+            <a:ln>
+              <a:noFill/>
+            </a:ln>
+          </p:spPr>
+          <p:style>
+            <a:lnRef idx="2">
+              <a:schemeClr val="accent1">
+                <a:shade val="50000"/>
+              </a:schemeClr>
+            </a:lnRef>
+            <a:fillRef idx="1">
+              <a:schemeClr val="accent1"/>
+            </a:fillRef>
+            <a:effectRef idx="0">
+              <a:schemeClr val="accent1"/>
+            </a:effectRef>
+            <a:fontRef idx="minor">
+              <a:schemeClr val="lt1"/>
+            </a:fontRef>
+          </p:style>
+          <p:txBody>
+            <a:bodyPr rtlCol="0" anchor="ctr"/>
+            <a:lstStyle/>
+            <a:p>
+              <a:pPr algn="ctr"/>
+              <a:endParaRPr lang="en-US"/>
+            </a:p>
+          </p:txBody>
+        </p:sp>
+        <p:sp>
+          <p:nvSpPr>
+            <p:cNvPr id="15" name="Rectangle 14">
+              <a:extLst>
+                <a:ext uri="{FF2B5EF4-FFF2-40B4-BE49-F238E27FC236}">
+                  <a16:creationId xmlns:a16="http://schemas.microsoft.com/office/drawing/2014/main" id="{48F4FEDC-6D80-458C-A665-075D9B9500FD}"/>
+                </a:ext>
+                <a:ext uri="{C183D7F6-B498-43B3-948B-1728B52AA6E4}">
+                  <adec:decorative xmlns:adec="http://schemas.microsoft.com/office/drawing/2017/decorative" val="1"/>
+                </a:ext>
+              </a:extLst>
+            </p:cNvPr>
+            <p:cNvSpPr/>
+            <p:nvPr>
+              <p:extLst>
+                <p:ext uri="{386F3935-93C4-4BCD-93E2-E3B085C9AB24}">
+                  <p16:designElem xmlns:p16="http://schemas.microsoft.com/office/powerpoint/2015/main" val="1"/>
+                </p:ext>
+              </p:extLst>
+            </p:nvPr>
+          </p:nvSpPr>
+          <p:spPr>
+            <a:xfrm>
+              <a:off x="159341" y="823811"/>
+              <a:ext cx="195855" cy="673460"/>
+            </a:xfrm>
+            <a:prstGeom prst="rect">
+              <a:avLst/>
+            </a:prstGeom>
+            <a:solidFill>
+              <a:schemeClr val="accent4"/>
+            </a:solidFill>
+            <a:ln>
+              <a:noFill/>
+            </a:ln>
+          </p:spPr>
+          <p:style>
+            <a:lnRef idx="2">
+              <a:schemeClr val="accent1">
+                <a:shade val="50000"/>
+              </a:schemeClr>
+            </a:lnRef>
+            <a:fillRef idx="1">
+              <a:schemeClr val="accent1"/>
+            </a:fillRef>
+            <a:effectRef idx="0">
+              <a:schemeClr val="accent1"/>
+            </a:effectRef>
+            <a:fontRef idx="minor">
+              <a:schemeClr val="lt1"/>
+            </a:fontRef>
+          </p:style>
+          <p:txBody>
+            <a:bodyPr rtlCol="0" anchor="ctr"/>
+            <a:lstStyle/>
+            <a:p>
+              <a:pPr algn="ctr"/>
+              <a:endParaRPr lang="en-US"/>
+            </a:p>
+          </p:txBody>
+        </p:sp>
+      </p:grpSp>
+      <p:sp>
+        <p:nvSpPr>
+          <p:cNvPr id="17" name="Rectangle 16">
+            <a:extLst>
+              <a:ext uri="{FF2B5EF4-FFF2-40B4-BE49-F238E27FC236}">
+                <a16:creationId xmlns:a16="http://schemas.microsoft.com/office/drawing/2014/main" id="{3873B707-463F-40B0-8227-E8CC6C67EB25}"/>
+              </a:ext>
+              <a:ext uri="{C183D7F6-B498-43B3-948B-1728B52AA6E4}">
+                <adec:decorative xmlns:adec="http://schemas.microsoft.com/office/drawing/2017/decorative" val="1"/>
+              </a:ext>
+            </a:extLst>
+          </p:cNvPr>
+          <p:cNvSpPr>
+            <a:spLocks noGrp="1" noRot="1" noChangeAspect="1" noMove="1" noResize="1" noEditPoints="1" noAdjustHandles="1" noChangeArrowheads="1" noChangeShapeType="1" noTextEdit="1"/>
+          </p:cNvSpPr>
+          <p:nvPr>
+            <p:extLst>
+              <p:ext uri="{386F3935-93C4-4BCD-93E2-E3B085C9AB24}">
+                <p16:designElem xmlns:p16="http://schemas.microsoft.com/office/powerpoint/2015/main" val="1"/>
+              </p:ext>
+            </p:extLst>
+          </p:nvPr>
+        </p:nvSpPr>
+        <p:spPr>
+          <a:xfrm flipH="1">
+            <a:off x="665085" y="2090569"/>
+            <a:ext cx="4297680" cy="27432"/>
+          </a:xfrm>
+          <a:prstGeom prst="rect">
+            <a:avLst/>
+          </a:prstGeom>
+          <a:solidFill>
+            <a:schemeClr val="accent4"/>
+          </a:solidFill>
+          <a:ln>
+            <a:noFill/>
+          </a:ln>
+        </p:spPr>
+        <p:style>
+          <a:lnRef idx="2">
+            <a:schemeClr val="accent1">
+              <a:shade val="50000"/>
+            </a:schemeClr>
+          </a:lnRef>
+          <a:fillRef idx="1">
+            <a:schemeClr val="accent1"/>
+          </a:fillRef>
+          <a:effectRef idx="0">
+            <a:schemeClr val="accent1"/>
+          </a:effectRef>
+          <a:fontRef idx="minor">
+            <a:schemeClr val="lt1"/>
+          </a:fontRef>
+        </p:style>
+        <p:txBody>
+          <a:bodyPr rtlCol="0" anchor="ctr"/>
+          <a:lstStyle/>
+          <a:p>
+            <a:pPr algn="ctr"/>
+            <a:endParaRPr lang="en-US"/>
+          </a:p>
+        </p:txBody>
+      </p:sp>
+      <p:sp>
+        <p:nvSpPr>
+          <p:cNvPr id="5" name="Text Placeholder 4">
+            <a:extLst>
+              <a:ext uri="{FF2B5EF4-FFF2-40B4-BE49-F238E27FC236}">
+                <a16:creationId xmlns:a16="http://schemas.microsoft.com/office/drawing/2014/main" id="{13C1F0A0-2ABF-2C09-A4F4-A88606981888}"/>
+              </a:ext>
+            </a:extLst>
+          </p:cNvPr>
+          <p:cNvSpPr txBox="1">
+            <a:spLocks noGrp="1"/>
+          </p:cNvSpPr>
+          <p:nvPr>
+            <p:ph type="body" sz="half" idx="2"/>
+          </p:nvPr>
+        </p:nvSpPr>
+        <p:spPr>
+          <a:xfrm>
+            <a:off x="590719" y="2330505"/>
+            <a:ext cx="4559425" cy="3979585"/>
+          </a:xfrm>
+          <a:prstGeom prst="rect">
+            <a:avLst/>
+          </a:prstGeom>
+        </p:spPr>
+        <p:txBody>
+          <a:bodyPr vert="horz" lIns="91440" tIns="45720" rIns="91440" bIns="45720" rtlCol="0" anchor="ctr">
+            <a:normAutofit/>
+          </a:bodyPr>
+          <a:lstStyle/>
+          <a:p>
+            <a:pPr indent="-228600">
+              <a:buFont typeface="Arial" panose="020B0604020202020204" pitchFamily="34" charset="0"/>
+              <a:buChar char="•"/>
+            </a:pPr>
+            <a:r>
+              <a:rPr lang="en-US" sz="2000"/>
+              <a:t>Esta es una de las primeras cosas que ve el administrador de la empresa, el login, su función no es solo detener el paso de los usuarios que no cumplen con las credenciales necesarias para acceder a las diversas funciones, sino también, e inicialmente, almacenar la lista de trabajadores, sus roles, y sus contraseñas</a:t>
+            </a:r>
+          </a:p>
+        </p:txBody>
+      </p:sp>
+      <p:sp>
+        <p:nvSpPr>
+          <p:cNvPr id="19" name="Rectangle 18">
+            <a:extLst>
+              <a:ext uri="{FF2B5EF4-FFF2-40B4-BE49-F238E27FC236}">
+                <a16:creationId xmlns:a16="http://schemas.microsoft.com/office/drawing/2014/main" id="{C13237C8-E62C-4F0D-A318-BD6FB6C2D138}"/>
+              </a:ext>
+              <a:ext uri="{C183D7F6-B498-43B3-948B-1728B52AA6E4}">
+                <adec:decorative xmlns:adec="http://schemas.microsoft.com/office/drawing/2017/decorative" val="1"/>
+              </a:ext>
+            </a:extLst>
+          </p:cNvPr>
+          <p:cNvSpPr>
+            <a:spLocks noGrp="1" noRot="1" noChangeAspect="1" noMove="1" noResize="1" noEditPoints="1" noAdjustHandles="1" noChangeArrowheads="1" noChangeShapeType="1" noTextEdit="1"/>
+          </p:cNvSpPr>
+          <p:nvPr>
+            <p:extLst>
+              <p:ext uri="{386F3935-93C4-4BCD-93E2-E3B085C9AB24}">
+                <p16:designElem xmlns:p16="http://schemas.microsoft.com/office/powerpoint/2015/main" val="1"/>
+              </p:ext>
+            </p:extLst>
+          </p:nvPr>
+        </p:nvSpPr>
+        <p:spPr>
+          <a:xfrm flipH="1">
+            <a:off x="10697670" y="0"/>
+            <a:ext cx="1494330" cy="6858000"/>
+          </a:xfrm>
+          <a:prstGeom prst="rect">
+            <a:avLst/>
+          </a:prstGeom>
+          <a:solidFill>
+            <a:schemeClr val="accent4"/>
+          </a:solidFill>
+          <a:ln>
+            <a:noFill/>
+          </a:ln>
+        </p:spPr>
+        <p:style>
+          <a:lnRef idx="2">
+            <a:schemeClr val="accent1">
+              <a:shade val="50000"/>
+            </a:schemeClr>
+          </a:lnRef>
+          <a:fillRef idx="1">
+            <a:schemeClr val="accent1"/>
+          </a:fillRef>
+          <a:effectRef idx="0">
+            <a:schemeClr val="accent1"/>
+          </a:effectRef>
+          <a:fontRef idx="minor">
+            <a:schemeClr val="lt1"/>
+          </a:fontRef>
+        </p:style>
+        <p:txBody>
+          <a:bodyPr rtlCol="0" anchor="ctr"/>
+          <a:lstStyle/>
+          <a:p>
+            <a:pPr algn="ctr"/>
+            <a:endParaRPr lang="en-US"/>
+          </a:p>
+        </p:txBody>
+      </p:sp>
+      <p:sp>
+        <p:nvSpPr>
+          <p:cNvPr id="21" name="Rectangle 20">
+            <a:extLst>
+              <a:ext uri="{FF2B5EF4-FFF2-40B4-BE49-F238E27FC236}">
+                <a16:creationId xmlns:a16="http://schemas.microsoft.com/office/drawing/2014/main" id="{19C9EAEA-39D0-4B0E-A0EB-51E7B26740B1}"/>
+              </a:ext>
+              <a:ext uri="{C183D7F6-B498-43B3-948B-1728B52AA6E4}">
+                <adec:decorative xmlns:adec="http://schemas.microsoft.com/office/drawing/2017/decorative" val="1"/>
+              </a:ext>
+            </a:extLst>
+          </p:cNvPr>
+          <p:cNvSpPr>
+            <a:spLocks noGrp="1" noRot="1" noChangeAspect="1" noMove="1" noResize="1" noEditPoints="1" noAdjustHandles="1" noChangeArrowheads="1" noChangeShapeType="1" noTextEdit="1"/>
+          </p:cNvSpPr>
+          <p:nvPr>
+            <p:extLst>
+              <p:ext uri="{386F3935-93C4-4BCD-93E2-E3B085C9AB24}">
+                <p16:designElem xmlns:p16="http://schemas.microsoft.com/office/powerpoint/2015/main" val="1"/>
+              </p:ext>
+            </p:extLst>
+          </p:nvPr>
+        </p:nvSpPr>
+        <p:spPr>
+          <a:xfrm>
+            <a:off x="5685810" y="513853"/>
+            <a:ext cx="6009366" cy="5834577"/>
+          </a:xfrm>
+          <a:prstGeom prst="rect">
+            <a:avLst/>
+          </a:prstGeom>
+          <a:solidFill>
+            <a:schemeClr val="bg1"/>
+          </a:solidFill>
+          <a:ln>
+            <a:noFill/>
+          </a:ln>
+          <a:effectLst>
+            <a:outerShdw blurRad="139700" dist="127000" dir="5400000" algn="t" rotWithShape="0">
+              <a:prstClr val="black">
+                <a:alpha val="15000"/>
+              </a:prstClr>
+            </a:outerShdw>
+          </a:effectLst>
+        </p:spPr>
+        <p:style>
+          <a:lnRef idx="2">
+            <a:schemeClr val="accent1">
+              <a:shade val="50000"/>
+            </a:schemeClr>
+          </a:lnRef>
+          <a:fillRef idx="1">
+            <a:schemeClr val="accent1"/>
+          </a:fillRef>
+          <a:effectRef idx="0">
+            <a:schemeClr val="accent1"/>
+          </a:effectRef>
+          <a:fontRef idx="minor">
+            <a:schemeClr val="lt1"/>
+          </a:fontRef>
+        </p:style>
+        <p:txBody>
+          <a:bodyPr rtlCol="0" anchor="ctr"/>
+          <a:lstStyle/>
+          <a:p>
+            <a:pPr algn="ctr"/>
+            <a:endParaRPr lang="en-US"/>
+          </a:p>
+        </p:txBody>
+      </p:sp>
+      <p:pic>
+        <p:nvPicPr>
+          <p:cNvPr id="6" name="Content Placeholder 5">
+            <a:extLst>
+              <a:ext uri="{FF2B5EF4-FFF2-40B4-BE49-F238E27FC236}">
+                <a16:creationId xmlns:a16="http://schemas.microsoft.com/office/drawing/2014/main" id="{A47BB163-5548-0904-B14E-1AF85240280C}"/>
+              </a:ext>
+            </a:extLst>
+          </p:cNvPr>
+          <p:cNvPicPr>
+            <a:picLocks noGrp="1" noChangeAspect="1"/>
+          </p:cNvPicPr>
+          <p:nvPr>
+            <p:ph idx="1"/>
+          </p:nvPr>
+        </p:nvPicPr>
+        <p:blipFill>
+          <a:blip r:embed="rId2"/>
+          <a:srcRect r="1742" b="1"/>
+          <a:stretch>
+            <a:fillRect/>
+          </a:stretch>
+        </p:blipFill>
+        <p:spPr>
+          <a:xfrm>
+            <a:off x="5977788" y="799352"/>
+            <a:ext cx="5425410" cy="5259296"/>
+          </a:xfrm>
+          <a:prstGeom prst="rect">
+            <a:avLst/>
+          </a:prstGeom>
+        </p:spPr>
+      </p:pic>
+    </p:spTree>
+    <p:extLst>
+      <p:ext uri="{BB962C8B-B14F-4D97-AF65-F5344CB8AC3E}">
+        <p14:creationId xmlns:p14="http://schemas.microsoft.com/office/powerpoint/2010/main" val="1219177288"/>
+      </p:ext>
+    </p:extLst>
+  </p:cSld>
+  <p:clrMapOvr>
+    <a:masterClrMapping/>
+  </p:clrMapOvr>
+</p:sld>
+</file>
+
+<file path=ppt/slides/slide11.xml><?xml version="1.0" encoding="utf-8"?>
+<p:sld xmlns:a="http://schemas.openxmlformats.org/drawingml/2006/main" xmlns:r="http://schemas.openxmlformats.org/officeDocument/2006/relationships" xmlns:p="http://schemas.openxmlformats.org/presentationml/2006/main">
+  <p:cSld>
+    <p:bg>
+      <p:bgPr>
+        <a:solidFill>
+          <a:schemeClr val="bg1"/>
+        </a:solidFill>
+        <a:effectLst/>
+      </p:bgPr>
+    </p:bg>
+    <p:spTree>
+      <p:nvGrpSpPr>
+        <p:cNvPr id="1" name=""/>
+        <p:cNvGrpSpPr/>
+        <p:nvPr/>
+      </p:nvGrpSpPr>
+      <p:grpSpPr>
+        <a:xfrm>
+          <a:off x="0" y="0"/>
+          <a:ext cx="0" cy="0"/>
+          <a:chOff x="0" y="0"/>
+          <a:chExt cx="0" cy="0"/>
+        </a:xfrm>
+      </p:grpSpPr>
+      <p:sp useBgFill="1">
+        <p:nvSpPr>
           <p:cNvPr id="13" name="Rectangle 12">
             <a:extLst>
               <a:ext uri="{FF2B5EF4-FFF2-40B4-BE49-F238E27FC236}">
@@ -4163,7 +4722,7 @@
 </p:sld>
 </file>
 
-<file path=ppt/slides/slide11.xml><?xml version="1.0" encoding="utf-8"?>
+<file path=ppt/slides/slide12.xml><?xml version="1.0" encoding="utf-8"?>
 <p:sld xmlns:a="http://schemas.openxmlformats.org/drawingml/2006/main" xmlns:r="http://schemas.openxmlformats.org/officeDocument/2006/relationships" xmlns:p="http://schemas.openxmlformats.org/presentationml/2006/main">
   <p:cSld>
     <p:bg>
@@ -4696,7 +5255,7 @@
 </p:sld>
 </file>
 
-<file path=ppt/slides/slide12.xml><?xml version="1.0" encoding="utf-8"?>
+<file path=ppt/slides/slide13.xml><?xml version="1.0" encoding="utf-8"?>
 <p:sld xmlns:a="http://schemas.openxmlformats.org/drawingml/2006/main" xmlns:r="http://schemas.openxmlformats.org/officeDocument/2006/relationships" xmlns:p="http://schemas.openxmlformats.org/presentationml/2006/main">
   <p:cSld>
     <p:bg>
@@ -5455,7 +6014,7 @@
 </p:sld>
 </file>
 
-<file path=ppt/slides/slide13.xml><?xml version="1.0" encoding="utf-8"?>
+<file path=ppt/slides/slide14.xml><?xml version="1.0" encoding="utf-8"?>
 <p:sld xmlns:a="http://schemas.openxmlformats.org/drawingml/2006/main" xmlns:r="http://schemas.openxmlformats.org/officeDocument/2006/relationships" xmlns:p="http://schemas.openxmlformats.org/presentationml/2006/main">
   <p:cSld>
     <p:bg>
@@ -5857,7 +6416,7 @@
 </p:sld>
 </file>
 
-<file path=ppt/slides/slide14.xml><?xml version="1.0" encoding="utf-8"?>
+<file path=ppt/slides/slide15.xml><?xml version="1.0" encoding="utf-8"?>
 <p:sld xmlns:a="http://schemas.openxmlformats.org/drawingml/2006/main" xmlns:r="http://schemas.openxmlformats.org/officeDocument/2006/relationships" xmlns:p="http://schemas.openxmlformats.org/presentationml/2006/main">
   <p:cSld>
     <p:bg>
@@ -6535,7 +7094,7 @@
 </p:sld>
 </file>
 
-<file path=ppt/slides/slide15.xml><?xml version="1.0" encoding="utf-8"?>
+<file path=ppt/slides/slide16.xml><?xml version="1.0" encoding="utf-8"?>
 <p:sld xmlns:a="http://schemas.openxmlformats.org/drawingml/2006/main" xmlns:r="http://schemas.openxmlformats.org/officeDocument/2006/relationships" xmlns:p="http://schemas.openxmlformats.org/presentationml/2006/main">
   <p:cSld>
     <p:bg>
@@ -6839,11 +7398,7 @@
             </a:r>
             <a:r>
               <a:rPr lang="es-MX" sz="2400" dirty="0"/>
-              <a:t>, que además filtra funciones dependiendo de los roles del usuario que acceda al sistema, con esto, hemos resuelto los problemas de la tienda, hemos brindado una forma mas moderna de mantener almacenado sus datos, una forma la cual no corre bajo el riesgo de perder los datos por el paso del tiempo, y que se puede mantener estable bajo una baja o alta demanda de datos ingresados, presentando así, un programa apto para un escenario tal como el de una bodega como la de “</a:t>
-            </a:r>
-            <a:r>
-              <a:rPr lang="es-MX" sz="2400"/>
-              <a:t>Doña Cintia”</a:t>
+              <a:t>, que además filtra funciones dependiendo de los roles del usuario que acceda al sistema, con esto, hemos resuelto los problemas de la tienda, hemos brindado una forma mas moderna de mantener almacenado sus datos, una forma la cual no corre bajo el riesgo de perder los datos por el paso del tiempo, y que se puede mantener estable bajo una baja o alta demanda de datos ingresados, presentando así, un programa apto para un escenario tal como el de una bodega como la de “Doña Cintia”</a:t>
             </a:r>
             <a:endParaRPr lang="es-PE" sz="2400" dirty="0"/>
           </a:p>
@@ -7127,14 +7682,14 @@
               <a:buNone/>
             </a:pPr>
             <a:r>
-              <a:rPr lang="es-MX" sz="1800">
+              <a:rPr lang="es-MX" sz="1800" dirty="0">
                 <a:solidFill>
                   <a:schemeClr val="tx2"/>
                 </a:solidFill>
               </a:rPr>
-              <a:t>La bodega “Doña Cintia” es un local que en los últimos meses ha estado reportando irregularidades en sus ganancias, en el reporte de su inventario, y en el manejo de sus impuestos, es una bodega que depende principalmente de la venta de sus productos de primera mano no solo para poder mantener la bodega en pie sino también para cubrir parte de las necesidades de la dueña de la bodega, Cintia.</a:t>
-            </a:r>
-            <a:endParaRPr lang="es-PE" sz="1800">
+              <a:t>La bodega “Doña Cintia” es un local que en los últimos meses ha estado reportando irregularidades en sus ganancias, en el reporte de su inventario, y en el manejo de sus impuestos, es una bodega que depende principalmente de la venta de sus productos de primera mano no solo para poder mantener la bodega.</a:t>
+            </a:r>
+            <a:endParaRPr lang="es-PE" sz="1800" dirty="0">
               <a:solidFill>
                 <a:schemeClr val="tx2"/>
               </a:solidFill>
@@ -10752,10 +11307,26 @@
           <a:lstStyle/>
           <a:p>
             <a:r>
-              <a:rPr lang="es-MX" sz="2000"/>
-              <a:t>Durante la entrevista que realizamos a Doña Cintia para recolectar datos y poder hallar las consecuencias de estos problemas, nos dimos cuenta de que al tratarse de una bodega local, se mantiene bajo el uso de registros tradicionales, libros, ficheros, cosa lo cual puede ser muy manipulable por los mismos trabajadores de Cintia, Cintia nos comento en la entrevista que ella ocupa un rango de trabajo dentro de la bodega de dos días no seguidos, mientras el resto de días son ocupados por sus empleados. Esos mismos días, Cintia eventualmente solo se encarga de revisar que los productos para restock lleguen, por lo que no suele tener mucho en cuenta lo que hay en su bodega hasta el día en el que tiene que verificar por cuenta propia y los Domingos, donde hace el calculo de sus ventas y de almacen para saber que productos retirar y cuales mantener, además de cuales reponer</a:t>
-            </a:r>
-            <a:endParaRPr lang="es-PE" sz="2000"/>
+              <a:rPr lang="es-MX" sz="2000" dirty="0"/>
+              <a:t>Durante la entrevista que realizamos a Doña Cintia para recolectar datos y poder hallar las consecuencias de estos problemas, nos dimos cuenta de que al tratarse de una bodega local, se mantiene bajo el uso de registros tradicionales, libros, ficheros, cosa lo cual puede ser muy manipulable por los mismos trabajadores de Cintia, </a:t>
+            </a:r>
+            <a:r>
+              <a:rPr lang="es-MX" sz="2000" dirty="0" err="1"/>
+              <a:t>Cintisa</a:t>
+            </a:r>
+            <a:r>
+              <a:rPr lang="es-MX" sz="2000" dirty="0"/>
+              <a:t> nos comento en la entrevista que ella se encarga de la bodega los días Lunes y Domingos, mientras el resto de días son ocupados por sus empleados. Esos mismos días, Cintia eventualmente solo se encarga de revisar que los productos para </a:t>
+            </a:r>
+            <a:r>
+              <a:rPr lang="es-MX" sz="2000" dirty="0" err="1"/>
+              <a:t>restock</a:t>
+            </a:r>
+            <a:r>
+              <a:rPr lang="es-MX" sz="2000" dirty="0"/>
+              <a:t> lleguen, por lo que no suele tener mucho en cuenta lo que hay en su bodega hasta el día en el que tiene que verificar por cuenta propia y los Domingos, donde hace el calculo de sus ventas y de almacén para saber que productos retirar y cuales mantener, además de cuales reponer.</a:t>
+            </a:r>
+            <a:endParaRPr lang="es-PE" sz="2000" dirty="0"/>
           </a:p>
         </p:txBody>
       </p:sp>
@@ -13449,6 +14020,14 @@
 <file path=ppt/slides/slide5.xml><?xml version="1.0" encoding="utf-8"?>
 <p:sld xmlns:a="http://schemas.openxmlformats.org/drawingml/2006/main" xmlns:r="http://schemas.openxmlformats.org/officeDocument/2006/relationships" xmlns:p="http://schemas.openxmlformats.org/presentationml/2006/main">
   <p:cSld>
+    <p:bg>
+      <p:bgPr>
+        <a:solidFill>
+          <a:schemeClr val="bg1"/>
+        </a:solidFill>
+        <a:effectLst/>
+      </p:bgPr>
+    </p:bg>
     <p:spTree>
       <p:nvGrpSpPr>
         <p:cNvPr id="1" name=""/>
@@ -13463,6 +14042,222 @@
           <a:chExt cx="0" cy="0"/>
         </a:xfrm>
       </p:grpSpPr>
+      <p:sp useBgFill="1">
+        <p:nvSpPr>
+          <p:cNvPr id="9" name="Rectangle 8">
+            <a:extLst>
+              <a:ext uri="{FF2B5EF4-FFF2-40B4-BE49-F238E27FC236}">
+                <a16:creationId xmlns:a16="http://schemas.microsoft.com/office/drawing/2014/main" id="{545D489D-16E1-484D-867B-144368D74B83}"/>
+              </a:ext>
+              <a:ext uri="{C183D7F6-B498-43B3-948B-1728B52AA6E4}">
+                <adec:decorative xmlns:adec="http://schemas.microsoft.com/office/drawing/2017/decorative" val="1"/>
+              </a:ext>
+            </a:extLst>
+          </p:cNvPr>
+          <p:cNvSpPr>
+            <a:spLocks noGrp="1" noRot="1" noChangeAspect="1" noMove="1" noResize="1" noEditPoints="1" noAdjustHandles="1" noChangeArrowheads="1" noChangeShapeType="1" noTextEdit="1"/>
+          </p:cNvSpPr>
+          <p:nvPr>
+            <p:extLst>
+              <p:ext uri="{386F3935-93C4-4BCD-93E2-E3B085C9AB24}">
+                <p16:designElem xmlns:p16="http://schemas.microsoft.com/office/powerpoint/2015/main" val="1"/>
+              </p:ext>
+            </p:extLst>
+          </p:nvPr>
+        </p:nvSpPr>
+        <p:spPr>
+          <a:xfrm>
+            <a:off x="0" y="0"/>
+            <a:ext cx="12188952" cy="6858000"/>
+          </a:xfrm>
+          <a:prstGeom prst="rect">
+            <a:avLst/>
+          </a:prstGeom>
+          <a:ln>
+            <a:noFill/>
+          </a:ln>
+        </p:spPr>
+        <p:style>
+          <a:lnRef idx="2">
+            <a:schemeClr val="accent1">
+              <a:shade val="50000"/>
+            </a:schemeClr>
+          </a:lnRef>
+          <a:fillRef idx="1">
+            <a:schemeClr val="accent1"/>
+          </a:fillRef>
+          <a:effectRef idx="0">
+            <a:schemeClr val="accent1"/>
+          </a:effectRef>
+          <a:fontRef idx="minor">
+            <a:schemeClr val="lt1"/>
+          </a:fontRef>
+        </p:style>
+        <p:txBody>
+          <a:bodyPr rtlCol="0" anchor="ctr"/>
+          <a:lstStyle/>
+          <a:p>
+            <a:pPr algn="ctr"/>
+            <a:endParaRPr lang="en-US"/>
+          </a:p>
+        </p:txBody>
+      </p:sp>
+      <p:sp>
+        <p:nvSpPr>
+          <p:cNvPr id="11" name="Rectangle 10">
+            <a:extLst>
+              <a:ext uri="{FF2B5EF4-FFF2-40B4-BE49-F238E27FC236}">
+                <a16:creationId xmlns:a16="http://schemas.microsoft.com/office/drawing/2014/main" id="{49A496F5-B01E-4BF8-9D1E-C4E53B6F9652}"/>
+              </a:ext>
+              <a:ext uri="{C183D7F6-B498-43B3-948B-1728B52AA6E4}">
+                <adec:decorative xmlns:adec="http://schemas.microsoft.com/office/drawing/2017/decorative" val="1"/>
+              </a:ext>
+            </a:extLst>
+          </p:cNvPr>
+          <p:cNvSpPr>
+            <a:spLocks noGrp="1" noRot="1" noChangeAspect="1" noMove="1" noResize="1" noEditPoints="1" noAdjustHandles="1" noChangeArrowheads="1" noChangeShapeType="1" noTextEdit="1"/>
+          </p:cNvSpPr>
+          <p:nvPr>
+            <p:extLst>
+              <p:ext uri="{386F3935-93C4-4BCD-93E2-E3B085C9AB24}">
+                <p16:designElem xmlns:p16="http://schemas.microsoft.com/office/powerpoint/2015/main" val="1"/>
+              </p:ext>
+            </p:extLst>
+          </p:nvPr>
+        </p:nvSpPr>
+        <p:spPr>
+          <a:xfrm>
+            <a:off x="0" y="0"/>
+            <a:ext cx="4522573" cy="6858000"/>
+          </a:xfrm>
+          <a:prstGeom prst="rect">
+            <a:avLst/>
+          </a:prstGeom>
+          <a:solidFill>
+            <a:schemeClr val="accent2"/>
+          </a:solidFill>
+          <a:ln>
+            <a:noFill/>
+          </a:ln>
+        </p:spPr>
+        <p:style>
+          <a:lnRef idx="2">
+            <a:schemeClr val="accent1">
+              <a:shade val="50000"/>
+            </a:schemeClr>
+          </a:lnRef>
+          <a:fillRef idx="1">
+            <a:schemeClr val="accent1"/>
+          </a:fillRef>
+          <a:effectRef idx="0">
+            <a:schemeClr val="accent1"/>
+          </a:effectRef>
+          <a:fontRef idx="minor">
+            <a:schemeClr val="lt1"/>
+          </a:fontRef>
+        </p:style>
+        <p:txBody>
+          <a:bodyPr rtlCol="0" anchor="ctr"/>
+          <a:lstStyle/>
+          <a:p>
+            <a:pPr algn="ctr"/>
+            <a:endParaRPr lang="en-US"/>
+          </a:p>
+        </p:txBody>
+      </p:sp>
+      <p:sp>
+        <p:nvSpPr>
+          <p:cNvPr id="13" name="Arc 12">
+            <a:extLst>
+              <a:ext uri="{FF2B5EF4-FFF2-40B4-BE49-F238E27FC236}">
+                <a16:creationId xmlns:a16="http://schemas.microsoft.com/office/drawing/2014/main" id="{6E895C8D-1379-40B8-8B1B-B6F5AEAF0A6C}"/>
+              </a:ext>
+              <a:ext uri="{C183D7F6-B498-43B3-948B-1728B52AA6E4}">
+                <adec:decorative xmlns:adec="http://schemas.microsoft.com/office/drawing/2017/decorative" val="1"/>
+              </a:ext>
+            </a:extLst>
+          </p:cNvPr>
+          <p:cNvSpPr>
+            <a:spLocks noGrp="1" noRot="1" noChangeAspect="1" noMove="1" noResize="1" noEditPoints="1" noAdjustHandles="1" noChangeArrowheads="1" noChangeShapeType="1" noTextEdit="1"/>
+          </p:cNvSpPr>
+          <p:nvPr>
+            <p:extLst>
+              <p:ext uri="{386F3935-93C4-4BCD-93E2-E3B085C9AB24}">
+                <p16:designElem xmlns:p16="http://schemas.microsoft.com/office/powerpoint/2015/main" val="1"/>
+              </p:ext>
+            </p:extLst>
+          </p:nvPr>
+        </p:nvSpPr>
+        <p:spPr>
+          <a:xfrm rot="20746107">
+            <a:off x="2906963" y="1348064"/>
+            <a:ext cx="2987899" cy="2987899"/>
+          </a:xfrm>
+          <a:prstGeom prst="arc">
+            <a:avLst>
+              <a:gd name="adj1" fmla="val 14612914"/>
+              <a:gd name="adj2" fmla="val 0"/>
+            </a:avLst>
+          </a:prstGeom>
+          <a:ln w="127000" cap="rnd">
+            <a:solidFill>
+              <a:schemeClr val="accent4"/>
+            </a:solidFill>
+            <a:prstDash val="dash"/>
+          </a:ln>
+        </p:spPr>
+        <p:style>
+          <a:lnRef idx="1">
+            <a:schemeClr val="accent1"/>
+          </a:lnRef>
+          <a:fillRef idx="0">
+            <a:schemeClr val="accent1"/>
+          </a:fillRef>
+          <a:effectRef idx="0">
+            <a:schemeClr val="accent1"/>
+          </a:effectRef>
+          <a:fontRef idx="minor">
+            <a:schemeClr val="tx1"/>
+          </a:fontRef>
+        </p:style>
+        <p:txBody>
+          <a:bodyPr rtlCol="0" anchor="ctr"/>
+          <a:lstStyle/>
+          <a:p>
+            <a:pPr marL="0" marR="0" lvl="0" indent="0" algn="ctr" defTabSz="914400" rtl="0" eaLnBrk="1" fontAlgn="auto" latinLnBrk="0" hangingPunct="1">
+              <a:lnSpc>
+                <a:spcPct val="100000"/>
+              </a:lnSpc>
+              <a:spcBef>
+                <a:spcPts val="0"/>
+              </a:spcBef>
+              <a:spcAft>
+                <a:spcPts val="0"/>
+              </a:spcAft>
+              <a:buClrTx/>
+              <a:buSzTx/>
+              <a:buFontTx/>
+              <a:buNone/>
+              <a:tabLst/>
+              <a:defRPr/>
+            </a:pPr>
+            <a:endParaRPr kumimoji="0" lang="en-US" sz="1800" b="0" i="0" u="none" strike="noStrike" kern="1200" cap="none" spc="0" normalizeH="0" baseline="0" noProof="0">
+              <a:ln>
+                <a:noFill/>
+              </a:ln>
+              <a:solidFill>
+                <a:srgbClr val="000000"/>
+              </a:solidFill>
+              <a:effectLst/>
+              <a:uLnTx/>
+              <a:uFillTx/>
+              <a:latin typeface="Calibri" panose="020F0502020204030204"/>
+              <a:ea typeface="+mn-ea"/>
+              <a:cs typeface="+mn-cs"/>
+            </a:endParaRPr>
+          </a:p>
+        </p:txBody>
+      </p:sp>
       <p:sp>
         <p:nvSpPr>
           <p:cNvPr id="2" name="Title 1">
@@ -13479,16 +14274,31 @@
             <p:ph type="title"/>
           </p:nvPr>
         </p:nvSpPr>
-        <p:spPr/>
+        <p:spPr>
+          <a:xfrm>
+            <a:off x="838200" y="643467"/>
+            <a:ext cx="2951205" cy="5571066"/>
+          </a:xfrm>
+        </p:spPr>
         <p:txBody>
-          <a:bodyPr/>
+          <a:bodyPr>
+            <a:normAutofit/>
+          </a:bodyPr>
           <a:lstStyle/>
           <a:p>
             <a:r>
-              <a:rPr lang="es-MX" dirty="0"/>
+              <a:rPr lang="es-MX">
+                <a:solidFill>
+                  <a:srgbClr val="FFFFFF"/>
+                </a:solidFill>
+              </a:rPr>
               <a:t>Tabla IPO</a:t>
             </a:r>
-            <a:endParaRPr lang="es-PE" dirty="0"/>
+            <a:endParaRPr lang="es-PE">
+              <a:solidFill>
+                <a:srgbClr val="FFFFFF"/>
+              </a:solidFill>
+            </a:endParaRPr>
           </a:p>
         </p:txBody>
       </p:sp>
@@ -13508,14 +14318,14 @@
             <p:ph idx="1"/>
             <p:extLst>
               <p:ext uri="{D42A27DB-BD31-4B8C-83A1-F6EECF244321}">
-                <p14:modId xmlns:p14="http://schemas.microsoft.com/office/powerpoint/2010/main" val="268983973"/>
+                <p14:modId xmlns:p14="http://schemas.microsoft.com/office/powerpoint/2010/main" val="625090214"/>
               </p:ext>
             </p:extLst>
           </p:nvPr>
         </p:nvGraphicFramePr>
         <p:xfrm>
-          <a:off x="838200" y="1825625"/>
-          <a:ext cx="10515597" cy="3296920"/>
+          <a:off x="5203897" y="462197"/>
+          <a:ext cx="6303730" cy="5593493"/>
         </p:xfrm>
         <a:graphic>
           <a:graphicData uri="http://schemas.openxmlformats.org/drawingml/2006/table">
@@ -13524,21 +14334,21 @@
                 <a:tableStyleId>{5C22544A-7EE6-4342-B048-85BDC9FD1C3A}</a:tableStyleId>
               </a:tblPr>
               <a:tblGrid>
-                <a:gridCol w="3505199">
+                <a:gridCol w="1988017">
                   <a:extLst>
                     <a:ext uri="{9D8B030D-6E8A-4147-A177-3AD203B41FA5}">
                       <a16:colId xmlns:a16="http://schemas.microsoft.com/office/drawing/2014/main" val="1072045244"/>
                     </a:ext>
                   </a:extLst>
                 </a:gridCol>
-                <a:gridCol w="3505199">
+                <a:gridCol w="1996956">
                   <a:extLst>
                     <a:ext uri="{9D8B030D-6E8A-4147-A177-3AD203B41FA5}">
                       <a16:colId xmlns:a16="http://schemas.microsoft.com/office/drawing/2014/main" val="805060047"/>
                     </a:ext>
                   </a:extLst>
                 </a:gridCol>
-                <a:gridCol w="3505199">
+                <a:gridCol w="2318757">
                   <a:extLst>
                     <a:ext uri="{9D8B030D-6E8A-4147-A177-3AD203B41FA5}">
                       <a16:colId xmlns:a16="http://schemas.microsoft.com/office/drawing/2014/main" val="2357150840"/>
@@ -13546,20 +14356,20 @@
                   </a:extLst>
                 </a:gridCol>
               </a:tblGrid>
-              <a:tr h="370840">
+              <a:tr h="377581">
                 <a:tc>
                   <a:txBody>
                     <a:bodyPr/>
                     <a:lstStyle/>
                     <a:p>
                       <a:r>
-                        <a:rPr lang="es-MX" dirty="0"/>
+                        <a:rPr lang="es-MX" sz="1700"/>
                         <a:t>Entrada</a:t>
                       </a:r>
-                      <a:endParaRPr lang="es-PE" dirty="0"/>
+                      <a:endParaRPr lang="es-PE" sz="1700"/>
                     </a:p>
                   </a:txBody>
-                  <a:tcPr/>
+                  <a:tcPr marL="85814" marR="85814" marT="42907" marB="42907"/>
                 </a:tc>
                 <a:tc>
                   <a:txBody>
@@ -13567,13 +14377,13 @@
                     <a:lstStyle/>
                     <a:p>
                       <a:r>
-                        <a:rPr lang="es-MX" dirty="0"/>
+                        <a:rPr lang="es-MX" sz="1700"/>
                         <a:t>Proceso</a:t>
                       </a:r>
-                      <a:endParaRPr lang="es-PE" dirty="0"/>
+                      <a:endParaRPr lang="es-PE" sz="1700"/>
                     </a:p>
                   </a:txBody>
-                  <a:tcPr/>
+                  <a:tcPr marL="85814" marR="85814" marT="42907" marB="42907"/>
                 </a:tc>
                 <a:tc>
                   <a:txBody>
@@ -13581,13 +14391,13 @@
                     <a:lstStyle/>
                     <a:p>
                       <a:r>
-                        <a:rPr lang="es-MX" dirty="0"/>
+                        <a:rPr lang="es-MX" sz="1700"/>
                         <a:t>Salida</a:t>
                       </a:r>
-                      <a:endParaRPr lang="es-PE" dirty="0"/>
+                      <a:endParaRPr lang="es-PE" sz="1700"/>
                     </a:p>
                   </a:txBody>
-                  <a:tcPr/>
+                  <a:tcPr marL="85814" marR="85814" marT="42907" marB="42907"/>
                 </a:tc>
                 <a:extLst>
                   <a:ext uri="{0D108BD9-81ED-4DB2-BD59-A6C34878D82A}">
@@ -13595,20 +14405,20 @@
                   </a:ext>
                 </a:extLst>
               </a:tr>
-              <a:tr h="370840">
+              <a:tr h="1493158">
                 <a:tc>
                   <a:txBody>
                     <a:bodyPr/>
                     <a:lstStyle/>
                     <a:p>
                       <a:r>
-                        <a:rPr lang="es-MX" dirty="0"/>
+                        <a:rPr lang="es-MX" sz="1100"/>
                         <a:t>Registros de usuario: nombres de los usuarios, roles, contraseñas.</a:t>
                       </a:r>
-                      <a:endParaRPr lang="es-PE" dirty="0"/>
+                      <a:endParaRPr lang="es-PE" sz="1100"/>
                     </a:p>
                   </a:txBody>
-                  <a:tcPr/>
+                  <a:tcPr marL="85814" marR="85814" marT="42907" marB="42907"/>
                 </a:tc>
                 <a:tc>
                   <a:txBody>
@@ -13616,13 +14426,13 @@
                     <a:lstStyle/>
                     <a:p>
                       <a:r>
-                        <a:rPr lang="es-MX" dirty="0"/>
+                        <a:rPr lang="es-MX" sz="1100"/>
                         <a:t>Registra el numero de los usuarios con sus respectivas propiedades y posteriormente las valida mediante un bucle</a:t>
                       </a:r>
-                      <a:endParaRPr lang="es-PE" dirty="0"/>
+                      <a:endParaRPr lang="es-PE" sz="1100"/>
                     </a:p>
                   </a:txBody>
-                  <a:tcPr/>
+                  <a:tcPr marL="85814" marR="85814" marT="42907" marB="42907"/>
                 </a:tc>
                 <a:tc>
                   <a:txBody>
@@ -13630,13 +14440,13 @@
                     <a:lstStyle/>
                     <a:p>
                       <a:r>
-                        <a:rPr lang="es-MX" dirty="0"/>
+                        <a:rPr lang="es-MX" sz="1100"/>
                         <a:t>Acceso permitido/denegado al sistema: Dependiendo de lo que ingrese el usuario, si las credenciales son correctas y dependiendo de su rol será derivado a las funciones con las cuales cuenta su rol dentro del sistema</a:t>
                       </a:r>
-                      <a:endParaRPr lang="es-PE" dirty="0"/>
+                      <a:endParaRPr lang="es-PE" sz="1100"/>
                     </a:p>
                   </a:txBody>
-                  <a:tcPr/>
+                  <a:tcPr marL="85814" marR="85814" marT="42907" marB="42907"/>
                 </a:tc>
                 <a:extLst>
                   <a:ext uri="{0D108BD9-81ED-4DB2-BD59-A6C34878D82A}">
@@ -13644,48 +14454,154 @@
                   </a:ext>
                 </a:extLst>
               </a:tr>
-              <a:tr h="370840">
+              <a:tr h="806649">
                 <a:tc>
                   <a:txBody>
                     <a:bodyPr/>
                     <a:lstStyle/>
                     <a:p>
                       <a:r>
-                        <a:rPr lang="es-MX" dirty="0"/>
-                        <a:t>Calculo de impuestos: </a:t>
+                        <a:rPr lang="es-MX" sz="1100"/>
+                        <a:t>Calculo de impuestos: ventas</a:t>
                       </a:r>
-                      <a:r>
-                        <a:rPr lang="es-MX" dirty="0" err="1"/>
-                        <a:t>ventasnetas</a:t>
-                      </a:r>
-                      <a:endParaRPr lang="es-PE" dirty="0"/>
+                      <a:endParaRPr lang="es-PE" sz="1100"/>
                     </a:p>
                   </a:txBody>
-                  <a:tcPr/>
+                  <a:tcPr marL="85814" marR="85814" marT="42907" marB="42907"/>
                 </a:tc>
                 <a:tc>
                   <a:txBody>
                     <a:bodyPr/>
                     <a:lstStyle/>
                     <a:p>
-                      <a:endParaRPr lang="es-PE" dirty="0"/>
+                      <a:r>
+                        <a:rPr lang="es-MX" sz="1100"/>
+                        <a:t>Estima mediante el total de ventas, el igv, los costes y el pago de alquiler las ganancias</a:t>
+                      </a:r>
+                      <a:endParaRPr lang="es-PE" sz="1100"/>
                     </a:p>
                   </a:txBody>
-                  <a:tcPr/>
+                  <a:tcPr marL="85814" marR="85814" marT="42907" marB="42907"/>
                 </a:tc>
                 <a:tc>
                   <a:txBody>
                     <a:bodyPr/>
                     <a:lstStyle/>
                     <a:p>
-                      <a:endParaRPr lang="es-PE" dirty="0"/>
+                      <a:r>
+                        <a:rPr lang="es-MX" sz="1100"/>
+                        <a:t>Ganancias netas del negocio</a:t>
+                      </a:r>
+                      <a:endParaRPr lang="es-PE" sz="1100"/>
                     </a:p>
                   </a:txBody>
-                  <a:tcPr/>
+                  <a:tcPr marL="85814" marR="85814" marT="42907" marB="42907"/>
                 </a:tc>
                 <a:extLst>
                   <a:ext uri="{0D108BD9-81ED-4DB2-BD59-A6C34878D82A}">
                     <a16:rowId xmlns:a16="http://schemas.microsoft.com/office/drawing/2014/main" val="5595043"/>
+                  </a:ext>
+                </a:extLst>
+              </a:tr>
+              <a:tr h="1321531">
+                <a:tc>
+                  <a:txBody>
+                    <a:bodyPr/>
+                    <a:lstStyle/>
+                    <a:p>
+                      <a:r>
+                        <a:rPr lang="es-MX" sz="1100" dirty="0"/>
+                        <a:t>Registro del almacén: productos, cantidad, precio</a:t>
+                      </a:r>
+                      <a:endParaRPr lang="es-PE" sz="1100" dirty="0"/>
+                    </a:p>
+                  </a:txBody>
+                  <a:tcPr marL="85814" marR="85814" marT="42907" marB="42907"/>
+                </a:tc>
+                <a:tc>
+                  <a:txBody>
+                    <a:bodyPr/>
+                    <a:lstStyle/>
+                    <a:p>
+                      <a:r>
+                        <a:rPr lang="es-MX" sz="1100"/>
+                        <a:t>Mediante una lista almacena no solo el producto, sino también su precio, su cantidad, y el precio de obtención, cosa lo cual se almacenara y se dispondrá a los empleados</a:t>
+                      </a:r>
+                      <a:endParaRPr lang="es-PE" sz="1100"/>
+                    </a:p>
+                  </a:txBody>
+                  <a:tcPr marL="85814" marR="85814" marT="42907" marB="42907"/>
+                </a:tc>
+                <a:tc>
+                  <a:txBody>
+                    <a:bodyPr/>
+                    <a:lstStyle/>
+                    <a:p>
+                      <a:r>
+                        <a:rPr lang="es-MX" sz="1100" dirty="0"/>
+                        <a:t>Registro de productos en un documento </a:t>
+                      </a:r>
+                      <a:r>
+                        <a:rPr lang="es-MX" sz="1100" dirty="0" err="1"/>
+                        <a:t>txt</a:t>
+                      </a:r>
+                      <a:endParaRPr lang="es-PE" sz="1100" dirty="0"/>
+                    </a:p>
+                  </a:txBody>
+                  <a:tcPr marL="85814" marR="85814" marT="42907" marB="42907"/>
+                </a:tc>
+                <a:extLst>
+                  <a:ext uri="{0D108BD9-81ED-4DB2-BD59-A6C34878D82A}">
+                    <a16:rowId xmlns:a16="http://schemas.microsoft.com/office/drawing/2014/main" val="224708554"/>
+                  </a:ext>
+                </a:extLst>
+              </a:tr>
+              <a:tr h="1321531">
+                <a:tc>
+                  <a:txBody>
+                    <a:bodyPr/>
+                    <a:lstStyle/>
+                    <a:p>
+                      <a:r>
+                        <a:rPr lang="es-MX" sz="1100" dirty="0"/>
+                        <a:t>Registro de ventas: ventas mensuales</a:t>
+                      </a:r>
+                      <a:endParaRPr lang="es-PE" sz="1100" dirty="0"/>
+                    </a:p>
+                  </a:txBody>
+                  <a:tcPr marL="85814" marR="85814" marT="42907" marB="42907"/>
+                </a:tc>
+                <a:tc>
+                  <a:txBody>
+                    <a:bodyPr/>
+                    <a:lstStyle/>
+                    <a:p>
+                      <a:r>
+                        <a:rPr lang="es-MX" sz="1100" dirty="0"/>
+                        <a:t>Un sistema de bucle simple se encargara de almacenar en un array las ventas en total realizadas a lo largo del mes, y, evaluando la cantidad de productos iniciales entre la cantidad de productos finales, podrá verificar si las ventas son correctas o no</a:t>
+                      </a:r>
+                      <a:endParaRPr lang="es-PE" sz="1100" dirty="0"/>
+                    </a:p>
+                  </a:txBody>
+                  <a:tcPr marL="85814" marR="85814" marT="42907" marB="42907"/>
+                </a:tc>
+                <a:tc>
+                  <a:txBody>
+                    <a:bodyPr/>
+                    <a:lstStyle/>
+                    <a:p>
+                      <a:r>
+                        <a:rPr lang="es-MX" sz="1100" dirty="0"/>
+                        <a:t>Ventas precisas y detección de fallos en el registro de ventas</a:t>
+                      </a:r>
+                      <a:endParaRPr lang="es-PE" sz="1100" dirty="0"/>
+                    </a:p>
+                  </a:txBody>
+                  <a:tcPr marL="85814" marR="85814" marT="42907" marB="42907"/>
+                </a:tc>
+                <a:extLst>
+                  <a:ext uri="{0D108BD9-81ED-4DB2-BD59-A6C34878D82A}">
+                    <a16:rowId xmlns:a16="http://schemas.microsoft.com/office/drawing/2014/main" val="2316536458"/>
                   </a:ext>
                 </a:extLst>
               </a:tr>
@@ -15240,6 +16156,14 @@
 <file path=ppt/slides/slide8.xml><?xml version="1.0" encoding="utf-8"?>
 <p:sld xmlns:a="http://schemas.openxmlformats.org/drawingml/2006/main" xmlns:r="http://schemas.openxmlformats.org/officeDocument/2006/relationships" xmlns:p="http://schemas.openxmlformats.org/presentationml/2006/main">
   <p:cSld>
+    <p:bg>
+      <p:bgPr>
+        <a:solidFill>
+          <a:schemeClr val="bg1"/>
+        </a:solidFill>
+        <a:effectLst/>
+      </p:bgPr>
+    </p:bg>
     <p:spTree>
       <p:nvGrpSpPr>
         <p:cNvPr id="1" name="">
@@ -15260,185 +16184,12 @@
           <a:chExt cx="0" cy="0"/>
         </a:xfrm>
       </p:grpSpPr>
-      <p:sp>
+      <p:sp useBgFill="1">
         <p:nvSpPr>
-          <p:cNvPr id="2" name="Title 1">
+          <p:cNvPr id="12" name="Rectangle 11">
             <a:extLst>
               <a:ext uri="{FF2B5EF4-FFF2-40B4-BE49-F238E27FC236}">
-                <a16:creationId xmlns:a16="http://schemas.microsoft.com/office/drawing/2014/main" id="{9C693067-8440-E4B0-09BE-DF5368B856CF}"/>
-              </a:ext>
-            </a:extLst>
-          </p:cNvPr>
-          <p:cNvSpPr>
-            <a:spLocks noGrp="1"/>
-          </p:cNvSpPr>
-          <p:nvPr>
-            <p:ph type="title"/>
-          </p:nvPr>
-        </p:nvSpPr>
-        <p:spPr/>
-        <p:txBody>
-          <a:bodyPr/>
-          <a:lstStyle/>
-          <a:p>
-            <a:r>
-              <a:rPr lang="es-MX" dirty="0"/>
-              <a:t>Diseño de la solución:</a:t>
-            </a:r>
-            <a:endParaRPr lang="es-PE" dirty="0"/>
-          </a:p>
-        </p:txBody>
-      </p:sp>
-      <p:pic>
-        <p:nvPicPr>
-          <p:cNvPr id="6" name="Content Placeholder 5">
-            <a:extLst>
-              <a:ext uri="{FF2B5EF4-FFF2-40B4-BE49-F238E27FC236}">
-                <a16:creationId xmlns:a16="http://schemas.microsoft.com/office/drawing/2014/main" id="{0BA14AB9-EF21-708A-3EE0-9EAF0F2A0D54}"/>
-              </a:ext>
-            </a:extLst>
-          </p:cNvPr>
-          <p:cNvPicPr>
-            <a:picLocks noGrp="1" noChangeAspect="1"/>
-          </p:cNvPicPr>
-          <p:nvPr>
-            <p:ph sz="half" idx="1"/>
-          </p:nvPr>
-        </p:nvPicPr>
-        <p:blipFill>
-          <a:blip r:embed="rId2"/>
-          <a:stretch>
-            <a:fillRect/>
-          </a:stretch>
-        </p:blipFill>
-        <p:spPr>
-          <a:xfrm>
-            <a:off x="838200" y="1470767"/>
-            <a:ext cx="3388285" cy="5199576"/>
-          </a:xfrm>
-          <a:prstGeom prst="rect">
-            <a:avLst/>
-          </a:prstGeom>
-        </p:spPr>
-      </p:pic>
-      <p:sp>
-        <p:nvSpPr>
-          <p:cNvPr id="4" name="Content Placeholder 3">
-            <a:extLst>
-              <a:ext uri="{FF2B5EF4-FFF2-40B4-BE49-F238E27FC236}">
-                <a16:creationId xmlns:a16="http://schemas.microsoft.com/office/drawing/2014/main" id="{A0E6990F-2716-87AF-359E-7B63284B35D6}"/>
-              </a:ext>
-            </a:extLst>
-          </p:cNvPr>
-          <p:cNvSpPr>
-            <a:spLocks noGrp="1"/>
-          </p:cNvSpPr>
-          <p:nvPr>
-            <p:ph sz="half" idx="2"/>
-          </p:nvPr>
-        </p:nvSpPr>
-        <p:spPr>
-          <a:xfrm>
-            <a:off x="8199620" y="1825625"/>
-            <a:ext cx="3154179" cy="4125470"/>
-          </a:xfrm>
-        </p:spPr>
-        <p:txBody>
-          <a:bodyPr/>
-          <a:lstStyle/>
-          <a:p>
-            <a:endParaRPr lang="es-PE" dirty="0"/>
-          </a:p>
-        </p:txBody>
-      </p:sp>
-      <p:sp>
-        <p:nvSpPr>
-          <p:cNvPr id="7" name="TextBox 6">
-            <a:extLst>
-              <a:ext uri="{FF2B5EF4-FFF2-40B4-BE49-F238E27FC236}">
-                <a16:creationId xmlns:a16="http://schemas.microsoft.com/office/drawing/2014/main" id="{F0A8FA37-883E-8798-B6BA-5FFC62319DC7}"/>
-              </a:ext>
-            </a:extLst>
-          </p:cNvPr>
-          <p:cNvSpPr txBox="1"/>
-          <p:nvPr/>
-        </p:nvSpPr>
-        <p:spPr>
-          <a:xfrm>
-            <a:off x="4226485" y="1690688"/>
-            <a:ext cx="3583390" cy="2031325"/>
-          </a:xfrm>
-          <a:prstGeom prst="rect">
-            <a:avLst/>
-          </a:prstGeom>
-          <a:noFill/>
-        </p:spPr>
-        <p:txBody>
-          <a:bodyPr wrap="square" rtlCol="0">
-            <a:spAutoFit/>
-          </a:bodyPr>
-          <a:lstStyle/>
-          <a:p>
-            <a:r>
-              <a:rPr lang="es-MX" dirty="0"/>
-              <a:t>Pasamos de seudocódigo a un diagrama de flujo, como lo dice su nombre, esto nos servirá para poder comprender el recorrido de nuestro </a:t>
-            </a:r>
-            <a:r>
-              <a:rPr lang="es-MX" dirty="0" err="1"/>
-              <a:t>codigo</a:t>
-            </a:r>
-            <a:r>
-              <a:rPr lang="es-MX" dirty="0"/>
-              <a:t>, cuales serán las rutas a las cuales el usuario será dirigido en base a lo que ingrese</a:t>
-            </a:r>
-            <a:endParaRPr lang="es-PE" dirty="0"/>
-          </a:p>
-        </p:txBody>
-      </p:sp>
-    </p:spTree>
-    <p:extLst>
-      <p:ext uri="{BB962C8B-B14F-4D97-AF65-F5344CB8AC3E}">
-        <p14:creationId xmlns:p14="http://schemas.microsoft.com/office/powerpoint/2010/main" val="3539393903"/>
-      </p:ext>
-    </p:extLst>
-  </p:cSld>
-  <p:clrMapOvr>
-    <a:masterClrMapping/>
-  </p:clrMapOvr>
-</p:sld>
-</file>
-
-<file path=ppt/slides/slide9.xml><?xml version="1.0" encoding="utf-8"?>
-<p:sld xmlns:a="http://schemas.openxmlformats.org/drawingml/2006/main" xmlns:r="http://schemas.openxmlformats.org/officeDocument/2006/relationships" xmlns:p="http://schemas.openxmlformats.org/presentationml/2006/main">
-  <p:cSld>
-    <p:bg>
-      <p:bgPr>
-        <a:solidFill>
-          <a:schemeClr val="bg1"/>
-        </a:solidFill>
-        <a:effectLst/>
-      </p:bgPr>
-    </p:bg>
-    <p:spTree>
-      <p:nvGrpSpPr>
-        <p:cNvPr id="1" name=""/>
-        <p:cNvGrpSpPr/>
-        <p:nvPr/>
-      </p:nvGrpSpPr>
-      <p:grpSpPr>
-        <a:xfrm>
-          <a:off x="0" y="0"/>
-          <a:ext cx="0" cy="0"/>
-          <a:chOff x="0" y="0"/>
-          <a:chExt cx="0" cy="0"/>
-        </a:xfrm>
-      </p:grpSpPr>
-      <p:sp useBgFill="1">
-        <p:nvSpPr>
-          <p:cNvPr id="11" name="Rectangle 10">
-            <a:extLst>
-              <a:ext uri="{FF2B5EF4-FFF2-40B4-BE49-F238E27FC236}">
-                <a16:creationId xmlns:a16="http://schemas.microsoft.com/office/drawing/2014/main" id="{201CC55D-ED54-4C5C-95E6-10947BD1103B}"/>
+                <a16:creationId xmlns:a16="http://schemas.microsoft.com/office/drawing/2014/main" id="{DBC6133C-0615-4CE4-9132-37E609A9BDFA}"/>
               </a:ext>
               <a:ext uri="{C183D7F6-B498-43B3-948B-1728B52AA6E4}">
                 <adec:decorative xmlns:adec="http://schemas.microsoft.com/office/drawing/2017/decorative" val="1"/>
@@ -15498,7 +16249,7 @@
           <p:cNvPr id="2" name="Title 1">
             <a:extLst>
               <a:ext uri="{FF2B5EF4-FFF2-40B4-BE49-F238E27FC236}">
-                <a16:creationId xmlns:a16="http://schemas.microsoft.com/office/drawing/2014/main" id="{FCCBE8FF-4575-2176-FADE-0E77419583AA}"/>
+                <a16:creationId xmlns:a16="http://schemas.microsoft.com/office/drawing/2014/main" id="{9C693067-8440-E4B0-09BE-DF5368B856CF}"/>
               </a:ext>
             </a:extLst>
           </p:cNvPr>
@@ -15511,183 +16262,36 @@
         </p:nvSpPr>
         <p:spPr>
           <a:xfrm>
-            <a:off x="589560" y="856180"/>
-            <a:ext cx="4560584" cy="1128068"/>
+            <a:off x="645064" y="525982"/>
+            <a:ext cx="4282983" cy="1200361"/>
           </a:xfrm>
         </p:spPr>
         <p:txBody>
-          <a:bodyPr vert="horz" lIns="91440" tIns="45720" rIns="91440" bIns="45720" rtlCol="0" anchor="ctr">
+          <a:bodyPr vert="horz" lIns="91440" tIns="45720" rIns="91440" bIns="45720" rtlCol="0" anchor="b">
             <a:normAutofit/>
           </a:bodyPr>
           <a:lstStyle/>
           <a:p>
             <a:r>
-              <a:rPr lang="en-US" sz="4000"/>
-              <a:t>Código en C#</a:t>
+              <a:rPr lang="en-US" sz="3600" kern="1200">
+                <a:solidFill>
+                  <a:schemeClr val="tx1"/>
+                </a:solidFill>
+                <a:latin typeface="+mj-lt"/>
+                <a:ea typeface="+mj-ea"/>
+                <a:cs typeface="+mj-cs"/>
+              </a:rPr>
+              <a:t>Diseño de la solución:</a:t>
             </a:r>
           </a:p>
         </p:txBody>
       </p:sp>
-      <p:grpSp>
-        <p:nvGrpSpPr>
-          <p:cNvPr id="13" name="Group 12">
+      <p:sp>
+        <p:nvSpPr>
+          <p:cNvPr id="14" name="Rectangle 13">
             <a:extLst>
               <a:ext uri="{FF2B5EF4-FFF2-40B4-BE49-F238E27FC236}">
-                <a16:creationId xmlns:a16="http://schemas.microsoft.com/office/drawing/2014/main" id="{1DE889C7-FAD6-4397-98E2-05D503484459}"/>
-              </a:ext>
-              <a:ext uri="{C183D7F6-B498-43B3-948B-1728B52AA6E4}">
-                <adec:decorative xmlns:adec="http://schemas.microsoft.com/office/drawing/2017/decorative" val="1"/>
-              </a:ext>
-            </a:extLst>
-          </p:cNvPr>
-          <p:cNvGrpSpPr>
-            <a:grpSpLocks noGrp="1" noUngrp="1" noRot="1" noChangeAspect="1" noMove="1" noResize="1"/>
-          </p:cNvGrpSpPr>
-          <p:nvPr>
-            <p:extLst>
-              <p:ext uri="{386F3935-93C4-4BCD-93E2-E3B085C9AB24}">
-                <p16:designElem xmlns:p16="http://schemas.microsoft.com/office/powerpoint/2015/main" val="1"/>
-              </p:ext>
-            </p:extLst>
-          </p:nvPr>
-        </p:nvGrpSpPr>
-        <p:grpSpPr>
-          <a:xfrm>
-            <a:off x="0" y="1083484"/>
-            <a:ext cx="355196" cy="673460"/>
-            <a:chOff x="0" y="823811"/>
-            <a:chExt cx="355196" cy="673460"/>
-          </a:xfrm>
-        </p:grpSpPr>
-        <p:sp>
-          <p:nvSpPr>
-            <p:cNvPr id="14" name="Rectangle 13">
-              <a:extLst>
-                <a:ext uri="{FF2B5EF4-FFF2-40B4-BE49-F238E27FC236}">
-                  <a16:creationId xmlns:a16="http://schemas.microsoft.com/office/drawing/2014/main" id="{F399A70F-F8CD-4992-9EF5-6CF15472E73F}"/>
-                </a:ext>
-                <a:ext uri="{C183D7F6-B498-43B3-948B-1728B52AA6E4}">
-                  <adec:decorative xmlns:adec="http://schemas.microsoft.com/office/drawing/2017/decorative" val="1"/>
-                </a:ext>
-              </a:extLst>
-            </p:cNvPr>
-            <p:cNvSpPr/>
-            <p:nvPr>
-              <p:extLst>
-                <p:ext uri="{386F3935-93C4-4BCD-93E2-E3B085C9AB24}">
-                  <p16:designElem xmlns:p16="http://schemas.microsoft.com/office/powerpoint/2015/main" val="1"/>
-                </p:ext>
-              </p:extLst>
-            </p:nvPr>
-          </p:nvSpPr>
-          <p:spPr>
-            <a:xfrm>
-              <a:off x="0" y="823811"/>
-              <a:ext cx="87363" cy="673460"/>
-            </a:xfrm>
-            <a:prstGeom prst="rect">
-              <a:avLst/>
-            </a:prstGeom>
-            <a:solidFill>
-              <a:schemeClr val="accent4"/>
-            </a:solidFill>
-            <a:ln>
-              <a:noFill/>
-            </a:ln>
-          </p:spPr>
-          <p:style>
-            <a:lnRef idx="2">
-              <a:schemeClr val="accent1">
-                <a:shade val="50000"/>
-              </a:schemeClr>
-            </a:lnRef>
-            <a:fillRef idx="1">
-              <a:schemeClr val="accent1"/>
-            </a:fillRef>
-            <a:effectRef idx="0">
-              <a:schemeClr val="accent1"/>
-            </a:effectRef>
-            <a:fontRef idx="minor">
-              <a:schemeClr val="lt1"/>
-            </a:fontRef>
-          </p:style>
-          <p:txBody>
-            <a:bodyPr rtlCol="0" anchor="ctr"/>
-            <a:lstStyle/>
-            <a:p>
-              <a:pPr algn="ctr"/>
-              <a:endParaRPr lang="en-US"/>
-            </a:p>
-          </p:txBody>
-        </p:sp>
-        <p:sp>
-          <p:nvSpPr>
-            <p:cNvPr id="15" name="Rectangle 14">
-              <a:extLst>
-                <a:ext uri="{FF2B5EF4-FFF2-40B4-BE49-F238E27FC236}">
-                  <a16:creationId xmlns:a16="http://schemas.microsoft.com/office/drawing/2014/main" id="{48F4FEDC-6D80-458C-A665-075D9B9500FD}"/>
-                </a:ext>
-                <a:ext uri="{C183D7F6-B498-43B3-948B-1728B52AA6E4}">
-                  <adec:decorative xmlns:adec="http://schemas.microsoft.com/office/drawing/2017/decorative" val="1"/>
-                </a:ext>
-              </a:extLst>
-            </p:cNvPr>
-            <p:cNvSpPr/>
-            <p:nvPr>
-              <p:extLst>
-                <p:ext uri="{386F3935-93C4-4BCD-93E2-E3B085C9AB24}">
-                  <p16:designElem xmlns:p16="http://schemas.microsoft.com/office/powerpoint/2015/main" val="1"/>
-                </p:ext>
-              </p:extLst>
-            </p:nvPr>
-          </p:nvSpPr>
-          <p:spPr>
-            <a:xfrm>
-              <a:off x="159341" y="823811"/>
-              <a:ext cx="195855" cy="673460"/>
-            </a:xfrm>
-            <a:prstGeom prst="rect">
-              <a:avLst/>
-            </a:prstGeom>
-            <a:solidFill>
-              <a:schemeClr val="accent4"/>
-            </a:solidFill>
-            <a:ln>
-              <a:noFill/>
-            </a:ln>
-          </p:spPr>
-          <p:style>
-            <a:lnRef idx="2">
-              <a:schemeClr val="accent1">
-                <a:shade val="50000"/>
-              </a:schemeClr>
-            </a:lnRef>
-            <a:fillRef idx="1">
-              <a:schemeClr val="accent1"/>
-            </a:fillRef>
-            <a:effectRef idx="0">
-              <a:schemeClr val="accent1"/>
-            </a:effectRef>
-            <a:fontRef idx="minor">
-              <a:schemeClr val="lt1"/>
-            </a:fontRef>
-          </p:style>
-          <p:txBody>
-            <a:bodyPr rtlCol="0" anchor="ctr"/>
-            <a:lstStyle/>
-            <a:p>
-              <a:pPr algn="ctr"/>
-              <a:endParaRPr lang="en-US"/>
-            </a:p>
-          </p:txBody>
-        </p:sp>
-      </p:grpSp>
-      <p:sp>
-        <p:nvSpPr>
-          <p:cNvPr id="17" name="Rectangle 16">
-            <a:extLst>
-              <a:ext uri="{FF2B5EF4-FFF2-40B4-BE49-F238E27FC236}">
-                <a16:creationId xmlns:a16="http://schemas.microsoft.com/office/drawing/2014/main" id="{3873B707-463F-40B0-8227-E8CC6C67EB25}"/>
+                <a16:creationId xmlns:a16="http://schemas.microsoft.com/office/drawing/2014/main" id="{169CC832-2974-4E8D-90ED-3E2941BA7336}"/>
               </a:ext>
               <a:ext uri="{C183D7F6-B498-43B3-948B-1728B52AA6E4}">
                 <adec:decorative xmlns:adec="http://schemas.microsoft.com/office/drawing/2017/decorative" val="1"/>
@@ -15707,8 +16311,8 @@
         </p:nvSpPr>
         <p:spPr>
           <a:xfrm flipH="1">
-            <a:off x="665085" y="2090569"/>
-            <a:ext cx="4297680" cy="27432"/>
+            <a:off x="616533" y="1944913"/>
+            <a:ext cx="4023360" cy="27432"/>
           </a:xfrm>
           <a:prstGeom prst="rect">
             <a:avLst/>
@@ -15747,24 +16351,20 @@
       </p:sp>
       <p:sp>
         <p:nvSpPr>
-          <p:cNvPr id="5" name="Text Placeholder 4">
+          <p:cNvPr id="7" name="TextBox 6">
             <a:extLst>
               <a:ext uri="{FF2B5EF4-FFF2-40B4-BE49-F238E27FC236}">
-                <a16:creationId xmlns:a16="http://schemas.microsoft.com/office/drawing/2014/main" id="{13C1F0A0-2ABF-2C09-A4F4-A88606981888}"/>
+                <a16:creationId xmlns:a16="http://schemas.microsoft.com/office/drawing/2014/main" id="{F0A8FA37-883E-8798-B6BA-5FFC62319DC7}"/>
               </a:ext>
             </a:extLst>
           </p:cNvPr>
-          <p:cNvSpPr txBox="1">
-            <a:spLocks noGrp="1"/>
-          </p:cNvSpPr>
-          <p:nvPr>
-            <p:ph type="body" sz="half" idx="2"/>
-          </p:nvPr>
+          <p:cNvSpPr txBox="1"/>
+          <p:nvPr/>
         </p:nvSpPr>
         <p:spPr>
           <a:xfrm>
-            <a:off x="590719" y="2330505"/>
-            <a:ext cx="4559425" cy="3979585"/>
+            <a:off x="645066" y="2031101"/>
+            <a:ext cx="4282984" cy="3511943"/>
           </a:xfrm>
           <a:prstGeom prst="rect">
             <a:avLst/>
@@ -15777,22 +16377,28 @@
           <a:lstStyle/>
           <a:p>
             <a:pPr indent="-228600">
+              <a:lnSpc>
+                <a:spcPct val="90000"/>
+              </a:lnSpc>
+              <a:spcAft>
+                <a:spcPts val="600"/>
+              </a:spcAft>
               <a:buFont typeface="Arial" panose="020B0604020202020204" pitchFamily="34" charset="0"/>
               <a:buChar char="•"/>
             </a:pPr>
             <a:r>
-              <a:rPr lang="en-US" sz="2000"/>
-              <a:t>Esta es una de las primeras cosas que ve el administrador de la empresa, el login, su función no es solo detener el paso de los usuarios que no cumplen con las credenciales necesarias para acceder a las diversas funciones, sino también, e inicialmente, almacenar la lista de trabajadores, sus roles, y sus contraseñas</a:t>
+              <a:rPr lang="en-US"/>
+              <a:t>Pasamos de seudocódigo a un diagrama de flujo, como lo dice su nombre, esto nos servirá para poder comprender el recorrido de nuestro codigo, cuales serán las rutas a las cuales el usuario será dirigido en base a lo que ingrese</a:t>
             </a:r>
           </a:p>
         </p:txBody>
       </p:sp>
       <p:sp>
         <p:nvSpPr>
-          <p:cNvPr id="19" name="Rectangle 18">
+          <p:cNvPr id="16" name="Rectangle 15">
             <a:extLst>
               <a:ext uri="{FF2B5EF4-FFF2-40B4-BE49-F238E27FC236}">
-                <a16:creationId xmlns:a16="http://schemas.microsoft.com/office/drawing/2014/main" id="{C13237C8-E62C-4F0D-A318-BD6FB6C2D138}"/>
+                <a16:creationId xmlns:a16="http://schemas.microsoft.com/office/drawing/2014/main" id="{55222F96-971A-4F90-B841-6BAB416C7AC1}"/>
               </a:ext>
               <a:ext uri="{C183D7F6-B498-43B3-948B-1728B52AA6E4}">
                 <adec:decorative xmlns:adec="http://schemas.microsoft.com/office/drawing/2017/decorative" val="1"/>
@@ -15811,9 +16417,9 @@
           </p:nvPr>
         </p:nvSpPr>
         <p:spPr>
-          <a:xfrm flipH="1">
-            <a:off x="10697670" y="0"/>
-            <a:ext cx="1494330" cy="6858000"/>
+          <a:xfrm rot="5400000">
+            <a:off x="-225843" y="6053360"/>
+            <a:ext cx="740664" cy="154124"/>
           </a:xfrm>
           <a:prstGeom prst="rect">
             <a:avLst/>
@@ -15852,10 +16458,73 @@
       </p:sp>
       <p:sp>
         <p:nvSpPr>
-          <p:cNvPr id="21" name="Rectangle 20">
+          <p:cNvPr id="18" name="Rectangle 17">
             <a:extLst>
               <a:ext uri="{FF2B5EF4-FFF2-40B4-BE49-F238E27FC236}">
-                <a16:creationId xmlns:a16="http://schemas.microsoft.com/office/drawing/2014/main" id="{19C9EAEA-39D0-4B0E-A0EB-51E7B26740B1}"/>
+                <a16:creationId xmlns:a16="http://schemas.microsoft.com/office/drawing/2014/main" id="{08980754-6F4B-43C9-B9BE-127B6BED6586}"/>
+              </a:ext>
+              <a:ext uri="{C183D7F6-B498-43B3-948B-1728B52AA6E4}">
+                <adec:decorative xmlns:adec="http://schemas.microsoft.com/office/drawing/2017/decorative" val="1"/>
+              </a:ext>
+            </a:extLst>
+          </p:cNvPr>
+          <p:cNvSpPr>
+            <a:spLocks noGrp="1" noRot="1" noChangeAspect="1" noMove="1" noResize="1" noEditPoints="1" noAdjustHandles="1" noChangeArrowheads="1" noChangeShapeType="1" noTextEdit="1"/>
+          </p:cNvSpPr>
+          <p:nvPr>
+            <p:extLst>
+              <p:ext uri="{386F3935-93C4-4BCD-93E2-E3B085C9AB24}">
+                <p16:designElem xmlns:p16="http://schemas.microsoft.com/office/powerpoint/2015/main" val="1"/>
+              </p:ext>
+            </p:extLst>
+          </p:nvPr>
+        </p:nvSpPr>
+        <p:spPr>
+          <a:xfrm rot="5400000">
+            <a:off x="5904923" y="215201"/>
+            <a:ext cx="740664" cy="11833491"/>
+          </a:xfrm>
+          <a:prstGeom prst="rect">
+            <a:avLst/>
+          </a:prstGeom>
+          <a:solidFill>
+            <a:schemeClr val="accent4"/>
+          </a:solidFill>
+          <a:ln>
+            <a:noFill/>
+          </a:ln>
+        </p:spPr>
+        <p:style>
+          <a:lnRef idx="2">
+            <a:schemeClr val="accent1">
+              <a:shade val="50000"/>
+            </a:schemeClr>
+          </a:lnRef>
+          <a:fillRef idx="1">
+            <a:schemeClr val="accent1"/>
+          </a:fillRef>
+          <a:effectRef idx="0">
+            <a:schemeClr val="accent1"/>
+          </a:effectRef>
+          <a:fontRef idx="minor">
+            <a:schemeClr val="lt1"/>
+          </a:fontRef>
+        </p:style>
+        <p:txBody>
+          <a:bodyPr rtlCol="0" anchor="ctr"/>
+          <a:lstStyle/>
+          <a:p>
+            <a:pPr algn="ctr"/>
+            <a:endParaRPr lang="en-US"/>
+          </a:p>
+        </p:txBody>
+      </p:sp>
+      <p:sp>
+        <p:nvSpPr>
+          <p:cNvPr id="20" name="Rectangle 19">
+            <a:extLst>
+              <a:ext uri="{FF2B5EF4-FFF2-40B4-BE49-F238E27FC236}">
+                <a16:creationId xmlns:a16="http://schemas.microsoft.com/office/drawing/2014/main" id="{2C1BBA94-3F40-40AA-8BB9-E69E25E537C1}"/>
               </a:ext>
               <a:ext uri="{C183D7F6-B498-43B3-948B-1728B52AA6E4}">
                 <adec:decorative xmlns:adec="http://schemas.microsoft.com/office/drawing/2017/decorative" val="1"/>
@@ -15875,8 +16544,8 @@
         </p:nvSpPr>
         <p:spPr>
           <a:xfrm>
-            <a:off x="5685810" y="513853"/>
-            <a:ext cx="6009366" cy="5834577"/>
+            <a:off x="5696793" y="354959"/>
+            <a:ext cx="6184973" cy="5915212"/>
           </a:xfrm>
           <a:prstGeom prst="rect">
             <a:avLst/>
@@ -15925,7 +16594,7 @@
           <p:cNvPr id="6" name="Content Placeholder 5">
             <a:extLst>
               <a:ext uri="{FF2B5EF4-FFF2-40B4-BE49-F238E27FC236}">
-                <a16:creationId xmlns:a16="http://schemas.microsoft.com/office/drawing/2014/main" id="{A47BB163-5548-0904-B14E-1AF85240280C}"/>
+                <a16:creationId xmlns:a16="http://schemas.microsoft.com/office/drawing/2014/main" id="{0BA14AB9-EF21-708A-3EE0-9EAF0F2A0D54}"/>
               </a:ext>
             </a:extLst>
           </p:cNvPr>
@@ -15933,20 +16602,19 @@
             <a:picLocks noGrp="1" noChangeAspect="1"/>
           </p:cNvPicPr>
           <p:nvPr>
-            <p:ph idx="1"/>
+            <p:ph sz="half" idx="1"/>
           </p:nvPr>
         </p:nvPicPr>
         <p:blipFill>
           <a:blip r:embed="rId2"/>
-          <a:srcRect r="1742" b="1"/>
           <a:stretch>
             <a:fillRect/>
           </a:stretch>
         </p:blipFill>
         <p:spPr>
           <a:xfrm>
-            <a:off x="5977788" y="799352"/>
-            <a:ext cx="5425410" cy="5259296"/>
+            <a:off x="7067018" y="650494"/>
+            <a:ext cx="3469458" cy="5324142"/>
           </a:xfrm>
           <a:prstGeom prst="rect">
             <a:avLst/>
@@ -15956,7 +16624,167 @@
     </p:spTree>
     <p:extLst>
       <p:ext uri="{BB962C8B-B14F-4D97-AF65-F5344CB8AC3E}">
-        <p14:creationId xmlns:p14="http://schemas.microsoft.com/office/powerpoint/2010/main" val="1219177288"/>
+        <p14:creationId xmlns:p14="http://schemas.microsoft.com/office/powerpoint/2010/main" val="3539393903"/>
+      </p:ext>
+    </p:extLst>
+  </p:cSld>
+  <p:clrMapOvr>
+    <a:masterClrMapping/>
+  </p:clrMapOvr>
+</p:sld>
+</file>
+
+<file path=ppt/slides/slide9.xml><?xml version="1.0" encoding="utf-8"?>
+<p:sld xmlns:a="http://schemas.openxmlformats.org/drawingml/2006/main" xmlns:r="http://schemas.openxmlformats.org/officeDocument/2006/relationships" xmlns:p="http://schemas.openxmlformats.org/presentationml/2006/main">
+  <p:cSld>
+    <p:spTree>
+      <p:nvGrpSpPr>
+        <p:cNvPr id="1" name=""/>
+        <p:cNvGrpSpPr/>
+        <p:nvPr/>
+      </p:nvGrpSpPr>
+      <p:grpSpPr>
+        <a:xfrm>
+          <a:off x="0" y="0"/>
+          <a:ext cx="0" cy="0"/>
+          <a:chOff x="0" y="0"/>
+          <a:chExt cx="0" cy="0"/>
+        </a:xfrm>
+      </p:grpSpPr>
+      <p:pic>
+        <p:nvPicPr>
+          <p:cNvPr id="5" name="Content Placeholder 4">
+            <a:extLst>
+              <a:ext uri="{FF2B5EF4-FFF2-40B4-BE49-F238E27FC236}">
+                <a16:creationId xmlns:a16="http://schemas.microsoft.com/office/drawing/2014/main" id="{276E04CE-DA0B-3B57-3DC0-84162BB8FFB2}"/>
+              </a:ext>
+            </a:extLst>
+          </p:cNvPr>
+          <p:cNvPicPr>
+            <a:picLocks noChangeAspect="1"/>
+          </p:cNvPicPr>
+          <p:nvPr/>
+        </p:nvPicPr>
+        <p:blipFill>
+          <a:blip r:embed="rId2"/>
+          <a:stretch>
+            <a:fillRect/>
+          </a:stretch>
+        </p:blipFill>
+        <p:spPr>
+          <a:xfrm>
+            <a:off x="383458" y="1096837"/>
+            <a:ext cx="3154362" cy="3354638"/>
+          </a:xfrm>
+          <a:prstGeom prst="rect">
+            <a:avLst/>
+          </a:prstGeom>
+        </p:spPr>
+      </p:pic>
+      <p:pic>
+        <p:nvPicPr>
+          <p:cNvPr id="3" name="Picture 2">
+            <a:extLst>
+              <a:ext uri="{FF2B5EF4-FFF2-40B4-BE49-F238E27FC236}">
+                <a16:creationId xmlns:a16="http://schemas.microsoft.com/office/drawing/2014/main" id="{E44BE069-0E21-71C4-E05E-1A3652D787EE}"/>
+              </a:ext>
+            </a:extLst>
+          </p:cNvPr>
+          <p:cNvPicPr>
+            <a:picLocks noChangeAspect="1"/>
+          </p:cNvPicPr>
+          <p:nvPr/>
+        </p:nvPicPr>
+        <p:blipFill>
+          <a:blip r:embed="rId3"/>
+          <a:stretch>
+            <a:fillRect/>
+          </a:stretch>
+        </p:blipFill>
+        <p:spPr>
+          <a:xfrm>
+            <a:off x="3992563" y="1096837"/>
+            <a:ext cx="3753374" cy="4172532"/>
+          </a:xfrm>
+          <a:prstGeom prst="rect">
+            <a:avLst/>
+          </a:prstGeom>
+        </p:spPr>
+      </p:pic>
+      <p:pic>
+        <p:nvPicPr>
+          <p:cNvPr id="6" name="Picture 5">
+            <a:extLst>
+              <a:ext uri="{FF2B5EF4-FFF2-40B4-BE49-F238E27FC236}">
+                <a16:creationId xmlns:a16="http://schemas.microsoft.com/office/drawing/2014/main" id="{235C8EBC-FFF3-B198-C752-290F15E43092}"/>
+              </a:ext>
+            </a:extLst>
+          </p:cNvPr>
+          <p:cNvPicPr>
+            <a:picLocks noChangeAspect="1"/>
+          </p:cNvPicPr>
+          <p:nvPr/>
+        </p:nvPicPr>
+        <p:blipFill>
+          <a:blip r:embed="rId4"/>
+          <a:stretch>
+            <a:fillRect/>
+          </a:stretch>
+        </p:blipFill>
+        <p:spPr>
+          <a:xfrm>
+            <a:off x="8200680" y="1087216"/>
+            <a:ext cx="3381847" cy="3705742"/>
+          </a:xfrm>
+          <a:prstGeom prst="rect">
+            <a:avLst/>
+          </a:prstGeom>
+        </p:spPr>
+      </p:pic>
+      <p:sp>
+        <p:nvSpPr>
+          <p:cNvPr id="8" name="TextBox 7">
+            <a:extLst>
+              <a:ext uri="{FF2B5EF4-FFF2-40B4-BE49-F238E27FC236}">
+                <a16:creationId xmlns:a16="http://schemas.microsoft.com/office/drawing/2014/main" id="{5FDFC830-3737-E73C-1F8F-AFC3A2673C90}"/>
+              </a:ext>
+            </a:extLst>
+          </p:cNvPr>
+          <p:cNvSpPr txBox="1"/>
+          <p:nvPr/>
+        </p:nvSpPr>
+        <p:spPr>
+          <a:xfrm>
+            <a:off x="383458" y="4792958"/>
+            <a:ext cx="3154362" cy="369332"/>
+          </a:xfrm>
+          <a:prstGeom prst="rect">
+            <a:avLst/>
+          </a:prstGeom>
+          <a:noFill/>
+        </p:spPr>
+        <p:txBody>
+          <a:bodyPr wrap="square" rtlCol="0">
+            <a:spAutoFit/>
+          </a:bodyPr>
+          <a:lstStyle/>
+          <a:p>
+            <a:r>
+              <a:rPr lang="es-MX" dirty="0"/>
+              <a:t>Pasamos al diagrama </a:t>
+            </a:r>
+            <a:r>
+              <a:rPr lang="es-MX"/>
+              <a:t>de flujo, </a:t>
+            </a:r>
+            <a:endParaRPr lang="es-PE"/>
+          </a:p>
+        </p:txBody>
+      </p:sp>
+    </p:spTree>
+    <p:extLst>
+      <p:ext uri="{BB962C8B-B14F-4D97-AF65-F5344CB8AC3E}">
+        <p14:creationId xmlns:p14="http://schemas.microsoft.com/office/powerpoint/2010/main" val="2598968131"/>
       </p:ext>
     </p:extLst>
   </p:cSld>

--- a/Caso de la bodega.pptx
+++ b/Caso de la bodega.pptx
@@ -7500,7 +7500,7 @@
           <a:lstStyle/>
           <a:p>
             <a:pPr algn="ctr"/>
-            <a:endParaRPr lang="en-US"/>
+            <a:endParaRPr lang="en-US" dirty="0"/>
           </a:p>
         </p:txBody>
       </p:sp>
@@ -7563,7 +7563,7 @@
           <a:lstStyle/>
           <a:p>
             <a:pPr algn="ctr"/>
-            <a:endParaRPr lang="en-US"/>
+            <a:endParaRPr lang="en-US" dirty="0"/>
           </a:p>
         </p:txBody>
       </p:sp>
@@ -7596,14 +7596,14 @@
           <a:lstStyle/>
           <a:p>
             <a:r>
-              <a:rPr lang="es-MX" sz="3600">
+              <a:rPr lang="es-MX" sz="3600" dirty="0">
                 <a:solidFill>
                   <a:schemeClr val="tx2"/>
                 </a:solidFill>
               </a:rPr>
               <a:t>Problemática</a:t>
             </a:r>
-            <a:endParaRPr lang="es-PE" sz="3600">
+            <a:endParaRPr lang="es-PE" sz="3600" dirty="0">
               <a:solidFill>
                 <a:schemeClr val="tx2"/>
               </a:solidFill>
@@ -7687,7 +7687,15 @@
                   <a:schemeClr val="tx2"/>
                 </a:solidFill>
               </a:rPr>
-              <a:t>La bodega “Doña Cintia” es un local que en los últimos meses ha estado reportando irregularidades en sus ganancias, en el reporte de su inventario, y en el manejo de sus impuestos, es una bodega que depende principalmente de la venta de sus productos de primera mano no solo para poder mantener la bodega.</a:t>
+              <a:t>La bodega “Doña Cintia” es un local que en los últimos meses ha estado reportando irregularidades en sus ganancias, en el reporte de su inventario, y en el manejo de </a:t>
+            </a:r>
+            <a:r>
+              <a:rPr lang="es-MX" sz="1800">
+                <a:solidFill>
+                  <a:schemeClr val="tx2"/>
+                </a:solidFill>
+              </a:rPr>
+              <a:t>sus impuestos.</a:t>
             </a:r>
             <a:endParaRPr lang="es-PE" sz="1800" dirty="0">
               <a:solidFill>
@@ -9151,7 +9159,7 @@
             <a:lstStyle/>
             <a:p>
               <a:pPr algn="ctr"/>
-              <a:endParaRPr lang="en-US"/>
+              <a:endParaRPr lang="en-US" dirty="0"/>
             </a:p>
           </p:txBody>
         </p:sp>
@@ -9515,7 +9523,7 @@
             <a:lstStyle/>
             <a:p>
               <a:pPr algn="ctr"/>
-              <a:endParaRPr lang="en-US"/>
+              <a:endParaRPr lang="en-US" dirty="0"/>
             </a:p>
           </p:txBody>
         </p:sp>
@@ -10683,7 +10691,7 @@
           <a:lstStyle/>
           <a:p>
             <a:pPr algn="ctr"/>
-            <a:endParaRPr lang="en-US"/>
+            <a:endParaRPr lang="en-US" dirty="0"/>
           </a:p>
         </p:txBody>
       </p:sp>
@@ -10759,7 +10767,7 @@
           <a:lstStyle/>
           <a:p>
             <a:pPr algn="ctr"/>
-            <a:endParaRPr lang="en-US"/>
+            <a:endParaRPr lang="en-US" dirty="0"/>
           </a:p>
         </p:txBody>
       </p:sp>
@@ -10832,7 +10840,7 @@
           <a:lstStyle/>
           <a:p>
             <a:pPr algn="ctr"/>
-            <a:endParaRPr lang="en-US"/>
+            <a:endParaRPr lang="en-US" dirty="0"/>
           </a:p>
         </p:txBody>
       </p:sp>
@@ -10907,7 +10915,7 @@
           <a:lstStyle/>
           <a:p>
             <a:pPr algn="ctr"/>
-            <a:endParaRPr lang="en-US"/>
+            <a:endParaRPr lang="en-US" dirty="0"/>
           </a:p>
         </p:txBody>
       </p:sp>
@@ -11229,7 +11237,7 @@
           <a:lstStyle/>
           <a:p>
             <a:pPr algn="ctr"/>
-            <a:endParaRPr lang="en-US"/>
+            <a:endParaRPr lang="en-US" dirty="0"/>
           </a:p>
         </p:txBody>
       </p:sp>
@@ -11263,14 +11271,14 @@
           <a:p>
             <a:pPr algn="r"/>
             <a:r>
-              <a:rPr lang="es-MX" sz="4000">
+              <a:rPr lang="es-MX" sz="4000" dirty="0">
                 <a:solidFill>
                   <a:srgbClr val="FFFFFF"/>
                 </a:solidFill>
               </a:rPr>
               <a:t>Análisis del problema</a:t>
             </a:r>
-            <a:endParaRPr lang="es-PE" sz="4000">
+            <a:endParaRPr lang="es-PE" sz="4000" dirty="0">
               <a:solidFill>
                 <a:srgbClr val="FFFFFF"/>
               </a:solidFill>
@@ -11306,6 +11314,9 @@
           </a:bodyPr>
           <a:lstStyle/>
           <a:p>
+            <a:pPr marL="0" indent="0">
+              <a:buNone/>
+            </a:pPr>
             <a:r>
               <a:rPr lang="es-MX" sz="2000" dirty="0"/>
               <a:t>Durante la entrevista que realizamos a Doña Cintia para recolectar datos y poder hallar las consecuencias de estos problemas, nos dimos cuenta de que al tratarse de una bodega local, se mantiene bajo el uso de registros tradicionales, libros, ficheros, cosa lo cual puede ser muy manipulable por los mismos trabajadores de Cintia, </a:t>
@@ -11316,7 +11327,7 @@
             </a:r>
             <a:r>
               <a:rPr lang="es-MX" sz="2000" dirty="0"/>
-              <a:t> nos comento en la entrevista que ella se encarga de la bodega los días Lunes y Domingos, mientras el resto de días son ocupados por sus empleados. Esos mismos días, Cintia eventualmente solo se encarga de revisar que los productos para </a:t>
+              <a:t> nos comento en la entrevista que ella se encarga de la bodega los días Lunes y Domingos, mientras el resto de días son ocupados por sus empleados. Los días Lunes, Cintia eventualmente solo se encarga de revisar que los productos para </a:t>
             </a:r>
             <a:r>
               <a:rPr lang="es-MX" sz="2000" dirty="0" err="1"/>
@@ -11324,7 +11335,7 @@
             </a:r>
             <a:r>
               <a:rPr lang="es-MX" sz="2000" dirty="0"/>
-              <a:t> lleguen, por lo que no suele tener mucho en cuenta lo que hay en su bodega hasta el día en el que tiene que verificar por cuenta propia y los Domingos, donde hace el calculo de sus ventas y de almacén para saber que productos retirar y cuales mantener, además de cuales reponer.</a:t>
+              <a:t> lleguen, por lo que no suele tener mucho en cuenta lo que hay en su bodega hasta el día Domingo, día en el que tiene que verificar por cuenta propia el calculo de sus ventas y de almacén para saber cuales productos reponer y cuales son las ganancias hasta el momento.</a:t>
             </a:r>
             <a:endParaRPr lang="es-PE" sz="2000" dirty="0"/>
           </a:p>
@@ -11370,10 +11381,10 @@
       </p:grpSpPr>
       <p:sp useBgFill="1">
         <p:nvSpPr>
-          <p:cNvPr id="20" name="Rectangle 19">
-            <a:extLst>
-              <a:ext uri="{FF2B5EF4-FFF2-40B4-BE49-F238E27FC236}">
-                <a16:creationId xmlns:a16="http://schemas.microsoft.com/office/drawing/2014/main" id="{8B3A2D1A-45FC-4F95-B150-1C13EF2F6D09}"/>
+          <p:cNvPr id="26" name="Rectangle 25">
+            <a:extLst>
+              <a:ext uri="{FF2B5EF4-FFF2-40B4-BE49-F238E27FC236}">
+                <a16:creationId xmlns:a16="http://schemas.microsoft.com/office/drawing/2014/main" id="{131BAD53-4E89-4F62-BBB7-26359763ED39}"/>
               </a:ext>
               <a:ext uri="{C183D7F6-B498-43B3-948B-1728B52AA6E4}">
                 <adec:decorative xmlns:adec="http://schemas.microsoft.com/office/drawing/2017/decorative" val="1"/>
@@ -11446,10 +11457,10 @@
       </p:sp>
       <p:sp>
         <p:nvSpPr>
-          <p:cNvPr id="21" name="Freeform: Shape 20">
-            <a:extLst>
-              <a:ext uri="{FF2B5EF4-FFF2-40B4-BE49-F238E27FC236}">
-                <a16:creationId xmlns:a16="http://schemas.microsoft.com/office/drawing/2014/main" id="{39C3C864-C625-4883-B868-9A4C470F4DD5}"/>
+          <p:cNvPr id="28" name="Freeform: Shape 27">
+            <a:extLst>
+              <a:ext uri="{FF2B5EF4-FFF2-40B4-BE49-F238E27FC236}">
+                <a16:creationId xmlns:a16="http://schemas.microsoft.com/office/drawing/2014/main" id="{62756DA2-40EB-4C6F-B962-5822FFB54FB6}"/>
               </a:ext>
               <a:ext uri="{C183D7F6-B498-43B3-948B-1728B52AA6E4}">
                 <adec:decorative xmlns:adec="http://schemas.microsoft.com/office/drawing/2017/decorative" val="1"/>
@@ -11468,529 +11479,337 @@
           </p:nvPr>
         </p:nvSpPr>
         <p:spPr>
-          <a:xfrm rot="10800000">
-            <a:off x="-3291" y="3296652"/>
-            <a:ext cx="12202113" cy="3561346"/>
+          <a:xfrm>
+            <a:off x="0" y="0"/>
+            <a:ext cx="5653438" cy="6858000"/>
           </a:xfrm>
           <a:custGeom>
             <a:avLst/>
             <a:gdLst>
-              <a:gd name="connsiteX0" fmla="*/ 0 w 12202113"/>
-              <a:gd name="connsiteY0" fmla="*/ 3188466 h 3188466"/>
-              <a:gd name="connsiteX1" fmla="*/ 10116 w 12202113"/>
-              <a:gd name="connsiteY1" fmla="*/ 2657641 h 3188466"/>
-              <a:gd name="connsiteX2" fmla="*/ 10116 w 12202113"/>
-              <a:gd name="connsiteY2" fmla="*/ 0 h 3188466"/>
-              <a:gd name="connsiteX3" fmla="*/ 12202113 w 12202113"/>
-              <a:gd name="connsiteY3" fmla="*/ 0 h 3188466"/>
-              <a:gd name="connsiteX4" fmla="*/ 12202113 w 12202113"/>
-              <a:gd name="connsiteY4" fmla="*/ 2879832 h 3188466"/>
-              <a:gd name="connsiteX5" fmla="*/ 12198167 w 12202113"/>
-              <a:gd name="connsiteY5" fmla="*/ 2880360 h 3188466"/>
-              <a:gd name="connsiteX6" fmla="*/ 12122128 w 12202113"/>
-              <a:gd name="connsiteY6" fmla="*/ 2887194 h 3188466"/>
-              <a:gd name="connsiteX7" fmla="*/ 12028868 w 12202113"/>
-              <a:gd name="connsiteY7" fmla="*/ 2911786 h 3188466"/>
-              <a:gd name="connsiteX8" fmla="*/ 11995238 w 12202113"/>
-              <a:gd name="connsiteY8" fmla="*/ 2914090 h 3188466"/>
-              <a:gd name="connsiteX9" fmla="*/ 11996460 w 12202113"/>
-              <a:gd name="connsiteY9" fmla="*/ 2918442 h 3188466"/>
-              <a:gd name="connsiteX10" fmla="*/ 11983968 w 12202113"/>
-              <a:gd name="connsiteY10" fmla="*/ 2918762 h 3188466"/>
-              <a:gd name="connsiteX11" fmla="*/ 11956084 w 12202113"/>
-              <a:gd name="connsiteY11" fmla="*/ 2918868 h 3188466"/>
-              <a:gd name="connsiteX12" fmla="*/ 11872586 w 12202113"/>
-              <a:gd name="connsiteY12" fmla="*/ 2920076 h 3188466"/>
-              <a:gd name="connsiteX13" fmla="*/ 11849804 w 12202113"/>
-              <a:gd name="connsiteY13" fmla="*/ 2928420 h 3188466"/>
-              <a:gd name="connsiteX14" fmla="*/ 11828254 w 12202113"/>
-              <a:gd name="connsiteY14" fmla="*/ 2928551 h 3188466"/>
-              <a:gd name="connsiteX15" fmla="*/ 11703277 w 12202113"/>
-              <a:gd name="connsiteY15" fmla="*/ 2939735 h 3188466"/>
-              <a:gd name="connsiteX16" fmla="*/ 11686094 w 12202113"/>
-              <a:gd name="connsiteY16" fmla="*/ 2940570 h 3188466"/>
-              <a:gd name="connsiteX17" fmla="*/ 11676788 w 12202113"/>
-              <a:gd name="connsiteY17" fmla="*/ 2944321 h 3188466"/>
-              <a:gd name="connsiteX18" fmla="*/ 11643464 w 12202113"/>
-              <a:gd name="connsiteY18" fmla="*/ 2945066 h 3188466"/>
-              <a:gd name="connsiteX19" fmla="*/ 11641922 w 12202113"/>
-              <a:gd name="connsiteY19" fmla="*/ 2947200 h 3188466"/>
-              <a:gd name="connsiteX20" fmla="*/ 11532386 w 12202113"/>
-              <a:gd name="connsiteY20" fmla="*/ 2965529 h 3188466"/>
-              <a:gd name="connsiteX21" fmla="*/ 11513619 w 12202113"/>
-              <a:gd name="connsiteY21" fmla="*/ 2968556 h 3188466"/>
-              <a:gd name="connsiteX22" fmla="*/ 11497404 w 12202113"/>
-              <a:gd name="connsiteY22" fmla="*/ 2967639 h 3188466"/>
-              <a:gd name="connsiteX23" fmla="*/ 11407630 w 12202113"/>
-              <a:gd name="connsiteY23" fmla="*/ 2970255 h 3188466"/>
-              <a:gd name="connsiteX24" fmla="*/ 11386276 w 12202113"/>
-              <a:gd name="connsiteY24" fmla="*/ 2968648 h 3188466"/>
-              <a:gd name="connsiteX25" fmla="*/ 11377296 w 12202113"/>
-              <a:gd name="connsiteY25" fmla="*/ 2965257 h 3188466"/>
-              <a:gd name="connsiteX26" fmla="*/ 11342536 w 12202113"/>
-              <a:gd name="connsiteY26" fmla="*/ 2971666 h 3188466"/>
-              <a:gd name="connsiteX27" fmla="*/ 11288902 w 12202113"/>
-              <a:gd name="connsiteY27" fmla="*/ 2976058 h 3188466"/>
-              <a:gd name="connsiteX28" fmla="*/ 11263411 w 12202113"/>
-              <a:gd name="connsiteY28" fmla="*/ 2979228 h 3188466"/>
-              <a:gd name="connsiteX29" fmla="*/ 11242843 w 12202113"/>
-              <a:gd name="connsiteY29" fmla="*/ 2977303 h 3188466"/>
-              <a:gd name="connsiteX30" fmla="*/ 11125798 w 12202113"/>
-              <a:gd name="connsiteY30" fmla="*/ 2976816 h 3188466"/>
-              <a:gd name="connsiteX31" fmla="*/ 11098884 w 12202113"/>
-              <a:gd name="connsiteY31" fmla="*/ 2973758 h 3188466"/>
-              <a:gd name="connsiteX32" fmla="*/ 11086128 w 12202113"/>
-              <a:gd name="connsiteY32" fmla="*/ 2967663 h 3188466"/>
-              <a:gd name="connsiteX33" fmla="*/ 11076132 w 12202113"/>
-              <a:gd name="connsiteY33" fmla="*/ 2969836 h 3188466"/>
-              <a:gd name="connsiteX34" fmla="*/ 11005337 w 12202113"/>
-              <a:gd name="connsiteY34" fmla="*/ 2970053 h 3188466"/>
-              <a:gd name="connsiteX35" fmla="*/ 10959154 w 12202113"/>
-              <a:gd name="connsiteY35" fmla="*/ 2970750 h 3188466"/>
-              <a:gd name="connsiteX36" fmla="*/ 10956347 w 12202113"/>
-              <a:gd name="connsiteY36" fmla="*/ 2979118 h 3188466"/>
-              <a:gd name="connsiteX37" fmla="*/ 10915223 w 12202113"/>
-              <a:gd name="connsiteY37" fmla="*/ 2982099 h 3188466"/>
-              <a:gd name="connsiteX38" fmla="*/ 10871398 w 12202113"/>
-              <a:gd name="connsiteY38" fmla="*/ 2976728 h 3188466"/>
-              <a:gd name="connsiteX39" fmla="*/ 10819743 w 12202113"/>
-              <a:gd name="connsiteY39" fmla="*/ 2977481 h 3188466"/>
-              <a:gd name="connsiteX40" fmla="*/ 10788834 w 12202113"/>
-              <a:gd name="connsiteY40" fmla="*/ 2977840 h 3188466"/>
-              <a:gd name="connsiteX41" fmla="*/ 10707711 w 12202113"/>
-              <a:gd name="connsiteY41" fmla="*/ 2985644 h 3188466"/>
-              <a:gd name="connsiteX42" fmla="*/ 10576086 w 12202113"/>
-              <a:gd name="connsiteY42" fmla="*/ 3015319 h 3188466"/>
-              <a:gd name="connsiteX43" fmla="*/ 10534761 w 12202113"/>
-              <a:gd name="connsiteY43" fmla="*/ 3019524 h 3188466"/>
-              <a:gd name="connsiteX44" fmla="*/ 10527537 w 12202113"/>
-              <a:gd name="connsiteY44" fmla="*/ 3017814 h 3188466"/>
-              <a:gd name="connsiteX45" fmla="*/ 10321799 w 12202113"/>
-              <a:gd name="connsiteY45" fmla="*/ 3035635 h 3188466"/>
-              <a:gd name="connsiteX46" fmla="*/ 10284989 w 12202113"/>
-              <a:gd name="connsiteY46" fmla="*/ 3036679 h 3188466"/>
-              <a:gd name="connsiteX47" fmla="*/ 10257423 w 12202113"/>
-              <a:gd name="connsiteY47" fmla="*/ 3036027 h 3188466"/>
-              <a:gd name="connsiteX48" fmla="*/ 10191450 w 12202113"/>
-              <a:gd name="connsiteY48" fmla="*/ 3041963 h 3188466"/>
-              <a:gd name="connsiteX49" fmla="*/ 10083845 w 12202113"/>
-              <a:gd name="connsiteY49" fmla="*/ 3054978 h 3188466"/>
-              <a:gd name="connsiteX50" fmla="*/ 10060611 w 12202113"/>
-              <a:gd name="connsiteY50" fmla="*/ 3057035 h 3188466"/>
-              <a:gd name="connsiteX51" fmla="*/ 10039363 w 12202113"/>
-              <a:gd name="connsiteY51" fmla="*/ 3055961 h 3188466"/>
-              <a:gd name="connsiteX52" fmla="*/ 10033322 w 12202113"/>
-              <a:gd name="connsiteY52" fmla="*/ 3053238 h 3188466"/>
-              <a:gd name="connsiteX53" fmla="*/ 10020337 w 12202113"/>
-              <a:gd name="connsiteY53" fmla="*/ 3053912 h 3188466"/>
-              <a:gd name="connsiteX54" fmla="*/ 10016616 w 12202113"/>
-              <a:gd name="connsiteY54" fmla="*/ 3053498 h 3188466"/>
-              <a:gd name="connsiteX55" fmla="*/ 9995549 w 12202113"/>
-              <a:gd name="connsiteY55" fmla="*/ 3051719 h 3188466"/>
-              <a:gd name="connsiteX56" fmla="*/ 9957212 w 12202113"/>
-              <a:gd name="connsiteY56" fmla="*/ 3062663 h 3188466"/>
-              <a:gd name="connsiteX57" fmla="*/ 9904584 w 12202113"/>
-              <a:gd name="connsiteY57" fmla="*/ 3063999 h 3188466"/>
-              <a:gd name="connsiteX58" fmla="*/ 9713857 w 12202113"/>
-              <a:gd name="connsiteY58" fmla="*/ 3087955 h 3188466"/>
-              <a:gd name="connsiteX59" fmla="*/ 9678879 w 12202113"/>
-              <a:gd name="connsiteY59" fmla="*/ 3079676 h 3188466"/>
-              <a:gd name="connsiteX60" fmla="*/ 9598760 w 12202113"/>
-              <a:gd name="connsiteY60" fmla="*/ 3085228 h 3188466"/>
-              <a:gd name="connsiteX61" fmla="*/ 9488796 w 12202113"/>
-              <a:gd name="connsiteY61" fmla="*/ 3115384 h 3188466"/>
-              <a:gd name="connsiteX62" fmla="*/ 9341972 w 12202113"/>
-              <a:gd name="connsiteY62" fmla="*/ 3126583 h 3188466"/>
-              <a:gd name="connsiteX63" fmla="*/ 9333795 w 12202113"/>
-              <a:gd name="connsiteY63" fmla="*/ 3132083 h 3188466"/>
-              <a:gd name="connsiteX64" fmla="*/ 9321736 w 12202113"/>
-              <a:gd name="connsiteY64" fmla="*/ 3135834 h 3188466"/>
-              <a:gd name="connsiteX65" fmla="*/ 9319405 w 12202113"/>
-              <a:gd name="connsiteY65" fmla="*/ 3135561 h 3188466"/>
-              <a:gd name="connsiteX66" fmla="*/ 9302847 w 12202113"/>
-              <a:gd name="connsiteY66" fmla="*/ 3137746 h 3188466"/>
-              <a:gd name="connsiteX67" fmla="*/ 9300930 w 12202113"/>
-              <a:gd name="connsiteY67" fmla="*/ 3139687 h 3188466"/>
-              <a:gd name="connsiteX68" fmla="*/ 9290106 w 12202113"/>
-              <a:gd name="connsiteY68" fmla="*/ 3141645 h 3188466"/>
-              <a:gd name="connsiteX69" fmla="*/ 9270220 w 12202113"/>
-              <a:gd name="connsiteY69" fmla="*/ 3146737 h 3188466"/>
-              <a:gd name="connsiteX70" fmla="*/ 9265150 w 12202113"/>
-              <a:gd name="connsiteY70" fmla="*/ 3146531 h 3188466"/>
-              <a:gd name="connsiteX71" fmla="*/ 9233057 w 12202113"/>
-              <a:gd name="connsiteY71" fmla="*/ 3152408 h 3188466"/>
-              <a:gd name="connsiteX72" fmla="*/ 9231974 w 12202113"/>
-              <a:gd name="connsiteY72" fmla="*/ 3151938 h 3188466"/>
-              <a:gd name="connsiteX73" fmla="*/ 9220130 w 12202113"/>
-              <a:gd name="connsiteY73" fmla="*/ 3151189 h 3188466"/>
-              <a:gd name="connsiteX74" fmla="*/ 9198955 w 12202113"/>
-              <a:gd name="connsiteY74" fmla="*/ 3151015 h 3188466"/>
-              <a:gd name="connsiteX75" fmla="*/ 9142196 w 12202113"/>
-              <a:gd name="connsiteY75" fmla="*/ 3143802 h 3188466"/>
-              <a:gd name="connsiteX76" fmla="*/ 9108665 w 12202113"/>
-              <a:gd name="connsiteY76" fmla="*/ 3149868 h 3188466"/>
-              <a:gd name="connsiteX77" fmla="*/ 9014086 w 12202113"/>
-              <a:gd name="connsiteY77" fmla="*/ 3150791 h 3188466"/>
-              <a:gd name="connsiteX78" fmla="*/ 8915037 w 12202113"/>
-              <a:gd name="connsiteY78" fmla="*/ 3140020 h 3188466"/>
-              <a:gd name="connsiteX79" fmla="*/ 8815667 w 12202113"/>
-              <a:gd name="connsiteY79" fmla="*/ 3138606 h 3188466"/>
-              <a:gd name="connsiteX80" fmla="*/ 8779688 w 12202113"/>
-              <a:gd name="connsiteY80" fmla="*/ 3138895 h 3188466"/>
-              <a:gd name="connsiteX81" fmla="*/ 8715556 w 12202113"/>
-              <a:gd name="connsiteY81" fmla="*/ 3135878 h 3188466"/>
-              <a:gd name="connsiteX82" fmla="*/ 8686183 w 12202113"/>
-              <a:gd name="connsiteY82" fmla="*/ 3132307 h 3188466"/>
-              <a:gd name="connsiteX83" fmla="*/ 8684895 w 12202113"/>
-              <a:gd name="connsiteY83" fmla="*/ 3132527 h 3188466"/>
-              <a:gd name="connsiteX84" fmla="*/ 8682270 w 12202113"/>
-              <a:gd name="connsiteY84" fmla="*/ 3130989 h 3188466"/>
-              <a:gd name="connsiteX85" fmla="*/ 8676836 w 12202113"/>
-              <a:gd name="connsiteY85" fmla="*/ 3130278 h 3188466"/>
-              <a:gd name="connsiteX86" fmla="*/ 8662002 w 12202113"/>
-              <a:gd name="connsiteY86" fmla="*/ 3130735 h 3188466"/>
-              <a:gd name="connsiteX87" fmla="*/ 8656423 w 12202113"/>
-              <a:gd name="connsiteY87" fmla="*/ 3131304 h 3188466"/>
-              <a:gd name="connsiteX88" fmla="*/ 8648261 w 12202113"/>
-              <a:gd name="connsiteY88" fmla="*/ 3131294 h 3188466"/>
-              <a:gd name="connsiteX89" fmla="*/ 8648057 w 12202113"/>
-              <a:gd name="connsiteY89" fmla="*/ 3131167 h 3188466"/>
-              <a:gd name="connsiteX90" fmla="*/ 8640412 w 12202113"/>
-              <a:gd name="connsiteY90" fmla="*/ 3131403 h 3188466"/>
-              <a:gd name="connsiteX91" fmla="*/ 8603003 w 12202113"/>
-              <a:gd name="connsiteY91" fmla="*/ 3134155 h 3188466"/>
-              <a:gd name="connsiteX92" fmla="*/ 8553571 w 12202113"/>
-              <a:gd name="connsiteY92" fmla="*/ 3122125 h 3188466"/>
-              <a:gd name="connsiteX93" fmla="*/ 8533128 w 12202113"/>
-              <a:gd name="connsiteY93" fmla="*/ 3120039 h 3188466"/>
-              <a:gd name="connsiteX94" fmla="*/ 8522209 w 12202113"/>
-              <a:gd name="connsiteY94" fmla="*/ 3118252 h 3188466"/>
-              <a:gd name="connsiteX95" fmla="*/ 8521532 w 12202113"/>
-              <a:gd name="connsiteY95" fmla="*/ 3117705 h 3188466"/>
-              <a:gd name="connsiteX96" fmla="*/ 8485667 w 12202113"/>
-              <a:gd name="connsiteY96" fmla="*/ 3120406 h 3188466"/>
-              <a:gd name="connsiteX97" fmla="*/ 8480905 w 12202113"/>
-              <a:gd name="connsiteY97" fmla="*/ 3119749 h 3188466"/>
-              <a:gd name="connsiteX98" fmla="*/ 8457530 w 12202113"/>
-              <a:gd name="connsiteY98" fmla="*/ 3122810 h 3188466"/>
-              <a:gd name="connsiteX99" fmla="*/ 8445451 w 12202113"/>
-              <a:gd name="connsiteY99" fmla="*/ 3123697 h 3188466"/>
-              <a:gd name="connsiteX100" fmla="*/ 8442039 w 12202113"/>
-              <a:gd name="connsiteY100" fmla="*/ 3125378 h 3188466"/>
-              <a:gd name="connsiteX101" fmla="*/ 8424215 w 12202113"/>
-              <a:gd name="connsiteY101" fmla="*/ 3125963 h 3188466"/>
-              <a:gd name="connsiteX102" fmla="*/ 8422165 w 12202113"/>
-              <a:gd name="connsiteY102" fmla="*/ 3125491 h 3188466"/>
-              <a:gd name="connsiteX103" fmla="*/ 8407465 w 12202113"/>
-              <a:gd name="connsiteY103" fmla="*/ 3127979 h 3188466"/>
-              <a:gd name="connsiteX104" fmla="*/ 8395146 w 12202113"/>
-              <a:gd name="connsiteY104" fmla="*/ 3132488 h 3188466"/>
-              <a:gd name="connsiteX105" fmla="*/ 8243538 w 12202113"/>
-              <a:gd name="connsiteY105" fmla="*/ 3129873 h 3188466"/>
-              <a:gd name="connsiteX106" fmla="*/ 8112685 w 12202113"/>
-              <a:gd name="connsiteY106" fmla="*/ 3148698 h 3188466"/>
-              <a:gd name="connsiteX107" fmla="*/ 8026741 w 12202113"/>
-              <a:gd name="connsiteY107" fmla="*/ 3154015 h 3188466"/>
-              <a:gd name="connsiteX108" fmla="*/ 8030400 w 12202113"/>
-              <a:gd name="connsiteY108" fmla="*/ 3146736 h 3188466"/>
-              <a:gd name="connsiteX109" fmla="*/ 8002987 w 12202113"/>
-              <a:gd name="connsiteY109" fmla="*/ 3135663 h 3188466"/>
-              <a:gd name="connsiteX110" fmla="*/ 7798568 w 12202113"/>
-              <a:gd name="connsiteY110" fmla="*/ 3141249 h 3188466"/>
-              <a:gd name="connsiteX111" fmla="*/ 7746353 w 12202113"/>
-              <a:gd name="connsiteY111" fmla="*/ 3137755 h 3188466"/>
-              <a:gd name="connsiteX112" fmla="*/ 7700395 w 12202113"/>
-              <a:gd name="connsiteY112" fmla="*/ 3144729 h 3188466"/>
-              <a:gd name="connsiteX113" fmla="*/ 7681335 w 12202113"/>
-              <a:gd name="connsiteY113" fmla="*/ 3141120 h 3188466"/>
-              <a:gd name="connsiteX114" fmla="*/ 7678044 w 12202113"/>
-              <a:gd name="connsiteY114" fmla="*/ 3140387 h 3188466"/>
-              <a:gd name="connsiteX115" fmla="*/ 7664890 w 12202113"/>
-              <a:gd name="connsiteY115" fmla="*/ 3139855 h 3188466"/>
-              <a:gd name="connsiteX116" fmla="*/ 7661183 w 12202113"/>
-              <a:gd name="connsiteY116" fmla="*/ 3136706 h 3188466"/>
-              <a:gd name="connsiteX117" fmla="*/ 7641383 w 12202113"/>
-              <a:gd name="connsiteY117" fmla="*/ 3133755 h 3188466"/>
-              <a:gd name="connsiteX118" fmla="*/ 7617169 w 12202113"/>
-              <a:gd name="connsiteY118" fmla="*/ 3133614 h 3188466"/>
-              <a:gd name="connsiteX119" fmla="*/ 7531143 w 12202113"/>
-              <a:gd name="connsiteY119" fmla="*/ 3132781 h 3188466"/>
-              <a:gd name="connsiteX120" fmla="*/ 7517113 w 12202113"/>
-              <a:gd name="connsiteY120" fmla="*/ 3134483 h 3188466"/>
-              <a:gd name="connsiteX121" fmla="*/ 7471320 w 12202113"/>
-              <a:gd name="connsiteY121" fmla="*/ 3131645 h 3188466"/>
-              <a:gd name="connsiteX122" fmla="*/ 7430512 w 12202113"/>
-              <a:gd name="connsiteY122" fmla="*/ 3131007 h 3188466"/>
-              <a:gd name="connsiteX123" fmla="*/ 7404071 w 12202113"/>
-              <a:gd name="connsiteY123" fmla="*/ 3132361 h 3188466"/>
-              <a:gd name="connsiteX124" fmla="*/ 7397140 w 12202113"/>
-              <a:gd name="connsiteY124" fmla="*/ 3131239 h 3188466"/>
-              <a:gd name="connsiteX125" fmla="*/ 7370514 w 12202113"/>
-              <a:gd name="connsiteY125" fmla="*/ 3130516 h 3188466"/>
-              <a:gd name="connsiteX126" fmla="*/ 7356953 w 12202113"/>
-              <a:gd name="connsiteY126" fmla="*/ 3132179 h 3188466"/>
-              <a:gd name="connsiteX127" fmla="*/ 7343567 w 12202113"/>
-              <a:gd name="connsiteY127" fmla="*/ 3128350 h 3188466"/>
-              <a:gd name="connsiteX128" fmla="*/ 7340295 w 12202113"/>
-              <a:gd name="connsiteY128" fmla="*/ 3125545 h 3188466"/>
-              <a:gd name="connsiteX129" fmla="*/ 7321348 w 12202113"/>
-              <a:gd name="connsiteY129" fmla="*/ 3126804 h 3188466"/>
-              <a:gd name="connsiteX130" fmla="*/ 7305815 w 12202113"/>
-              <a:gd name="connsiteY130" fmla="*/ 3124063 h 3188466"/>
-              <a:gd name="connsiteX131" fmla="*/ 7292274 w 12202113"/>
-              <a:gd name="connsiteY131" fmla="*/ 3125855 h 3188466"/>
-              <a:gd name="connsiteX132" fmla="*/ 7286654 w 12202113"/>
-              <a:gd name="connsiteY132" fmla="*/ 3125451 h 3188466"/>
-              <a:gd name="connsiteX133" fmla="*/ 7272685 w 12202113"/>
-              <a:gd name="connsiteY133" fmla="*/ 3124094 h 3188466"/>
-              <a:gd name="connsiteX134" fmla="*/ 7248584 w 12202113"/>
-              <a:gd name="connsiteY134" fmla="*/ 3121080 h 3188466"/>
-              <a:gd name="connsiteX135" fmla="*/ 7241065 w 12202113"/>
-              <a:gd name="connsiteY135" fmla="*/ 3120661 h 3188466"/>
-              <a:gd name="connsiteX136" fmla="*/ 7224696 w 12202113"/>
-              <a:gd name="connsiteY136" fmla="*/ 3116051 h 3188466"/>
-              <a:gd name="connsiteX137" fmla="*/ 7193009 w 12202113"/>
-              <a:gd name="connsiteY137" fmla="*/ 3112108 h 3188466"/>
-              <a:gd name="connsiteX138" fmla="*/ 7137220 w 12202113"/>
-              <a:gd name="connsiteY138" fmla="*/ 3098354 h 3188466"/>
-              <a:gd name="connsiteX139" fmla="*/ 7104427 w 12202113"/>
-              <a:gd name="connsiteY139" fmla="*/ 3091790 h 3188466"/>
-              <a:gd name="connsiteX140" fmla="*/ 7082240 w 12202113"/>
-              <a:gd name="connsiteY140" fmla="*/ 3085740 h 3188466"/>
-              <a:gd name="connsiteX141" fmla="*/ 7016754 w 12202113"/>
-              <a:gd name="connsiteY141" fmla="*/ 3077196 h 3188466"/>
-              <a:gd name="connsiteX142" fmla="*/ 6904436 w 12202113"/>
-              <a:gd name="connsiteY142" fmla="*/ 3065900 h 3188466"/>
-              <a:gd name="connsiteX143" fmla="*/ 6881434 w 12202113"/>
-              <a:gd name="connsiteY143" fmla="*/ 3062865 h 3188466"/>
-              <a:gd name="connsiteX144" fmla="*/ 6865273 w 12202113"/>
-              <a:gd name="connsiteY144" fmla="*/ 3057749 h 3188466"/>
-              <a:gd name="connsiteX145" fmla="*/ 6864671 w 12202113"/>
-              <a:gd name="connsiteY145" fmla="*/ 3054378 h 3188466"/>
-              <a:gd name="connsiteX146" fmla="*/ 6852599 w 12202113"/>
-              <a:gd name="connsiteY146" fmla="*/ 3052306 h 3188466"/>
-              <a:gd name="connsiteX147" fmla="*/ 6850143 w 12202113"/>
-              <a:gd name="connsiteY147" fmla="*/ 3051232 h 3188466"/>
-              <a:gd name="connsiteX148" fmla="*/ 6835301 w 12202113"/>
-              <a:gd name="connsiteY148" fmla="*/ 3045593 h 3188466"/>
-              <a:gd name="connsiteX149" fmla="*/ 6784871 w 12202113"/>
-              <a:gd name="connsiteY149" fmla="*/ 3046562 h 3188466"/>
-              <a:gd name="connsiteX150" fmla="*/ 6738245 w 12202113"/>
-              <a:gd name="connsiteY150" fmla="*/ 3037055 h 3188466"/>
-              <a:gd name="connsiteX151" fmla="*/ 6537703 w 12202113"/>
-              <a:gd name="connsiteY151" fmla="*/ 3017736 h 3188466"/>
-              <a:gd name="connsiteX152" fmla="*/ 6521858 w 12202113"/>
-              <a:gd name="connsiteY152" fmla="*/ 3004158 h 3188466"/>
-              <a:gd name="connsiteX153" fmla="*/ 6445069 w 12202113"/>
-              <a:gd name="connsiteY153" fmla="*/ 2992470 h 3188466"/>
-              <a:gd name="connsiteX154" fmla="*/ 6302447 w 12202113"/>
-              <a:gd name="connsiteY154" fmla="*/ 2994274 h 3188466"/>
-              <a:gd name="connsiteX155" fmla="*/ 6160029 w 12202113"/>
-              <a:gd name="connsiteY155" fmla="*/ 2973666 h 3188466"/>
-              <a:gd name="connsiteX156" fmla="*/ 6144046 w 12202113"/>
-              <a:gd name="connsiteY156" fmla="*/ 2976380 h 3188466"/>
-              <a:gd name="connsiteX157" fmla="*/ 6127670 w 12202113"/>
-              <a:gd name="connsiteY157" fmla="*/ 2976929 h 3188466"/>
-              <a:gd name="connsiteX158" fmla="*/ 6126155 w 12202113"/>
-              <a:gd name="connsiteY158" fmla="*/ 2976245 h 3188466"/>
-              <a:gd name="connsiteX159" fmla="*/ 6108575 w 12202113"/>
-              <a:gd name="connsiteY159" fmla="*/ 2974651 h 3188466"/>
-              <a:gd name="connsiteX160" fmla="*/ 6103746 w 12202113"/>
-              <a:gd name="connsiteY160" fmla="*/ 2975803 h 3188466"/>
-              <a:gd name="connsiteX161" fmla="*/ 6091377 w 12202113"/>
-              <a:gd name="connsiteY161" fmla="*/ 2975180 h 3188466"/>
-              <a:gd name="connsiteX162" fmla="*/ 6066183 w 12202113"/>
-              <a:gd name="connsiteY162" fmla="*/ 2975222 h 3188466"/>
-              <a:gd name="connsiteX163" fmla="*/ 6063287 w 12202113"/>
-              <a:gd name="connsiteY163" fmla="*/ 2974353 h 3188466"/>
-              <a:gd name="connsiteX164" fmla="*/ 6054813 w 12202113"/>
-              <a:gd name="connsiteY164" fmla="*/ 2974911 h 3188466"/>
-              <a:gd name="connsiteX165" fmla="*/ 6050809 w 12202113"/>
-              <a:gd name="connsiteY165" fmla="*/ 2973985 h 3188466"/>
-              <a:gd name="connsiteX166" fmla="*/ 6013979 w 12202113"/>
-              <a:gd name="connsiteY166" fmla="*/ 2974553 h 3188466"/>
-              <a:gd name="connsiteX167" fmla="*/ 6013800 w 12202113"/>
-              <a:gd name="connsiteY167" fmla="*/ 2973973 h 3188466"/>
-              <a:gd name="connsiteX168" fmla="*/ 6004866 w 12202113"/>
-              <a:gd name="connsiteY168" fmla="*/ 2971570 h 3188466"/>
-              <a:gd name="connsiteX169" fmla="*/ 5987036 w 12202113"/>
-              <a:gd name="connsiteY169" fmla="*/ 2968315 h 3188466"/>
-              <a:gd name="connsiteX170" fmla="*/ 5950027 w 12202113"/>
-              <a:gd name="connsiteY170" fmla="*/ 2953546 h 3188466"/>
-              <a:gd name="connsiteX171" fmla="*/ 5911668 w 12202113"/>
-              <a:gd name="connsiteY171" fmla="*/ 2954074 h 3188466"/>
-              <a:gd name="connsiteX172" fmla="*/ 5904110 w 12202113"/>
-              <a:gd name="connsiteY172" fmla="*/ 2953861 h 3188466"/>
-              <a:gd name="connsiteX173" fmla="*/ 5904026 w 12202113"/>
-              <a:gd name="connsiteY173" fmla="*/ 2953724 h 3188466"/>
-              <a:gd name="connsiteX174" fmla="*/ 5896189 w 12202113"/>
-              <a:gd name="connsiteY174" fmla="*/ 2953236 h 3188466"/>
-              <a:gd name="connsiteX175" fmla="*/ 5890331 w 12202113"/>
-              <a:gd name="connsiteY175" fmla="*/ 2953471 h 3188466"/>
-              <a:gd name="connsiteX176" fmla="*/ 5875672 w 12202113"/>
-              <a:gd name="connsiteY176" fmla="*/ 2953056 h 3188466"/>
-              <a:gd name="connsiteX177" fmla="*/ 5871070 w 12202113"/>
-              <a:gd name="connsiteY177" fmla="*/ 2952035 h 3188466"/>
-              <a:gd name="connsiteX178" fmla="*/ 5869888 w 12202113"/>
-              <a:gd name="connsiteY178" fmla="*/ 2950364 h 3188466"/>
-              <a:gd name="connsiteX179" fmla="*/ 5868461 w 12202113"/>
-              <a:gd name="connsiteY179" fmla="*/ 2950506 h 3188466"/>
-              <a:gd name="connsiteX180" fmla="*/ 5843343 w 12202113"/>
-              <a:gd name="connsiteY180" fmla="*/ 2945262 h 3188466"/>
-              <a:gd name="connsiteX181" fmla="*/ 5784331 w 12202113"/>
-              <a:gd name="connsiteY181" fmla="*/ 2938531 h 3188466"/>
-              <a:gd name="connsiteX182" fmla="*/ 5749498 w 12202113"/>
-              <a:gd name="connsiteY182" fmla="*/ 2936713 h 3188466"/>
-              <a:gd name="connsiteX183" fmla="*/ 5655214 w 12202113"/>
-              <a:gd name="connsiteY183" fmla="*/ 2929503 h 3188466"/>
-              <a:gd name="connsiteX184" fmla="*/ 5561446 w 12202113"/>
-              <a:gd name="connsiteY184" fmla="*/ 2920575 h 3188466"/>
-              <a:gd name="connsiteX185" fmla="*/ 5519456 w 12202113"/>
-              <a:gd name="connsiteY185" fmla="*/ 2906631 h 3188466"/>
-              <a:gd name="connsiteX186" fmla="*/ 5514099 w 12202113"/>
-              <a:gd name="connsiteY186" fmla="*/ 2906097 h 3188466"/>
-              <a:gd name="connsiteX187" fmla="*/ 5499273 w 12202113"/>
-              <a:gd name="connsiteY187" fmla="*/ 2907057 h 3188466"/>
-              <a:gd name="connsiteX188" fmla="*/ 5493664 w 12202113"/>
-              <a:gd name="connsiteY188" fmla="*/ 2907817 h 3188466"/>
-              <a:gd name="connsiteX189" fmla="*/ 5485530 w 12202113"/>
-              <a:gd name="connsiteY189" fmla="*/ 2908080 h 3188466"/>
-              <a:gd name="connsiteX190" fmla="*/ 5485337 w 12202113"/>
-              <a:gd name="connsiteY190" fmla="*/ 2907959 h 3188466"/>
-              <a:gd name="connsiteX191" fmla="*/ 5477696 w 12202113"/>
-              <a:gd name="connsiteY191" fmla="*/ 2908455 h 3188466"/>
-              <a:gd name="connsiteX192" fmla="*/ 5440170 w 12202113"/>
-              <a:gd name="connsiteY192" fmla="*/ 2912482 h 3188466"/>
-              <a:gd name="connsiteX193" fmla="*/ 5391911 w 12202113"/>
-              <a:gd name="connsiteY193" fmla="*/ 2902040 h 3188466"/>
-              <a:gd name="connsiteX194" fmla="*/ 5371708 w 12202113"/>
-              <a:gd name="connsiteY194" fmla="*/ 2900629 h 3188466"/>
-              <a:gd name="connsiteX195" fmla="*/ 5360976 w 12202113"/>
-              <a:gd name="connsiteY195" fmla="*/ 2899197 h 3188466"/>
-              <a:gd name="connsiteX196" fmla="*/ 5360345 w 12202113"/>
-              <a:gd name="connsiteY196" fmla="*/ 2898671 h 3188466"/>
-              <a:gd name="connsiteX197" fmla="*/ 5324367 w 12202113"/>
-              <a:gd name="connsiteY197" fmla="*/ 2902593 h 3188466"/>
-              <a:gd name="connsiteX198" fmla="*/ 5319673 w 12202113"/>
-              <a:gd name="connsiteY198" fmla="*/ 2902094 h 3188466"/>
-              <a:gd name="connsiteX199" fmla="*/ 5296114 w 12202113"/>
-              <a:gd name="connsiteY199" fmla="*/ 2905958 h 3188466"/>
-              <a:gd name="connsiteX200" fmla="*/ 5283999 w 12202113"/>
-              <a:gd name="connsiteY200" fmla="*/ 2907258 h 3188466"/>
-              <a:gd name="connsiteX201" fmla="*/ 5280460 w 12202113"/>
-              <a:gd name="connsiteY201" fmla="*/ 2909063 h 3188466"/>
-              <a:gd name="connsiteX202" fmla="*/ 5262637 w 12202113"/>
-              <a:gd name="connsiteY202" fmla="*/ 2910250 h 3188466"/>
-              <a:gd name="connsiteX203" fmla="*/ 5260635 w 12202113"/>
-              <a:gd name="connsiteY203" fmla="*/ 2909845 h 3188466"/>
-              <a:gd name="connsiteX204" fmla="*/ 5245770 w 12202113"/>
-              <a:gd name="connsiteY204" fmla="*/ 2912842 h 3188466"/>
-              <a:gd name="connsiteX205" fmla="*/ 5233108 w 12202113"/>
-              <a:gd name="connsiteY205" fmla="*/ 2917794 h 3188466"/>
-              <a:gd name="connsiteX206" fmla="*/ 5082201 w 12202113"/>
-              <a:gd name="connsiteY206" fmla="*/ 2920260 h 3188466"/>
-              <a:gd name="connsiteX207" fmla="*/ 4939211 w 12202113"/>
-              <a:gd name="connsiteY207" fmla="*/ 2931760 h 3188466"/>
-              <a:gd name="connsiteX208" fmla="*/ 4794309 w 12202113"/>
-              <a:gd name="connsiteY208" fmla="*/ 2937227 h 3188466"/>
-              <a:gd name="connsiteX209" fmla="*/ 4637676 w 12202113"/>
-              <a:gd name="connsiteY209" fmla="*/ 2946666 h 3188466"/>
-              <a:gd name="connsiteX210" fmla="*/ 4585922 w 12202113"/>
-              <a:gd name="connsiteY210" fmla="*/ 2944906 h 3188466"/>
-              <a:gd name="connsiteX211" fmla="*/ 4539516 w 12202113"/>
-              <a:gd name="connsiteY211" fmla="*/ 2953466 h 3188466"/>
-              <a:gd name="connsiteX212" fmla="*/ 4520819 w 12202113"/>
-              <a:gd name="connsiteY212" fmla="*/ 2950477 h 3188466"/>
-              <a:gd name="connsiteX213" fmla="*/ 4517604 w 12202113"/>
-              <a:gd name="connsiteY213" fmla="*/ 2949852 h 3188466"/>
-              <a:gd name="connsiteX214" fmla="*/ 4504537 w 12202113"/>
-              <a:gd name="connsiteY214" fmla="*/ 2949759 h 3188466"/>
-              <a:gd name="connsiteX215" fmla="*/ 4501104 w 12202113"/>
-              <a:gd name="connsiteY215" fmla="*/ 2946715 h 3188466"/>
-              <a:gd name="connsiteX216" fmla="*/ 4342695 w 12202113"/>
-              <a:gd name="connsiteY216" fmla="*/ 2951638 h 3188466"/>
-              <a:gd name="connsiteX217" fmla="*/ 4274096 w 12202113"/>
-              <a:gd name="connsiteY217" fmla="*/ 2953640 h 3188466"/>
-              <a:gd name="connsiteX218" fmla="*/ 4248170 w 12202113"/>
-              <a:gd name="connsiteY218" fmla="*/ 2951384 h 3188466"/>
-              <a:gd name="connsiteX219" fmla="*/ 4147924 w 12202113"/>
-              <a:gd name="connsiteY219" fmla="*/ 2945945 h 3188466"/>
-              <a:gd name="connsiteX220" fmla="*/ 4061825 w 12202113"/>
-              <a:gd name="connsiteY220" fmla="*/ 2944206 h 3188466"/>
-              <a:gd name="connsiteX221" fmla="*/ 3998557 w 12202113"/>
-              <a:gd name="connsiteY221" fmla="*/ 2955821 h 3188466"/>
-              <a:gd name="connsiteX222" fmla="*/ 3993107 w 12202113"/>
-              <a:gd name="connsiteY222" fmla="*/ 2953708 h 3188466"/>
-              <a:gd name="connsiteX223" fmla="*/ 3949713 w 12202113"/>
-              <a:gd name="connsiteY223" fmla="*/ 2955441 h 3188466"/>
-              <a:gd name="connsiteX224" fmla="*/ 3797284 w 12202113"/>
-              <a:gd name="connsiteY224" fmla="*/ 2977037 h 3188466"/>
-              <a:gd name="connsiteX225" fmla="*/ 3712498 w 12202113"/>
-              <a:gd name="connsiteY225" fmla="*/ 2979996 h 3188466"/>
-              <a:gd name="connsiteX226" fmla="*/ 3682471 w 12202113"/>
-              <a:gd name="connsiteY226" fmla="*/ 2978543 h 3188466"/>
-              <a:gd name="connsiteX227" fmla="*/ 3632163 w 12202113"/>
-              <a:gd name="connsiteY227" fmla="*/ 2976264 h 3188466"/>
-              <a:gd name="connsiteX228" fmla="*/ 3594728 w 12202113"/>
-              <a:gd name="connsiteY228" fmla="*/ 2968398 h 3188466"/>
-              <a:gd name="connsiteX229" fmla="*/ 3552594 w 12202113"/>
-              <a:gd name="connsiteY229" fmla="*/ 2968934 h 3188466"/>
-              <a:gd name="connsiteX230" fmla="*/ 3542589 w 12202113"/>
-              <a:gd name="connsiteY230" fmla="*/ 2977031 h 3188466"/>
-              <a:gd name="connsiteX231" fmla="*/ 3497591 w 12202113"/>
-              <a:gd name="connsiteY231" fmla="*/ 2975018 h 3188466"/>
-              <a:gd name="connsiteX232" fmla="*/ 3429352 w 12202113"/>
-              <a:gd name="connsiteY232" fmla="*/ 2971090 h 3188466"/>
-              <a:gd name="connsiteX233" fmla="*/ 3389938 w 12202113"/>
-              <a:gd name="connsiteY233" fmla="*/ 2970884 h 3188466"/>
-              <a:gd name="connsiteX234" fmla="*/ 3282344 w 12202113"/>
-              <a:gd name="connsiteY234" fmla="*/ 2968084 h 3188466"/>
-              <a:gd name="connsiteX235" fmla="*/ 3174624 w 12202113"/>
-              <a:gd name="connsiteY235" fmla="*/ 2963576 h 3188466"/>
-              <a:gd name="connsiteX236" fmla="*/ 3111077 w 12202113"/>
-              <a:gd name="connsiteY236" fmla="*/ 2951285 h 3188466"/>
-              <a:gd name="connsiteX237" fmla="*/ 3022501 w 12202113"/>
-              <a:gd name="connsiteY237" fmla="*/ 2948619 h 3188466"/>
-              <a:gd name="connsiteX238" fmla="*/ 3007714 w 12202113"/>
-              <a:gd name="connsiteY238" fmla="*/ 2946762 h 3188466"/>
-              <a:gd name="connsiteX239" fmla="*/ 2903098 w 12202113"/>
-              <a:gd name="connsiteY239" fmla="*/ 2940576 h 3188466"/>
-              <a:gd name="connsiteX240" fmla="*/ 2781591 w 12202113"/>
-              <a:gd name="connsiteY240" fmla="*/ 2946394 h 3188466"/>
-              <a:gd name="connsiteX241" fmla="*/ 2627942 w 12202113"/>
-              <a:gd name="connsiteY241" fmla="*/ 2919996 h 3188466"/>
-              <a:gd name="connsiteX242" fmla="*/ 2354959 w 12202113"/>
-              <a:gd name="connsiteY242" fmla="*/ 2882080 h 3188466"/>
-              <a:gd name="connsiteX243" fmla="*/ 2063184 w 12202113"/>
-              <a:gd name="connsiteY243" fmla="*/ 2879109 h 3188466"/>
-              <a:gd name="connsiteX244" fmla="*/ 1986946 w 12202113"/>
-              <a:gd name="connsiteY244" fmla="*/ 2887619 h 3188466"/>
-              <a:gd name="connsiteX245" fmla="*/ 1763479 w 12202113"/>
-              <a:gd name="connsiteY245" fmla="*/ 2909077 h 3188466"/>
-              <a:gd name="connsiteX246" fmla="*/ 1537980 w 12202113"/>
-              <a:gd name="connsiteY246" fmla="*/ 2960398 h 3188466"/>
-              <a:gd name="connsiteX247" fmla="*/ 1395229 w 12202113"/>
-              <a:gd name="connsiteY247" fmla="*/ 2975625 h 3188466"/>
-              <a:gd name="connsiteX248" fmla="*/ 1327834 w 12202113"/>
-              <a:gd name="connsiteY248" fmla="*/ 2989485 h 3188466"/>
-              <a:gd name="connsiteX249" fmla="*/ 1280757 w 12202113"/>
-              <a:gd name="connsiteY249" fmla="*/ 2992959 h 3188466"/>
-              <a:gd name="connsiteX250" fmla="*/ 1252582 w 12202113"/>
-              <a:gd name="connsiteY250" fmla="*/ 2995877 h 3188466"/>
-              <a:gd name="connsiteX251" fmla="*/ 1204670 w 12202113"/>
-              <a:gd name="connsiteY251" fmla="*/ 3014826 h 3188466"/>
-              <a:gd name="connsiteX252" fmla="*/ 1020457 w 12202113"/>
-              <a:gd name="connsiteY252" fmla="*/ 3031603 h 3188466"/>
-              <a:gd name="connsiteX253" fmla="*/ 843248 w 12202113"/>
-              <a:gd name="connsiteY253" fmla="*/ 3026954 h 3188466"/>
-              <a:gd name="connsiteX254" fmla="*/ 583517 w 12202113"/>
-              <a:gd name="connsiteY254" fmla="*/ 3089095 h 3188466"/>
-              <a:gd name="connsiteX255" fmla="*/ 556836 w 12202113"/>
-              <a:gd name="connsiteY255" fmla="*/ 3094374 h 3188466"/>
-              <a:gd name="connsiteX256" fmla="*/ 412089 w 12202113"/>
-              <a:gd name="connsiteY256" fmla="*/ 3121334 h 3188466"/>
-              <a:gd name="connsiteX257" fmla="*/ 83929 w 12202113"/>
-              <a:gd name="connsiteY257" fmla="*/ 3150566 h 3188466"/>
+              <a:gd name="connsiteX0" fmla="*/ 0 w 6096000"/>
+              <a:gd name="connsiteY0" fmla="*/ 0 h 6858000"/>
+              <a:gd name="connsiteX1" fmla="*/ 5567517 w 6096000"/>
+              <a:gd name="connsiteY1" fmla="*/ 0 h 6858000"/>
+              <a:gd name="connsiteX2" fmla="*/ 5566938 w 6096000"/>
+              <a:gd name="connsiteY2" fmla="*/ 1705 h 6858000"/>
+              <a:gd name="connsiteX3" fmla="*/ 5551594 w 6096000"/>
+              <a:gd name="connsiteY3" fmla="*/ 17287 h 6858000"/>
+              <a:gd name="connsiteX4" fmla="*/ 5545641 w 6096000"/>
+              <a:gd name="connsiteY4" fmla="*/ 130336 h 6858000"/>
+              <a:gd name="connsiteX5" fmla="*/ 5538289 w 6096000"/>
+              <a:gd name="connsiteY5" fmla="*/ 187093 h 6858000"/>
+              <a:gd name="connsiteX6" fmla="*/ 5545790 w 6096000"/>
+              <a:gd name="connsiteY6" fmla="*/ 265704 h 6858000"/>
+              <a:gd name="connsiteX7" fmla="*/ 5542313 w 6096000"/>
+              <a:gd name="connsiteY7" fmla="*/ 354566 h 6858000"/>
+              <a:gd name="connsiteX8" fmla="*/ 5524126 w 6096000"/>
+              <a:gd name="connsiteY8" fmla="*/ 472000 h 6858000"/>
+              <a:gd name="connsiteX9" fmla="*/ 5522170 w 6096000"/>
+              <a:gd name="connsiteY9" fmla="*/ 473782 h 6858000"/>
+              <a:gd name="connsiteX10" fmla="*/ 5521798 w 6096000"/>
+              <a:gd name="connsiteY10" fmla="*/ 491380 h 6858000"/>
+              <a:gd name="connsiteX11" fmla="*/ 5536419 w 6096000"/>
+              <a:gd name="connsiteY11" fmla="*/ 531675 h 6858000"/>
+              <a:gd name="connsiteX12" fmla="*/ 5533435 w 6096000"/>
+              <a:gd name="connsiteY12" fmla="*/ 536015 h 6858000"/>
+              <a:gd name="connsiteX13" fmla="*/ 5538088 w 6096000"/>
+              <a:gd name="connsiteY13" fmla="*/ 572092 h 6858000"/>
+              <a:gd name="connsiteX14" fmla="*/ 5536061 w 6096000"/>
+              <a:gd name="connsiteY14" fmla="*/ 572511 h 6858000"/>
+              <a:gd name="connsiteX15" fmla="*/ 5528218 w 6096000"/>
+              <a:gd name="connsiteY15" fmla="*/ 582332 h 6858000"/>
+              <a:gd name="connsiteX16" fmla="*/ 5518011 w 6096000"/>
+              <a:gd name="connsiteY16" fmla="*/ 601285 h 6858000"/>
+              <a:gd name="connsiteX17" fmla="*/ 5473174 w 6096000"/>
+              <a:gd name="connsiteY17" fmla="*/ 681608 h 6858000"/>
+              <a:gd name="connsiteX18" fmla="*/ 5472963 w 6096000"/>
+              <a:gd name="connsiteY18" fmla="*/ 689151 h 6858000"/>
+              <a:gd name="connsiteX19" fmla="*/ 5472485 w 6096000"/>
+              <a:gd name="connsiteY19" fmla="*/ 689289 h 6858000"/>
+              <a:gd name="connsiteX20" fmla="*/ 5471326 w 6096000"/>
+              <a:gd name="connsiteY20" fmla="*/ 697222 h 6858000"/>
+              <a:gd name="connsiteX21" fmla="*/ 5472164 w 6096000"/>
+              <a:gd name="connsiteY21" fmla="*/ 717531 h 6858000"/>
+              <a:gd name="connsiteX22" fmla="*/ 5468891 w 6096000"/>
+              <a:gd name="connsiteY22" fmla="*/ 722494 h 6858000"/>
+              <a:gd name="connsiteX23" fmla="*/ 5463081 w 6096000"/>
+              <a:gd name="connsiteY23" fmla="*/ 724368 h 6858000"/>
+              <a:gd name="connsiteX24" fmla="*/ 5446981 w 6096000"/>
+              <a:gd name="connsiteY24" fmla="*/ 752692 h 6858000"/>
+              <a:gd name="connsiteX25" fmla="*/ 5417190 w 6096000"/>
+              <a:gd name="connsiteY25" fmla="*/ 816346 h 6858000"/>
+              <a:gd name="connsiteX26" fmla="*/ 5388958 w 6096000"/>
+              <a:gd name="connsiteY26" fmla="*/ 889417 h 6858000"/>
+              <a:gd name="connsiteX27" fmla="*/ 5307044 w 6096000"/>
+              <a:gd name="connsiteY27" fmla="*/ 1063288 h 6858000"/>
+              <a:gd name="connsiteX28" fmla="*/ 5303837 w 6096000"/>
+              <a:gd name="connsiteY28" fmla="*/ 1157176 h 6858000"/>
+              <a:gd name="connsiteX29" fmla="*/ 5286494 w 6096000"/>
+              <a:gd name="connsiteY29" fmla="*/ 1210776 h 6858000"/>
+              <a:gd name="connsiteX30" fmla="*/ 5282463 w 6096000"/>
+              <a:gd name="connsiteY30" fmla="*/ 1301993 h 6858000"/>
+              <a:gd name="connsiteX31" fmla="*/ 5252235 w 6096000"/>
+              <a:gd name="connsiteY31" fmla="*/ 1360879 h 6858000"/>
+              <a:gd name="connsiteX32" fmla="*/ 5244497 w 6096000"/>
+              <a:gd name="connsiteY32" fmla="*/ 1404045 h 6858000"/>
+              <a:gd name="connsiteX33" fmla="*/ 5223823 w 6096000"/>
+              <a:gd name="connsiteY33" fmla="*/ 1429568 h 6858000"/>
+              <a:gd name="connsiteX34" fmla="*/ 5224851 w 6096000"/>
+              <a:gd name="connsiteY34" fmla="*/ 1430305 h 6858000"/>
+              <a:gd name="connsiteX35" fmla="*/ 5212394 w 6096000"/>
+              <a:gd name="connsiteY35" fmla="*/ 1463304 h 6858000"/>
+              <a:gd name="connsiteX36" fmla="*/ 5209958 w 6096000"/>
+              <a:gd name="connsiteY36" fmla="*/ 1514846 h 6858000"/>
+              <a:gd name="connsiteX37" fmla="*/ 5206417 w 6096000"/>
+              <a:gd name="connsiteY37" fmla="*/ 1519731 h 6858000"/>
+              <a:gd name="connsiteX38" fmla="*/ 5206640 w 6096000"/>
+              <a:gd name="connsiteY38" fmla="*/ 1519929 h 6858000"/>
+              <a:gd name="connsiteX39" fmla="*/ 5207632 w 6096000"/>
+              <a:gd name="connsiteY39" fmla="*/ 1546022 h 6858000"/>
+              <a:gd name="connsiteX40" fmla="*/ 5212030 w 6096000"/>
+              <a:gd name="connsiteY40" fmla="*/ 1578752 h 6858000"/>
+              <a:gd name="connsiteX41" fmla="*/ 5203533 w 6096000"/>
+              <a:gd name="connsiteY41" fmla="*/ 1647555 h 6858000"/>
+              <a:gd name="connsiteX42" fmla="*/ 5190877 w 6096000"/>
+              <a:gd name="connsiteY42" fmla="*/ 1715685 h 6858000"/>
+              <a:gd name="connsiteX43" fmla="*/ 5184235 w 6096000"/>
+              <a:gd name="connsiteY43" fmla="*/ 1740358 h 6858000"/>
+              <a:gd name="connsiteX44" fmla="*/ 5181475 w 6096000"/>
+              <a:gd name="connsiteY44" fmla="*/ 1784314 h 6858000"/>
+              <a:gd name="connsiteX45" fmla="*/ 5185845 w 6096000"/>
+              <a:gd name="connsiteY45" fmla="*/ 1804434 h 6858000"/>
+              <a:gd name="connsiteX46" fmla="*/ 5185068 w 6096000"/>
+              <a:gd name="connsiteY46" fmla="*/ 1805316 h 6858000"/>
+              <a:gd name="connsiteX47" fmla="*/ 5188593 w 6096000"/>
+              <a:gd name="connsiteY47" fmla="*/ 1807109 h 6858000"/>
+              <a:gd name="connsiteX48" fmla="*/ 5185920 w 6096000"/>
+              <a:gd name="connsiteY48" fmla="*/ 1821003 h 6858000"/>
+              <a:gd name="connsiteX49" fmla="*/ 5183543 w 6096000"/>
+              <a:gd name="connsiteY49" fmla="*/ 1824832 h 6858000"/>
+              <a:gd name="connsiteX50" fmla="*/ 5182235 w 6096000"/>
+              <a:gd name="connsiteY50" fmla="*/ 1830429 h 6858000"/>
+              <a:gd name="connsiteX51" fmla="*/ 5182525 w 6096000"/>
+              <a:gd name="connsiteY51" fmla="*/ 1830569 h 6858000"/>
+              <a:gd name="connsiteX52" fmla="*/ 5180663 w 6096000"/>
+              <a:gd name="connsiteY52" fmla="*/ 1835810 h 6858000"/>
+              <a:gd name="connsiteX53" fmla="*/ 5167452 w 6096000"/>
+              <a:gd name="connsiteY53" fmla="*/ 1861483 h 6858000"/>
+              <a:gd name="connsiteX54" fmla="*/ 5174266 w 6096000"/>
+              <a:gd name="connsiteY54" fmla="*/ 1892417 h 6858000"/>
+              <a:gd name="connsiteX55" fmla="*/ 5189262 w 6096000"/>
+              <a:gd name="connsiteY55" fmla="*/ 1895114 h 6858000"/>
+              <a:gd name="connsiteX56" fmla="*/ 5187100 w 6096000"/>
+              <a:gd name="connsiteY56" fmla="*/ 1899379 h 6858000"/>
+              <a:gd name="connsiteX57" fmla="*/ 5180471 w 6096000"/>
+              <a:gd name="connsiteY57" fmla="*/ 1907867 h 6858000"/>
+              <a:gd name="connsiteX58" fmla="*/ 5181361 w 6096000"/>
+              <a:gd name="connsiteY58" fmla="*/ 1910265 h 6858000"/>
+              <a:gd name="connsiteX59" fmla="*/ 5178268 w 6096000"/>
+              <a:gd name="connsiteY59" fmla="*/ 1935584 h 6858000"/>
+              <a:gd name="connsiteX60" fmla="*/ 5183619 w 6096000"/>
+              <a:gd name="connsiteY60" fmla="*/ 1942021 h 6858000"/>
+              <a:gd name="connsiteX61" fmla="*/ 5184480 w 6096000"/>
+              <a:gd name="connsiteY61" fmla="*/ 1945112 h 6858000"/>
+              <a:gd name="connsiteX62" fmla="*/ 5172776 w 6096000"/>
+              <a:gd name="connsiteY62" fmla="*/ 1961162 h 6858000"/>
+              <a:gd name="connsiteX63" fmla="*/ 5168513 w 6096000"/>
+              <a:gd name="connsiteY63" fmla="*/ 1969445 h 6858000"/>
+              <a:gd name="connsiteX64" fmla="*/ 5126597 w 6096000"/>
+              <a:gd name="connsiteY64" fmla="*/ 2024270 h 6858000"/>
+              <a:gd name="connsiteX65" fmla="*/ 5119528 w 6096000"/>
+              <a:gd name="connsiteY65" fmla="*/ 2107942 h 6858000"/>
+              <a:gd name="connsiteX66" fmla="*/ 5110356 w 6096000"/>
+              <a:gd name="connsiteY66" fmla="*/ 2193455 h 6858000"/>
+              <a:gd name="connsiteX67" fmla="*/ 5104992 w 6096000"/>
+              <a:gd name="connsiteY67" fmla="*/ 2260088 h 6858000"/>
+              <a:gd name="connsiteX68" fmla="*/ 5059439 w 6096000"/>
+              <a:gd name="connsiteY68" fmla="*/ 2335735 h 6858000"/>
+              <a:gd name="connsiteX69" fmla="*/ 5022061 w 6096000"/>
+              <a:gd name="connsiteY69" fmla="*/ 2408995 h 6858000"/>
+              <a:gd name="connsiteX70" fmla="*/ 5022253 w 6096000"/>
+              <a:gd name="connsiteY70" fmla="*/ 2445869 h 6858000"/>
+              <a:gd name="connsiteX71" fmla="*/ 5011426 w 6096000"/>
+              <a:gd name="connsiteY71" fmla="*/ 2496499 h 6858000"/>
+              <a:gd name="connsiteX72" fmla="*/ 4994224 w 6096000"/>
+              <a:gd name="connsiteY72" fmla="*/ 2549900 h 6858000"/>
+              <a:gd name="connsiteX73" fmla="*/ 4995245 w 6096000"/>
+              <a:gd name="connsiteY73" fmla="*/ 2596456 h 6858000"/>
+              <a:gd name="connsiteX74" fmla="*/ 4988570 w 6096000"/>
+              <a:gd name="connsiteY74" fmla="*/ 2606088 h 6858000"/>
+              <a:gd name="connsiteX75" fmla="*/ 4988371 w 6096000"/>
+              <a:gd name="connsiteY75" fmla="*/ 2635351 h 6858000"/>
+              <a:gd name="connsiteX76" fmla="*/ 4983212 w 6096000"/>
+              <a:gd name="connsiteY76" fmla="*/ 2665666 h 6858000"/>
+              <a:gd name="connsiteX77" fmla="*/ 4968234 w 6096000"/>
+              <a:gd name="connsiteY77" fmla="*/ 2715895 h 6858000"/>
+              <a:gd name="connsiteX78" fmla="*/ 4975888 w 6096000"/>
+              <a:gd name="connsiteY78" fmla="*/ 2725052 h 6858000"/>
+              <a:gd name="connsiteX79" fmla="*/ 4980195 w 6096000"/>
+              <a:gd name="connsiteY79" fmla="*/ 2726489 h 6858000"/>
+              <a:gd name="connsiteX80" fmla="*/ 4976218 w 6096000"/>
+              <a:gd name="connsiteY80" fmla="*/ 2740278 h 6858000"/>
+              <a:gd name="connsiteX81" fmla="*/ 4980571 w 6096000"/>
+              <a:gd name="connsiteY81" fmla="*/ 2751112 h 6858000"/>
+              <a:gd name="connsiteX82" fmla="*/ 4973893 w 6096000"/>
+              <a:gd name="connsiteY82" fmla="*/ 2760208 h 6858000"/>
+              <a:gd name="connsiteX83" fmla="*/ 4979005 w 6096000"/>
+              <a:gd name="connsiteY83" fmla="*/ 2790136 h 6858000"/>
+              <a:gd name="connsiteX84" fmla="*/ 4986137 w 6096000"/>
+              <a:gd name="connsiteY84" fmla="*/ 2804183 h 6858000"/>
+              <a:gd name="connsiteX85" fmla="*/ 4986175 w 6096000"/>
+              <a:gd name="connsiteY85" fmla="*/ 2825860 h 6858000"/>
+              <a:gd name="connsiteX86" fmla="*/ 4993936 w 6096000"/>
+              <a:gd name="connsiteY86" fmla="*/ 2911749 h 6858000"/>
+              <a:gd name="connsiteX87" fmla="*/ 4992563 w 6096000"/>
+              <a:gd name="connsiteY87" fmla="*/ 2977278 h 6858000"/>
+              <a:gd name="connsiteX88" fmla="*/ 4980516 w 6096000"/>
+              <a:gd name="connsiteY88" fmla="*/ 2991092 h 6858000"/>
+              <a:gd name="connsiteX89" fmla="*/ 4992801 w 6096000"/>
+              <a:gd name="connsiteY89" fmla="*/ 3020247 h 6858000"/>
+              <a:gd name="connsiteX90" fmla="*/ 5014805 w 6096000"/>
+              <a:gd name="connsiteY90" fmla="*/ 3065434 h 6858000"/>
+              <a:gd name="connsiteX91" fmla="*/ 5002733 w 6096000"/>
+              <a:gd name="connsiteY91" fmla="*/ 3103777 h 6858000"/>
+              <a:gd name="connsiteX92" fmla="*/ 5002941 w 6096000"/>
+              <a:gd name="connsiteY92" fmla="*/ 3151828 h 6858000"/>
+              <a:gd name="connsiteX93" fmla="*/ 5002883 w 6096000"/>
+              <a:gd name="connsiteY93" fmla="*/ 3180546 h 6858000"/>
+              <a:gd name="connsiteX94" fmla="*/ 5016711 w 6096000"/>
+              <a:gd name="connsiteY94" fmla="*/ 3258677 h 6858000"/>
+              <a:gd name="connsiteX95" fmla="*/ 5017918 w 6096000"/>
+              <a:gd name="connsiteY95" fmla="*/ 3262610 h 6858000"/>
+              <a:gd name="connsiteX96" fmla="*/ 5011672 w 6096000"/>
+              <a:gd name="connsiteY96" fmla="*/ 3277179 h 6858000"/>
+              <a:gd name="connsiteX97" fmla="*/ 5009344 w 6096000"/>
+              <a:gd name="connsiteY97" fmla="*/ 3278130 h 6858000"/>
+              <a:gd name="connsiteX98" fmla="*/ 5026770 w 6096000"/>
+              <a:gd name="connsiteY98" fmla="*/ 3325671 h 6858000"/>
+              <a:gd name="connsiteX99" fmla="*/ 5024571 w 6096000"/>
+              <a:gd name="connsiteY99" fmla="*/ 3332072 h 6858000"/>
+              <a:gd name="connsiteX100" fmla="*/ 5041705 w 6096000"/>
+              <a:gd name="connsiteY100" fmla="*/ 3362948 h 6858000"/>
+              <a:gd name="connsiteX101" fmla="*/ 5047477 w 6096000"/>
+              <a:gd name="connsiteY101" fmla="*/ 3378959 h 6858000"/>
+              <a:gd name="connsiteX102" fmla="*/ 5060758 w 6096000"/>
+              <a:gd name="connsiteY102" fmla="*/ 3407057 h 6858000"/>
+              <a:gd name="connsiteX103" fmla="*/ 5058968 w 6096000"/>
+              <a:gd name="connsiteY103" fmla="*/ 3409825 h 6858000"/>
+              <a:gd name="connsiteX104" fmla="*/ 5062667 w 6096000"/>
+              <a:gd name="connsiteY104" fmla="*/ 3415218 h 6858000"/>
+              <a:gd name="connsiteX105" fmla="*/ 5060928 w 6096000"/>
+              <a:gd name="connsiteY105" fmla="*/ 3419880 h 6858000"/>
+              <a:gd name="connsiteX106" fmla="*/ 5062923 w 6096000"/>
+              <a:gd name="connsiteY106" fmla="*/ 3424545 h 6858000"/>
+              <a:gd name="connsiteX107" fmla="*/ 5064623 w 6096000"/>
+              <a:gd name="connsiteY107" fmla="*/ 3476412 h 6858000"/>
+              <a:gd name="connsiteX108" fmla="*/ 5069684 w 6096000"/>
+              <a:gd name="connsiteY108" fmla="*/ 3486850 h 6858000"/>
+              <a:gd name="connsiteX109" fmla="*/ 5063339 w 6096000"/>
+              <a:gd name="connsiteY109" fmla="*/ 3496391 h 6858000"/>
+              <a:gd name="connsiteX110" fmla="*/ 5070139 w 6096000"/>
+              <a:gd name="connsiteY110" fmla="*/ 3531201 h 6858000"/>
+              <a:gd name="connsiteX111" fmla="*/ 5079896 w 6096000"/>
+              <a:gd name="connsiteY111" fmla="*/ 3542019 h 6858000"/>
+              <a:gd name="connsiteX112" fmla="*/ 5087540 w 6096000"/>
+              <a:gd name="connsiteY112" fmla="*/ 3552249 h 6858000"/>
+              <a:gd name="connsiteX113" fmla="*/ 5087902 w 6096000"/>
+              <a:gd name="connsiteY113" fmla="*/ 3553678 h 6858000"/>
+              <a:gd name="connsiteX114" fmla="*/ 5091509 w 6096000"/>
+              <a:gd name="connsiteY114" fmla="*/ 3568021 h 6858000"/>
+              <a:gd name="connsiteX115" fmla="*/ 5091934 w 6096000"/>
+              <a:gd name="connsiteY115" fmla="*/ 3569719 h 6858000"/>
+              <a:gd name="connsiteX116" fmla="*/ 5089362 w 6096000"/>
+              <a:gd name="connsiteY116" fmla="*/ 3586412 h 6858000"/>
+              <a:gd name="connsiteX117" fmla="*/ 5092358 w 6096000"/>
+              <a:gd name="connsiteY117" fmla="*/ 3597336 h 6858000"/>
+              <a:gd name="connsiteX118" fmla="*/ 5084254 w 6096000"/>
+              <a:gd name="connsiteY118" fmla="*/ 3606007 h 6858000"/>
+              <a:gd name="connsiteX119" fmla="*/ 5084281 w 6096000"/>
+              <a:gd name="connsiteY119" fmla="*/ 3641228 h 6858000"/>
+              <a:gd name="connsiteX120" fmla="*/ 5091848 w 6096000"/>
+              <a:gd name="connsiteY120" fmla="*/ 3653088 h 6858000"/>
+              <a:gd name="connsiteX121" fmla="*/ 5097436 w 6096000"/>
+              <a:gd name="connsiteY121" fmla="*/ 3664114 h 6858000"/>
+              <a:gd name="connsiteX122" fmla="*/ 5097518 w 6096000"/>
+              <a:gd name="connsiteY122" fmla="*/ 3665569 h 6858000"/>
+              <a:gd name="connsiteX123" fmla="*/ 5099829 w 6096000"/>
+              <a:gd name="connsiteY123" fmla="*/ 3707357 h 6858000"/>
+              <a:gd name="connsiteX124" fmla="*/ 5114696 w 6096000"/>
+              <a:gd name="connsiteY124" fmla="*/ 3778166 h 6858000"/>
+              <a:gd name="connsiteX125" fmla="*/ 5135379 w 6096000"/>
+              <a:gd name="connsiteY125" fmla="*/ 3878222 h 6858000"/>
+              <a:gd name="connsiteX126" fmla="*/ 5130138 w 6096000"/>
+              <a:gd name="connsiteY126" fmla="*/ 4048117 h 6858000"/>
+              <a:gd name="connsiteX127" fmla="*/ 5090040 w 6096000"/>
+              <a:gd name="connsiteY127" fmla="*/ 4219510 h 6858000"/>
+              <a:gd name="connsiteX128" fmla="*/ 5092812 w 6096000"/>
+              <a:gd name="connsiteY128" fmla="*/ 4411258 h 6858000"/>
+              <a:gd name="connsiteX129" fmla="*/ 5084599 w 6096000"/>
+              <a:gd name="connsiteY129" fmla="*/ 4488531 h 6858000"/>
+              <a:gd name="connsiteX130" fmla="*/ 5084072 w 6096000"/>
+              <a:gd name="connsiteY130" fmla="*/ 4539168 h 6858000"/>
+              <a:gd name="connsiteX131" fmla="*/ 5068936 w 6096000"/>
+              <a:gd name="connsiteY131" fmla="*/ 4625153 h 6858000"/>
+              <a:gd name="connsiteX132" fmla="*/ 5059114 w 6096000"/>
+              <a:gd name="connsiteY132" fmla="*/ 4733115 h 6858000"/>
+              <a:gd name="connsiteX133" fmla="*/ 5037209 w 6096000"/>
+              <a:gd name="connsiteY133" fmla="*/ 4844323 h 6858000"/>
+              <a:gd name="connsiteX134" fmla="*/ 5020638 w 6096000"/>
+              <a:gd name="connsiteY134" fmla="*/ 4877992 h 6858000"/>
+              <a:gd name="connsiteX135" fmla="*/ 5006413 w 6096000"/>
+              <a:gd name="connsiteY135" fmla="*/ 4925805 h 6858000"/>
+              <a:gd name="connsiteX136" fmla="*/ 4971037 w 6096000"/>
+              <a:gd name="connsiteY136" fmla="*/ 5009272 h 6858000"/>
+              <a:gd name="connsiteX137" fmla="*/ 4963105 w 6096000"/>
+              <a:gd name="connsiteY137" fmla="*/ 5111369 h 6858000"/>
+              <a:gd name="connsiteX138" fmla="*/ 4976341 w 6096000"/>
+              <a:gd name="connsiteY138" fmla="*/ 5210876 h 6858000"/>
+              <a:gd name="connsiteX139" fmla="*/ 4980617 w 6096000"/>
+              <a:gd name="connsiteY139" fmla="*/ 5269726 h 6858000"/>
+              <a:gd name="connsiteX140" fmla="*/ 4997733 w 6096000"/>
+              <a:gd name="connsiteY140" fmla="*/ 5464225 h 6858000"/>
+              <a:gd name="connsiteX141" fmla="*/ 5001400 w 6096000"/>
+              <a:gd name="connsiteY141" fmla="*/ 5594585 h 6858000"/>
+              <a:gd name="connsiteX142" fmla="*/ 4983700 w 6096000"/>
+              <a:gd name="connsiteY142" fmla="*/ 5667896 h 6858000"/>
+              <a:gd name="connsiteX143" fmla="*/ 4968506 w 6096000"/>
+              <a:gd name="connsiteY143" fmla="*/ 5769225 h 6858000"/>
+              <a:gd name="connsiteX144" fmla="*/ 4969765 w 6096000"/>
+              <a:gd name="connsiteY144" fmla="*/ 5823324 h 6858000"/>
+              <a:gd name="connsiteX145" fmla="*/ 4966129 w 6096000"/>
+              <a:gd name="connsiteY145" fmla="*/ 5862699 h 6858000"/>
+              <a:gd name="connsiteX146" fmla="*/ 4970695 w 6096000"/>
+              <a:gd name="connsiteY146" fmla="*/ 5906467 h 6858000"/>
+              <a:gd name="connsiteX147" fmla="*/ 4991568 w 6096000"/>
+              <a:gd name="connsiteY147" fmla="*/ 5939847 h 6858000"/>
+              <a:gd name="connsiteX148" fmla="*/ 4986815 w 6096000"/>
+              <a:gd name="connsiteY148" fmla="*/ 5973994 h 6858000"/>
+              <a:gd name="connsiteX149" fmla="*/ 4987776 w 6096000"/>
+              <a:gd name="connsiteY149" fmla="*/ 6089693 h 6858000"/>
+              <a:gd name="connsiteX150" fmla="*/ 4991621 w 6096000"/>
+              <a:gd name="connsiteY150" fmla="*/ 6224938 h 6858000"/>
+              <a:gd name="connsiteX151" fmla="*/ 5017157 w 6096000"/>
+              <a:gd name="connsiteY151" fmla="*/ 6370251 h 6858000"/>
+              <a:gd name="connsiteX152" fmla="*/ 5040797 w 6096000"/>
+              <a:gd name="connsiteY152" fmla="*/ 6541313 h 6858000"/>
+              <a:gd name="connsiteX153" fmla="*/ 5045375 w 6096000"/>
+              <a:gd name="connsiteY153" fmla="*/ 6640957 h 6858000"/>
+              <a:gd name="connsiteX154" fmla="*/ 5058442 w 6096000"/>
+              <a:gd name="connsiteY154" fmla="*/ 6705297 h 6858000"/>
+              <a:gd name="connsiteX155" fmla="*/ 5071125 w 6096000"/>
+              <a:gd name="connsiteY155" fmla="*/ 6759582 h 6858000"/>
+              <a:gd name="connsiteX156" fmla="*/ 5069172 w 6096000"/>
+              <a:gd name="connsiteY156" fmla="*/ 6817746 h 6858000"/>
+              <a:gd name="connsiteX157" fmla="*/ 5072322 w 6096000"/>
+              <a:gd name="connsiteY157" fmla="*/ 6843646 h 6858000"/>
+              <a:gd name="connsiteX158" fmla="*/ 5091388 w 6096000"/>
+              <a:gd name="connsiteY158" fmla="*/ 6857998 h 6858000"/>
+              <a:gd name="connsiteX159" fmla="*/ 6096000 w 6096000"/>
+              <a:gd name="connsiteY159" fmla="*/ 6857998 h 6858000"/>
+              <a:gd name="connsiteX160" fmla="*/ 6096000 w 6096000"/>
+              <a:gd name="connsiteY160" fmla="*/ 6858000 h 6858000"/>
+              <a:gd name="connsiteX161" fmla="*/ 0 w 6096000"/>
+              <a:gd name="connsiteY161" fmla="*/ 6858000 h 6858000"/>
             </a:gdLst>
             <a:ahLst/>
             <a:cxnLst>
@@ -12480,1380 +12299,660 @@
               <a:cxn ang="0">
                 <a:pos x="connsiteX161" y="connsiteY161"/>
               </a:cxn>
-              <a:cxn ang="0">
-                <a:pos x="connsiteX162" y="connsiteY162"/>
-              </a:cxn>
-              <a:cxn ang="0">
-                <a:pos x="connsiteX163" y="connsiteY163"/>
-              </a:cxn>
-              <a:cxn ang="0">
-                <a:pos x="connsiteX164" y="connsiteY164"/>
-              </a:cxn>
-              <a:cxn ang="0">
-                <a:pos x="connsiteX165" y="connsiteY165"/>
-              </a:cxn>
-              <a:cxn ang="0">
-                <a:pos x="connsiteX166" y="connsiteY166"/>
-              </a:cxn>
-              <a:cxn ang="0">
-                <a:pos x="connsiteX167" y="connsiteY167"/>
-              </a:cxn>
-              <a:cxn ang="0">
-                <a:pos x="connsiteX168" y="connsiteY168"/>
-              </a:cxn>
-              <a:cxn ang="0">
-                <a:pos x="connsiteX169" y="connsiteY169"/>
-              </a:cxn>
-              <a:cxn ang="0">
-                <a:pos x="connsiteX170" y="connsiteY170"/>
-              </a:cxn>
-              <a:cxn ang="0">
-                <a:pos x="connsiteX171" y="connsiteY171"/>
-              </a:cxn>
-              <a:cxn ang="0">
-                <a:pos x="connsiteX172" y="connsiteY172"/>
-              </a:cxn>
-              <a:cxn ang="0">
-                <a:pos x="connsiteX173" y="connsiteY173"/>
-              </a:cxn>
-              <a:cxn ang="0">
-                <a:pos x="connsiteX174" y="connsiteY174"/>
-              </a:cxn>
-              <a:cxn ang="0">
-                <a:pos x="connsiteX175" y="connsiteY175"/>
-              </a:cxn>
-              <a:cxn ang="0">
-                <a:pos x="connsiteX176" y="connsiteY176"/>
-              </a:cxn>
-              <a:cxn ang="0">
-                <a:pos x="connsiteX177" y="connsiteY177"/>
-              </a:cxn>
-              <a:cxn ang="0">
-                <a:pos x="connsiteX178" y="connsiteY178"/>
-              </a:cxn>
-              <a:cxn ang="0">
-                <a:pos x="connsiteX179" y="connsiteY179"/>
-              </a:cxn>
-              <a:cxn ang="0">
-                <a:pos x="connsiteX180" y="connsiteY180"/>
-              </a:cxn>
-              <a:cxn ang="0">
-                <a:pos x="connsiteX181" y="connsiteY181"/>
-              </a:cxn>
-              <a:cxn ang="0">
-                <a:pos x="connsiteX182" y="connsiteY182"/>
-              </a:cxn>
-              <a:cxn ang="0">
-                <a:pos x="connsiteX183" y="connsiteY183"/>
-              </a:cxn>
-              <a:cxn ang="0">
-                <a:pos x="connsiteX184" y="connsiteY184"/>
-              </a:cxn>
-              <a:cxn ang="0">
-                <a:pos x="connsiteX185" y="connsiteY185"/>
-              </a:cxn>
-              <a:cxn ang="0">
-                <a:pos x="connsiteX186" y="connsiteY186"/>
-              </a:cxn>
-              <a:cxn ang="0">
-                <a:pos x="connsiteX187" y="connsiteY187"/>
-              </a:cxn>
-              <a:cxn ang="0">
-                <a:pos x="connsiteX188" y="connsiteY188"/>
-              </a:cxn>
-              <a:cxn ang="0">
-                <a:pos x="connsiteX189" y="connsiteY189"/>
-              </a:cxn>
-              <a:cxn ang="0">
-                <a:pos x="connsiteX190" y="connsiteY190"/>
-              </a:cxn>
-              <a:cxn ang="0">
-                <a:pos x="connsiteX191" y="connsiteY191"/>
-              </a:cxn>
-              <a:cxn ang="0">
-                <a:pos x="connsiteX192" y="connsiteY192"/>
-              </a:cxn>
-              <a:cxn ang="0">
-                <a:pos x="connsiteX193" y="connsiteY193"/>
-              </a:cxn>
-              <a:cxn ang="0">
-                <a:pos x="connsiteX194" y="connsiteY194"/>
-              </a:cxn>
-              <a:cxn ang="0">
-                <a:pos x="connsiteX195" y="connsiteY195"/>
-              </a:cxn>
-              <a:cxn ang="0">
-                <a:pos x="connsiteX196" y="connsiteY196"/>
-              </a:cxn>
-              <a:cxn ang="0">
-                <a:pos x="connsiteX197" y="connsiteY197"/>
-              </a:cxn>
-              <a:cxn ang="0">
-                <a:pos x="connsiteX198" y="connsiteY198"/>
-              </a:cxn>
-              <a:cxn ang="0">
-                <a:pos x="connsiteX199" y="connsiteY199"/>
-              </a:cxn>
-              <a:cxn ang="0">
-                <a:pos x="connsiteX200" y="connsiteY200"/>
-              </a:cxn>
-              <a:cxn ang="0">
-                <a:pos x="connsiteX201" y="connsiteY201"/>
-              </a:cxn>
-              <a:cxn ang="0">
-                <a:pos x="connsiteX202" y="connsiteY202"/>
-              </a:cxn>
-              <a:cxn ang="0">
-                <a:pos x="connsiteX203" y="connsiteY203"/>
-              </a:cxn>
-              <a:cxn ang="0">
-                <a:pos x="connsiteX204" y="connsiteY204"/>
-              </a:cxn>
-              <a:cxn ang="0">
-                <a:pos x="connsiteX205" y="connsiteY205"/>
-              </a:cxn>
-              <a:cxn ang="0">
-                <a:pos x="connsiteX206" y="connsiteY206"/>
-              </a:cxn>
-              <a:cxn ang="0">
-                <a:pos x="connsiteX207" y="connsiteY207"/>
-              </a:cxn>
-              <a:cxn ang="0">
-                <a:pos x="connsiteX208" y="connsiteY208"/>
-              </a:cxn>
-              <a:cxn ang="0">
-                <a:pos x="connsiteX209" y="connsiteY209"/>
-              </a:cxn>
-              <a:cxn ang="0">
-                <a:pos x="connsiteX210" y="connsiteY210"/>
-              </a:cxn>
-              <a:cxn ang="0">
-                <a:pos x="connsiteX211" y="connsiteY211"/>
-              </a:cxn>
-              <a:cxn ang="0">
-                <a:pos x="connsiteX212" y="connsiteY212"/>
-              </a:cxn>
-              <a:cxn ang="0">
-                <a:pos x="connsiteX213" y="connsiteY213"/>
-              </a:cxn>
-              <a:cxn ang="0">
-                <a:pos x="connsiteX214" y="connsiteY214"/>
-              </a:cxn>
-              <a:cxn ang="0">
-                <a:pos x="connsiteX215" y="connsiteY215"/>
-              </a:cxn>
-              <a:cxn ang="0">
-                <a:pos x="connsiteX216" y="connsiteY216"/>
-              </a:cxn>
-              <a:cxn ang="0">
-                <a:pos x="connsiteX217" y="connsiteY217"/>
-              </a:cxn>
-              <a:cxn ang="0">
-                <a:pos x="connsiteX218" y="connsiteY218"/>
-              </a:cxn>
-              <a:cxn ang="0">
-                <a:pos x="connsiteX219" y="connsiteY219"/>
-              </a:cxn>
-              <a:cxn ang="0">
-                <a:pos x="connsiteX220" y="connsiteY220"/>
-              </a:cxn>
-              <a:cxn ang="0">
-                <a:pos x="connsiteX221" y="connsiteY221"/>
-              </a:cxn>
-              <a:cxn ang="0">
-                <a:pos x="connsiteX222" y="connsiteY222"/>
-              </a:cxn>
-              <a:cxn ang="0">
-                <a:pos x="connsiteX223" y="connsiteY223"/>
-              </a:cxn>
-              <a:cxn ang="0">
-                <a:pos x="connsiteX224" y="connsiteY224"/>
-              </a:cxn>
-              <a:cxn ang="0">
-                <a:pos x="connsiteX225" y="connsiteY225"/>
-              </a:cxn>
-              <a:cxn ang="0">
-                <a:pos x="connsiteX226" y="connsiteY226"/>
-              </a:cxn>
-              <a:cxn ang="0">
-                <a:pos x="connsiteX227" y="connsiteY227"/>
-              </a:cxn>
-              <a:cxn ang="0">
-                <a:pos x="connsiteX228" y="connsiteY228"/>
-              </a:cxn>
-              <a:cxn ang="0">
-                <a:pos x="connsiteX229" y="connsiteY229"/>
-              </a:cxn>
-              <a:cxn ang="0">
-                <a:pos x="connsiteX230" y="connsiteY230"/>
-              </a:cxn>
-              <a:cxn ang="0">
-                <a:pos x="connsiteX231" y="connsiteY231"/>
-              </a:cxn>
-              <a:cxn ang="0">
-                <a:pos x="connsiteX232" y="connsiteY232"/>
-              </a:cxn>
-              <a:cxn ang="0">
-                <a:pos x="connsiteX233" y="connsiteY233"/>
-              </a:cxn>
-              <a:cxn ang="0">
-                <a:pos x="connsiteX234" y="connsiteY234"/>
-              </a:cxn>
-              <a:cxn ang="0">
-                <a:pos x="connsiteX235" y="connsiteY235"/>
-              </a:cxn>
-              <a:cxn ang="0">
-                <a:pos x="connsiteX236" y="connsiteY236"/>
-              </a:cxn>
-              <a:cxn ang="0">
-                <a:pos x="connsiteX237" y="connsiteY237"/>
-              </a:cxn>
-              <a:cxn ang="0">
-                <a:pos x="connsiteX238" y="connsiteY238"/>
-              </a:cxn>
-              <a:cxn ang="0">
-                <a:pos x="connsiteX239" y="connsiteY239"/>
-              </a:cxn>
-              <a:cxn ang="0">
-                <a:pos x="connsiteX240" y="connsiteY240"/>
-              </a:cxn>
-              <a:cxn ang="0">
-                <a:pos x="connsiteX241" y="connsiteY241"/>
-              </a:cxn>
-              <a:cxn ang="0">
-                <a:pos x="connsiteX242" y="connsiteY242"/>
-              </a:cxn>
-              <a:cxn ang="0">
-                <a:pos x="connsiteX243" y="connsiteY243"/>
-              </a:cxn>
-              <a:cxn ang="0">
-                <a:pos x="connsiteX244" y="connsiteY244"/>
-              </a:cxn>
-              <a:cxn ang="0">
-                <a:pos x="connsiteX245" y="connsiteY245"/>
-              </a:cxn>
-              <a:cxn ang="0">
-                <a:pos x="connsiteX246" y="connsiteY246"/>
-              </a:cxn>
-              <a:cxn ang="0">
-                <a:pos x="connsiteX247" y="connsiteY247"/>
-              </a:cxn>
-              <a:cxn ang="0">
-                <a:pos x="connsiteX248" y="connsiteY248"/>
-              </a:cxn>
-              <a:cxn ang="0">
-                <a:pos x="connsiteX249" y="connsiteY249"/>
-              </a:cxn>
-              <a:cxn ang="0">
-                <a:pos x="connsiteX250" y="connsiteY250"/>
-              </a:cxn>
-              <a:cxn ang="0">
-                <a:pos x="connsiteX251" y="connsiteY251"/>
-              </a:cxn>
-              <a:cxn ang="0">
-                <a:pos x="connsiteX252" y="connsiteY252"/>
-              </a:cxn>
-              <a:cxn ang="0">
-                <a:pos x="connsiteX253" y="connsiteY253"/>
-              </a:cxn>
-              <a:cxn ang="0">
-                <a:pos x="connsiteX254" y="connsiteY254"/>
-              </a:cxn>
-              <a:cxn ang="0">
-                <a:pos x="connsiteX255" y="connsiteY255"/>
-              </a:cxn>
-              <a:cxn ang="0">
-                <a:pos x="connsiteX256" y="connsiteY256"/>
-              </a:cxn>
-              <a:cxn ang="0">
-                <a:pos x="connsiteX257" y="connsiteY257"/>
-              </a:cxn>
             </a:cxnLst>
             <a:rect l="l" t="t" r="r" b="b"/>
             <a:pathLst>
-              <a:path w="12202113" h="3188466">
+              <a:path w="6096000" h="6858000">
                 <a:moveTo>
-                  <a:pt x="0" y="3188466"/>
+                  <a:pt x="0" y="0"/>
                 </a:moveTo>
                 <a:lnTo>
-                  <a:pt x="10116" y="2657641"/>
+                  <a:pt x="5567517" y="0"/>
                 </a:lnTo>
                 <a:lnTo>
-                  <a:pt x="10116" y="0"/>
+                  <a:pt x="5566938" y="1705"/>
+                </a:lnTo>
+                <a:cubicBezTo>
+                  <a:pt x="5563126" y="8440"/>
+                  <a:pt x="5558112" y="13784"/>
+                  <a:pt x="5551594" y="17287"/>
+                </a:cubicBezTo>
+                <a:cubicBezTo>
+                  <a:pt x="5562364" y="82036"/>
+                  <a:pt x="5510349" y="69804"/>
+                  <a:pt x="5545641" y="130336"/>
+                </a:cubicBezTo>
+                <a:cubicBezTo>
+                  <a:pt x="5526953" y="117589"/>
+                  <a:pt x="5536978" y="162458"/>
+                  <a:pt x="5538289" y="187093"/>
+                </a:cubicBezTo>
+                <a:cubicBezTo>
+                  <a:pt x="5536205" y="226511"/>
+                  <a:pt x="5545722" y="205530"/>
+                  <a:pt x="5545790" y="265704"/>
+                </a:cubicBezTo>
+                <a:cubicBezTo>
+                  <a:pt x="5542296" y="317533"/>
+                  <a:pt x="5543813" y="325288"/>
+                  <a:pt x="5542313" y="354566"/>
+                </a:cubicBezTo>
+                <a:lnTo>
+                  <a:pt x="5524126" y="472000"/>
                 </a:lnTo>
                 <a:lnTo>
-                  <a:pt x="12202113" y="0"/>
+                  <a:pt x="5522170" y="473782"/>
+                </a:lnTo>
+                <a:cubicBezTo>
+                  <a:pt x="5517847" y="482008"/>
+                  <a:pt x="5518682" y="487340"/>
+                  <a:pt x="5521798" y="491380"/>
+                </a:cubicBezTo>
+                <a:lnTo>
+                  <a:pt x="5536419" y="531675"/>
                 </a:lnTo>
                 <a:lnTo>
-                  <a:pt x="12202113" y="2879832"/>
+                  <a:pt x="5533435" y="536015"/>
                 </a:lnTo>
                 <a:lnTo>
-                  <a:pt x="12198167" y="2880360"/>
-                </a:lnTo>
-                <a:cubicBezTo>
-                  <a:pt x="12163116" y="2884349"/>
-                  <a:pt x="12143771" y="2884544"/>
-                  <a:pt x="12122128" y="2887194"/>
-                </a:cubicBezTo>
-                <a:cubicBezTo>
-                  <a:pt x="12087086" y="2893347"/>
-                  <a:pt x="12050015" y="2907304"/>
-                  <a:pt x="12028868" y="2911786"/>
-                </a:cubicBezTo>
-                <a:lnTo>
-                  <a:pt x="11995238" y="2914090"/>
+                  <a:pt x="5538088" y="572092"/>
                 </a:lnTo>
                 <a:lnTo>
-                  <a:pt x="11996460" y="2918442"/>
+                  <a:pt x="5536061" y="572511"/>
+                </a:lnTo>
+                <a:cubicBezTo>
+                  <a:pt x="5531611" y="574271"/>
+                  <a:pt x="5528529" y="577121"/>
+                  <a:pt x="5528218" y="582332"/>
+                </a:cubicBezTo>
+                <a:cubicBezTo>
+                  <a:pt x="5498002" y="573171"/>
+                  <a:pt x="5516262" y="585107"/>
+                  <a:pt x="5518011" y="601285"/>
+                </a:cubicBezTo>
+                <a:cubicBezTo>
+                  <a:pt x="5508838" y="617831"/>
+                  <a:pt x="5480684" y="666964"/>
+                  <a:pt x="5473174" y="681608"/>
+                </a:cubicBezTo>
+                <a:cubicBezTo>
+                  <a:pt x="5473102" y="684122"/>
+                  <a:pt x="5473033" y="686637"/>
+                  <a:pt x="5472963" y="689151"/>
+                </a:cubicBezTo>
+                <a:lnTo>
+                  <a:pt x="5472485" y="689289"/>
+                </a:lnTo>
+                <a:cubicBezTo>
+                  <a:pt x="5471434" y="690905"/>
+                  <a:pt x="5470986" y="693376"/>
+                  <a:pt x="5471326" y="697222"/>
+                </a:cubicBezTo>
+                <a:cubicBezTo>
+                  <a:pt x="5471606" y="703992"/>
+                  <a:pt x="5471884" y="710761"/>
+                  <a:pt x="5472164" y="717531"/>
+                </a:cubicBezTo>
+                <a:lnTo>
+                  <a:pt x="5468891" y="722494"/>
                 </a:lnTo>
                 <a:lnTo>
-                  <a:pt x="11983968" y="2918762"/>
+                  <a:pt x="5463081" y="724368"/>
                 </a:lnTo>
                 <a:lnTo>
-                  <a:pt x="11956084" y="2918868"/>
+                  <a:pt x="5446981" y="752692"/>
                 </a:lnTo>
                 <a:cubicBezTo>
-                  <a:pt x="11938684" y="2919526"/>
-                  <a:pt x="11890300" y="2918483"/>
-                  <a:pt x="11872586" y="2920076"/>
-                </a:cubicBezTo>
-                <a:cubicBezTo>
-                  <a:pt x="11867476" y="2924717"/>
-                  <a:pt x="11859589" y="2927247"/>
-                  <a:pt x="11849804" y="2928420"/>
+                  <a:pt x="5454691" y="764380"/>
+                  <a:pt x="5422719" y="808083"/>
+                  <a:pt x="5417190" y="816346"/>
                 </a:cubicBezTo>
                 <a:lnTo>
-                  <a:pt x="11828254" y="2928551"/>
+                  <a:pt x="5388958" y="889417"/>
+                </a:lnTo>
+                <a:cubicBezTo>
+                  <a:pt x="5320491" y="969963"/>
+                  <a:pt x="5321907" y="1005331"/>
+                  <a:pt x="5307044" y="1063288"/>
+                </a:cubicBezTo>
+                <a:cubicBezTo>
+                  <a:pt x="5313332" y="1111028"/>
+                  <a:pt x="5317096" y="1110140"/>
+                  <a:pt x="5303837" y="1157176"/>
+                </a:cubicBezTo>
+                <a:cubicBezTo>
+                  <a:pt x="5301103" y="1192124"/>
+                  <a:pt x="5301884" y="1197232"/>
+                  <a:pt x="5286494" y="1210776"/>
+                </a:cubicBezTo>
+                <a:lnTo>
+                  <a:pt x="5282463" y="1301993"/>
                 </a:lnTo>
                 <a:lnTo>
-                  <a:pt x="11703277" y="2939735"/>
+                  <a:pt x="5252235" y="1360879"/>
                 </a:lnTo>
                 <a:lnTo>
-                  <a:pt x="11686094" y="2940570"/>
+                  <a:pt x="5244497" y="1404045"/>
                 </a:lnTo>
                 <a:lnTo>
-                  <a:pt x="11676788" y="2944321"/>
-                </a:lnTo>
-                <a:cubicBezTo>
-                  <a:pt x="11669684" y="2945069"/>
-                  <a:pt x="11649276" y="2944585"/>
-                  <a:pt x="11643464" y="2945066"/>
-                </a:cubicBezTo>
-                <a:lnTo>
-                  <a:pt x="11641922" y="2947200"/>
-                </a:lnTo>
-                <a:cubicBezTo>
-                  <a:pt x="11623408" y="2950611"/>
-                  <a:pt x="11553770" y="2961969"/>
-                  <a:pt x="11532386" y="2965529"/>
-                </a:cubicBezTo>
-                <a:cubicBezTo>
-                  <a:pt x="11528114" y="2962248"/>
-                  <a:pt x="11518548" y="2967430"/>
-                  <a:pt x="11513619" y="2968556"/>
-                </a:cubicBezTo>
-                <a:cubicBezTo>
-                  <a:pt x="11512856" y="2966346"/>
-                  <a:pt x="11500924" y="2965672"/>
-                  <a:pt x="11497404" y="2967639"/>
-                </a:cubicBezTo>
-                <a:cubicBezTo>
-                  <a:pt x="11413522" y="2978420"/>
-                  <a:pt x="11455510" y="2956141"/>
-                  <a:pt x="11407630" y="2970255"/>
-                </a:cubicBezTo>
-                <a:cubicBezTo>
-                  <a:pt x="11399160" y="2971190"/>
-                  <a:pt x="11392296" y="2970299"/>
-                  <a:pt x="11386276" y="2968648"/>
-                </a:cubicBezTo>
-                <a:lnTo>
-                  <a:pt x="11377296" y="2965257"/>
+                  <a:pt x="5223823" y="1429568"/>
                 </a:lnTo>
                 <a:lnTo>
-                  <a:pt x="11342536" y="2971666"/>
+                  <a:pt x="5224851" y="1430305"/>
                 </a:lnTo>
                 <a:cubicBezTo>
-                  <a:pt x="11325414" y="2973900"/>
-                  <a:pt x="11307393" y="2975381"/>
-                  <a:pt x="11288902" y="2976058"/>
-                </a:cubicBezTo>
-                <a:cubicBezTo>
-                  <a:pt x="11284753" y="2971542"/>
-                  <a:pt x="11270239" y="2977957"/>
-                  <a:pt x="11263411" y="2979228"/>
-                </a:cubicBezTo>
-                <a:cubicBezTo>
-                  <a:pt x="11263340" y="2976278"/>
-                  <a:pt x="11248212" y="2974865"/>
-                  <a:pt x="11242843" y="2977303"/>
-                </a:cubicBezTo>
-                <a:cubicBezTo>
-                  <a:pt x="11130019" y="2987845"/>
-                  <a:pt x="11193504" y="2960297"/>
-                  <a:pt x="11125798" y="2976816"/>
-                </a:cubicBezTo>
-                <a:cubicBezTo>
-                  <a:pt x="11114472" y="2977677"/>
-                  <a:pt x="11105974" y="2976199"/>
-                  <a:pt x="11098884" y="2973758"/>
+                  <a:pt x="5226697" y="1432466"/>
+                  <a:pt x="5214738" y="1459891"/>
+                  <a:pt x="5212394" y="1463304"/>
+                </a:cubicBezTo>
+                <a:cubicBezTo>
+                  <a:pt x="5209912" y="1477394"/>
+                  <a:pt x="5213027" y="1501295"/>
+                  <a:pt x="5209958" y="1514846"/>
                 </a:cubicBezTo>
                 <a:lnTo>
-                  <a:pt x="11086128" y="2967663"/>
+                  <a:pt x="5206417" y="1519731"/>
                 </a:lnTo>
                 <a:lnTo>
-                  <a:pt x="11076132" y="2969836"/>
+                  <a:pt x="5206640" y="1519929"/>
                 </a:lnTo>
                 <a:cubicBezTo>
-                  <a:pt x="11038408" y="2970007"/>
-                  <a:pt x="11027285" y="2963760"/>
-                  <a:pt x="11005337" y="2970053"/>
-                </a:cubicBezTo>
-                <a:cubicBezTo>
-                  <a:pt x="10972902" y="2956973"/>
-                  <a:pt x="10983824" y="2968749"/>
-                  <a:pt x="10959154" y="2970750"/>
-                </a:cubicBezTo>
-                <a:cubicBezTo>
-                  <a:pt x="10939692" y="2973358"/>
-                  <a:pt x="10975422" y="2978377"/>
-                  <a:pt x="10956347" y="2979118"/>
-                </a:cubicBezTo>
-                <a:cubicBezTo>
-                  <a:pt x="10935712" y="2975741"/>
-                  <a:pt x="10936682" y="2986229"/>
-                  <a:pt x="10915223" y="2982099"/>
-                </a:cubicBezTo>
-                <a:cubicBezTo>
-                  <a:pt x="10920436" y="2974198"/>
-                  <a:pt x="10872877" y="2983630"/>
-                  <a:pt x="10871398" y="2976728"/>
-                </a:cubicBezTo>
-                <a:cubicBezTo>
-                  <a:pt x="10853171" y="2986599"/>
-                  <a:pt x="10844013" y="2974439"/>
-                  <a:pt x="10819743" y="2977481"/>
-                </a:cubicBezTo>
-                <a:cubicBezTo>
-                  <a:pt x="10808314" y="2981215"/>
-                  <a:pt x="10800068" y="2981856"/>
-                  <a:pt x="10788834" y="2977840"/>
-                </a:cubicBezTo>
-                <a:cubicBezTo>
-                  <a:pt x="10736185" y="2996020"/>
-                  <a:pt x="10756982" y="2978653"/>
-                  <a:pt x="10707711" y="2985644"/>
-                </a:cubicBezTo>
-                <a:cubicBezTo>
-                  <a:pt x="10665262" y="2992997"/>
-                  <a:pt x="10617142" y="2997767"/>
-                  <a:pt x="10576086" y="3015319"/>
-                </a:cubicBezTo>
-                <a:cubicBezTo>
-                  <a:pt x="10568550" y="3020292"/>
-                  <a:pt x="10550046" y="3022174"/>
-                  <a:pt x="10534761" y="3019524"/>
-                </a:cubicBezTo>
-                <a:cubicBezTo>
-                  <a:pt x="10532134" y="3019067"/>
-                  <a:pt x="10529698" y="3018490"/>
-                  <a:pt x="10527537" y="3017814"/>
-                </a:cubicBezTo>
-                <a:cubicBezTo>
-                  <a:pt x="10492044" y="3020498"/>
-                  <a:pt x="10362224" y="3032491"/>
-                  <a:pt x="10321799" y="3035635"/>
-                </a:cubicBezTo>
-                <a:cubicBezTo>
-                  <a:pt x="10318526" y="3029246"/>
-                  <a:pt x="10298084" y="3040774"/>
-                  <a:pt x="10284989" y="3036679"/>
-                </a:cubicBezTo>
-                <a:cubicBezTo>
-                  <a:pt x="10275610" y="3033085"/>
-                  <a:pt x="10267220" y="3035744"/>
-                  <a:pt x="10257423" y="3036027"/>
-                </a:cubicBezTo>
-                <a:cubicBezTo>
-                  <a:pt x="10244517" y="3033202"/>
-                  <a:pt x="10202424" y="3038304"/>
-                  <a:pt x="10191450" y="3041963"/>
-                </a:cubicBezTo>
-                <a:cubicBezTo>
-                  <a:pt x="10165225" y="3054679"/>
-                  <a:pt x="10105634" y="3045236"/>
-                  <a:pt x="10083845" y="3054978"/>
-                </a:cubicBezTo>
-                <a:cubicBezTo>
-                  <a:pt x="10075939" y="3056408"/>
-                  <a:pt x="10068203" y="3056986"/>
-                  <a:pt x="10060611" y="3057035"/>
+                  <a:pt x="5206490" y="1521210"/>
+                  <a:pt x="5209710" y="1543635"/>
+                  <a:pt x="5207632" y="1546022"/>
                 </a:cubicBezTo>
                 <a:lnTo>
-                  <a:pt x="10039363" y="3055961"/>
+                  <a:pt x="5212030" y="1578752"/>
+                </a:lnTo>
+                <a:cubicBezTo>
+                  <a:pt x="5206147" y="1605585"/>
+                  <a:pt x="5226381" y="1622803"/>
+                  <a:pt x="5203533" y="1647555"/>
+                </a:cubicBezTo>
+                <a:cubicBezTo>
+                  <a:pt x="5198128" y="1672675"/>
+                  <a:pt x="5203213" y="1694404"/>
+                  <a:pt x="5190877" y="1715685"/>
+                </a:cubicBezTo>
+                <a:cubicBezTo>
+                  <a:pt x="5196815" y="1724301"/>
+                  <a:pt x="5198098" y="1732435"/>
+                  <a:pt x="5184235" y="1740358"/>
+                </a:cubicBezTo>
+                <a:cubicBezTo>
+                  <a:pt x="5182625" y="1763793"/>
+                  <a:pt x="5198368" y="1769422"/>
+                  <a:pt x="5181475" y="1784314"/>
+                </a:cubicBezTo>
+                <a:cubicBezTo>
+                  <a:pt x="5205987" y="1797417"/>
+                  <a:pt x="5195246" y="1798221"/>
+                  <a:pt x="5185845" y="1804434"/>
+                </a:cubicBezTo>
+                <a:lnTo>
+                  <a:pt x="5185068" y="1805316"/>
                 </a:lnTo>
                 <a:lnTo>
-                  <a:pt x="10033322" y="3053238"/>
+                  <a:pt x="5188593" y="1807109"/>
                 </a:lnTo>
                 <a:lnTo>
-                  <a:pt x="10020337" y="3053912"/>
+                  <a:pt x="5185920" y="1821003"/>
                 </a:lnTo>
                 <a:lnTo>
-                  <a:pt x="10016616" y="3053498"/>
+                  <a:pt x="5183543" y="1824832"/>
                 </a:lnTo>
                 <a:cubicBezTo>
-                  <a:pt x="10009508" y="3052695"/>
-                  <a:pt x="10002492" y="3051995"/>
-                  <a:pt x="9995549" y="3051719"/>
-                </a:cubicBezTo>
-                <a:cubicBezTo>
-                  <a:pt x="10004680" y="3065377"/>
-                  <a:pt x="9937988" y="3051618"/>
-                  <a:pt x="9957212" y="3062663"/>
-                </a:cubicBezTo>
-                <a:cubicBezTo>
-                  <a:pt x="9920646" y="3063519"/>
-                  <a:pt x="9948538" y="3073806"/>
-                  <a:pt x="9904584" y="3063999"/>
-                </a:cubicBezTo>
-                <a:cubicBezTo>
-                  <a:pt x="9847813" y="3075166"/>
-                  <a:pt x="9758323" y="3071010"/>
-                  <a:pt x="9713857" y="3087955"/>
-                </a:cubicBezTo>
-                <a:cubicBezTo>
-                  <a:pt x="9719380" y="3081485"/>
-                  <a:pt x="9695453" y="3076466"/>
-                  <a:pt x="9678879" y="3079676"/>
-                </a:cubicBezTo>
-                <a:cubicBezTo>
-                  <a:pt x="9698255" y="3054291"/>
-                  <a:pt x="9613348" y="3102551"/>
-                  <a:pt x="9598760" y="3085228"/>
-                </a:cubicBezTo>
-                <a:cubicBezTo>
-                  <a:pt x="9598041" y="3101310"/>
-                  <a:pt x="9523758" y="3128579"/>
-                  <a:pt x="9488796" y="3115384"/>
-                </a:cubicBezTo>
-                <a:cubicBezTo>
-                  <a:pt x="9435532" y="3118605"/>
-                  <a:pt x="9397815" y="3131898"/>
-                  <a:pt x="9341972" y="3126583"/>
-                </a:cubicBezTo>
-                <a:cubicBezTo>
-                  <a:pt x="9340239" y="3128735"/>
-                  <a:pt x="9337399" y="3130536"/>
-                  <a:pt x="9333795" y="3132083"/>
+                  <a:pt x="5182284" y="1827468"/>
+                  <a:pt x="5181937" y="1829219"/>
+                  <a:pt x="5182235" y="1830429"/>
                 </a:cubicBezTo>
                 <a:lnTo>
-                  <a:pt x="9321736" y="3135834"/>
+                  <a:pt x="5182525" y="1830569"/>
                 </a:lnTo>
                 <a:lnTo>
-                  <a:pt x="9319405" y="3135561"/>
+                  <a:pt x="5180663" y="1835810"/>
                 </a:lnTo>
                 <a:cubicBezTo>
-                  <a:pt x="9310247" y="3135512"/>
-                  <a:pt x="9305558" y="3136419"/>
-                  <a:pt x="9302847" y="3137746"/>
+                  <a:pt x="5176779" y="1844665"/>
+                  <a:pt x="5172297" y="1853278"/>
+                  <a:pt x="5167452" y="1861483"/>
+                </a:cubicBezTo>
+                <a:cubicBezTo>
+                  <a:pt x="5179827" y="1866643"/>
+                  <a:pt x="5166788" y="1884999"/>
+                  <a:pt x="5174266" y="1892417"/>
                 </a:cubicBezTo>
                 <a:lnTo>
-                  <a:pt x="9300930" y="3139687"/>
+                  <a:pt x="5189262" y="1895114"/>
                 </a:lnTo>
                 <a:lnTo>
-                  <a:pt x="9290106" y="3141645"/>
+                  <a:pt x="5187100" y="1899379"/>
                 </a:lnTo>
                 <a:lnTo>
-                  <a:pt x="9270220" y="3146737"/>
+                  <a:pt x="5180471" y="1907867"/>
+                </a:lnTo>
+                <a:cubicBezTo>
+                  <a:pt x="5179609" y="1909162"/>
+                  <a:pt x="5179647" y="1909994"/>
+                  <a:pt x="5181361" y="1910265"/>
+                </a:cubicBezTo>
+                <a:cubicBezTo>
+                  <a:pt x="5180995" y="1914884"/>
+                  <a:pt x="5177893" y="1930292"/>
+                  <a:pt x="5178268" y="1935584"/>
+                </a:cubicBezTo>
+                <a:lnTo>
+                  <a:pt x="5183619" y="1942021"/>
                 </a:lnTo>
                 <a:lnTo>
-                  <a:pt x="9265150" y="3146531"/>
+                  <a:pt x="5184480" y="1945112"/>
                 </a:lnTo>
                 <a:lnTo>
-                  <a:pt x="9233057" y="3152408"/>
+                  <a:pt x="5172776" y="1961162"/>
                 </a:lnTo>
                 <a:lnTo>
-                  <a:pt x="9231974" y="3151938"/>
-                </a:lnTo>
-                <a:cubicBezTo>
-                  <a:pt x="9228816" y="3151020"/>
-                  <a:pt x="9225099" y="3150595"/>
-                  <a:pt x="9220130" y="3151189"/>
-                </a:cubicBezTo>
-                <a:cubicBezTo>
-                  <a:pt x="9218372" y="3142213"/>
-                  <a:pt x="9213458" y="3148467"/>
-                  <a:pt x="9198955" y="3151015"/>
-                </a:cubicBezTo>
-                <a:cubicBezTo>
-                  <a:pt x="9192986" y="3137641"/>
-                  <a:pt x="9157451" y="3149750"/>
-                  <a:pt x="9142196" y="3143802"/>
-                </a:cubicBezTo>
-                <a:cubicBezTo>
-                  <a:pt x="9131673" y="3145976"/>
-                  <a:pt x="9120437" y="3148030"/>
-                  <a:pt x="9108665" y="3149868"/>
-                </a:cubicBezTo>
-                <a:lnTo>
-                  <a:pt x="9014086" y="3150791"/>
+                  <a:pt x="5168513" y="1969445"/>
                 </a:lnTo>
                 <a:lnTo>
-                  <a:pt x="8915037" y="3140020"/>
-                </a:lnTo>
-                <a:cubicBezTo>
-                  <a:pt x="8878400" y="3139785"/>
-                  <a:pt x="8846675" y="3135786"/>
-                  <a:pt x="8815667" y="3138606"/>
-                </a:cubicBezTo>
-                <a:cubicBezTo>
-                  <a:pt x="8803071" y="3135495"/>
-                  <a:pt x="8791199" y="3134238"/>
-                  <a:pt x="8779688" y="3138895"/>
-                </a:cubicBezTo>
-                <a:cubicBezTo>
-                  <a:pt x="8745498" y="3137342"/>
-                  <a:pt x="8737221" y="3130691"/>
-                  <a:pt x="8715556" y="3135878"/>
-                </a:cubicBezTo>
-                <a:cubicBezTo>
-                  <a:pt x="8696347" y="3125121"/>
-                  <a:pt x="8695210" y="3129227"/>
-                  <a:pt x="8686183" y="3132307"/>
-                </a:cubicBezTo>
-                <a:lnTo>
-                  <a:pt x="8684895" y="3132527"/>
+                  <a:pt x="5126597" y="2024270"/>
                 </a:lnTo>
                 <a:lnTo>
-                  <a:pt x="8682270" y="3130989"/>
+                  <a:pt x="5119528" y="2107942"/>
+                </a:lnTo>
+                <a:cubicBezTo>
+                  <a:pt x="5089290" y="2138038"/>
+                  <a:pt x="5110415" y="2159228"/>
+                  <a:pt x="5110356" y="2193455"/>
+                </a:cubicBezTo>
+                <a:cubicBezTo>
+                  <a:pt x="5101302" y="2220953"/>
+                  <a:pt x="5110381" y="2224200"/>
+                  <a:pt x="5104992" y="2260088"/>
+                </a:cubicBezTo>
+                <a:cubicBezTo>
+                  <a:pt x="5096504" y="2291744"/>
+                  <a:pt x="5078225" y="2299003"/>
+                  <a:pt x="5059439" y="2335735"/>
+                </a:cubicBezTo>
+                <a:cubicBezTo>
+                  <a:pt x="5029465" y="2329020"/>
+                  <a:pt x="5058046" y="2407546"/>
+                  <a:pt x="5022061" y="2408995"/>
+                </a:cubicBezTo>
+                <a:cubicBezTo>
+                  <a:pt x="5023289" y="2413465"/>
+                  <a:pt x="5019654" y="2441580"/>
+                  <a:pt x="5022253" y="2445869"/>
+                </a:cubicBezTo>
+                <a:cubicBezTo>
+                  <a:pt x="5022440" y="2449625"/>
+                  <a:pt x="5011241" y="2492743"/>
+                  <a:pt x="5011426" y="2496499"/>
+                </a:cubicBezTo>
+                <a:lnTo>
+                  <a:pt x="4994224" y="2549900"/>
+                </a:lnTo>
+                <a:cubicBezTo>
+                  <a:pt x="4992353" y="2564757"/>
+                  <a:pt x="4998952" y="2582253"/>
+                  <a:pt x="4995245" y="2596456"/>
+                </a:cubicBezTo>
+                <a:lnTo>
+                  <a:pt x="4988570" y="2606088"/>
+                </a:lnTo>
+                <a:cubicBezTo>
+                  <a:pt x="4988504" y="2615842"/>
+                  <a:pt x="4988436" y="2625597"/>
+                  <a:pt x="4988371" y="2635351"/>
+                </a:cubicBezTo>
+                <a:lnTo>
+                  <a:pt x="4983212" y="2665666"/>
                 </a:lnTo>
                 <a:lnTo>
-                  <a:pt x="8676836" y="3130278"/>
+                  <a:pt x="4968234" y="2715895"/>
                 </a:lnTo>
                 <a:lnTo>
-                  <a:pt x="8662002" y="3130735"/>
+                  <a:pt x="4975888" y="2725052"/>
                 </a:lnTo>
                 <a:lnTo>
-                  <a:pt x="8656423" y="3131304"/>
-                </a:lnTo>
-                <a:cubicBezTo>
-                  <a:pt x="8652581" y="3131550"/>
-                  <a:pt x="8650028" y="3131521"/>
-                  <a:pt x="8648261" y="3131294"/>
-                </a:cubicBezTo>
-                <a:lnTo>
-                  <a:pt x="8648057" y="3131167"/>
+                  <a:pt x="4980195" y="2726489"/>
                 </a:lnTo>
                 <a:lnTo>
-                  <a:pt x="8640412" y="3131403"/>
-                </a:lnTo>
-                <a:cubicBezTo>
-                  <a:pt x="8627510" y="3132092"/>
-                  <a:pt x="8614954" y="3133035"/>
-                  <a:pt x="8603003" y="3134155"/>
-                </a:cubicBezTo>
-                <a:cubicBezTo>
-                  <a:pt x="8592897" y="3127095"/>
-                  <a:pt x="8548738" y="3135435"/>
-                  <a:pt x="8553571" y="3122125"/>
-                </a:cubicBezTo>
-                <a:cubicBezTo>
-                  <a:pt x="8537450" y="3123243"/>
-                  <a:pt x="8527699" y="3128769"/>
-                  <a:pt x="8533128" y="3120039"/>
-                </a:cubicBezTo>
-                <a:cubicBezTo>
-                  <a:pt x="8527821" y="3120156"/>
-                  <a:pt x="8524551" y="3119414"/>
-                  <a:pt x="8522209" y="3118252"/>
-                </a:cubicBezTo>
-                <a:lnTo>
-                  <a:pt x="8521532" y="3117705"/>
+                  <a:pt x="4976218" y="2740278"/>
                 </a:lnTo>
                 <a:lnTo>
-                  <a:pt x="8485667" y="3120406"/>
+                  <a:pt x="4980571" y="2751112"/>
                 </a:lnTo>
                 <a:lnTo>
-                  <a:pt x="8480905" y="3119749"/>
+                  <a:pt x="4973893" y="2760208"/>
                 </a:lnTo>
                 <a:lnTo>
-                  <a:pt x="8457530" y="3122810"/>
+                  <a:pt x="4979005" y="2790136"/>
                 </a:lnTo>
                 <a:lnTo>
-                  <a:pt x="8445451" y="3123697"/>
+                  <a:pt x="4986137" y="2804183"/>
+                </a:lnTo>
+                <a:cubicBezTo>
+                  <a:pt x="4986150" y="2811409"/>
+                  <a:pt x="4986162" y="2818634"/>
+                  <a:pt x="4986175" y="2825860"/>
+                </a:cubicBezTo>
+                <a:cubicBezTo>
+                  <a:pt x="4987474" y="2843788"/>
+                  <a:pt x="4992871" y="2886513"/>
+                  <a:pt x="4993936" y="2911749"/>
+                </a:cubicBezTo>
+                <a:cubicBezTo>
+                  <a:pt x="4993313" y="2946689"/>
+                  <a:pt x="4980300" y="2954448"/>
+                  <a:pt x="4992563" y="2977278"/>
+                </a:cubicBezTo>
+                <a:cubicBezTo>
+                  <a:pt x="4985688" y="2983455"/>
+                  <a:pt x="4982051" y="2987749"/>
+                  <a:pt x="4980516" y="2991092"/>
+                </a:cubicBezTo>
+                <a:cubicBezTo>
+                  <a:pt x="4975910" y="3001119"/>
+                  <a:pt x="4990216" y="3002537"/>
+                  <a:pt x="4992801" y="3020247"/>
+                </a:cubicBezTo>
+                <a:cubicBezTo>
+                  <a:pt x="4998517" y="3032637"/>
+                  <a:pt x="5013148" y="3051512"/>
+                  <a:pt x="5014805" y="3065434"/>
+                </a:cubicBezTo>
+                <a:cubicBezTo>
+                  <a:pt x="4998836" y="3057428"/>
+                  <a:pt x="5016840" y="3105196"/>
+                  <a:pt x="5002733" y="3103777"/>
+                </a:cubicBezTo>
+                <a:cubicBezTo>
+                  <a:pt x="5022381" y="3124610"/>
+                  <a:pt x="4997365" y="3128169"/>
+                  <a:pt x="5002941" y="3151828"/>
+                </a:cubicBezTo>
+                <a:cubicBezTo>
+                  <a:pt x="5010264" y="3163902"/>
+                  <a:pt x="5011356" y="3171780"/>
+                  <a:pt x="5002883" y="3180546"/>
+                </a:cubicBezTo>
+                <a:cubicBezTo>
+                  <a:pt x="5038586" y="3236545"/>
+                  <a:pt x="5003723" y="3210316"/>
+                  <a:pt x="5016711" y="3258677"/>
+                </a:cubicBezTo>
+                <a:lnTo>
+                  <a:pt x="5017918" y="3262610"/>
                 </a:lnTo>
                 <a:lnTo>
-                  <a:pt x="8442039" y="3125378"/>
-                </a:lnTo>
-                <a:cubicBezTo>
-                  <a:pt x="8438355" y="3126399"/>
-                  <a:pt x="8433075" y="3126839"/>
-                  <a:pt x="8424215" y="3125963"/>
-                </a:cubicBezTo>
-                <a:lnTo>
-                  <a:pt x="8422165" y="3125491"/>
+                  <a:pt x="5011672" y="3277179"/>
                 </a:lnTo>
                 <a:lnTo>
-                  <a:pt x="8407465" y="3127979"/>
-                </a:lnTo>
-                <a:cubicBezTo>
-                  <a:pt x="8402731" y="3129129"/>
-                  <a:pt x="8398540" y="3130592"/>
-                  <a:pt x="8395146" y="3132488"/>
-                </a:cubicBezTo>
-                <a:cubicBezTo>
-                  <a:pt x="8345093" y="3122354"/>
-                  <a:pt x="8297866" y="3131626"/>
-                  <a:pt x="8243538" y="3129873"/>
-                </a:cubicBezTo>
-                <a:cubicBezTo>
-                  <a:pt x="8220052" y="3114107"/>
-                  <a:pt x="8126172" y="3133411"/>
-                  <a:pt x="8112685" y="3148698"/>
-                </a:cubicBezTo>
-                <a:cubicBezTo>
-                  <a:pt x="8112380" y="3135302"/>
-                  <a:pt x="8044302" y="3153542"/>
-                  <a:pt x="8026741" y="3154015"/>
-                </a:cubicBezTo>
-                <a:cubicBezTo>
-                  <a:pt x="8020887" y="3154173"/>
-                  <a:pt x="8020646" y="3152357"/>
-                  <a:pt x="8030400" y="3146736"/>
-                </a:cubicBezTo>
-                <a:cubicBezTo>
-                  <a:pt x="8011739" y="3148301"/>
-                  <a:pt x="7992477" y="3141339"/>
-                  <a:pt x="8002987" y="3135663"/>
-                </a:cubicBezTo>
-                <a:cubicBezTo>
-                  <a:pt x="7946297" y="3147811"/>
-                  <a:pt x="7862627" y="3135732"/>
-                  <a:pt x="7798568" y="3141249"/>
-                </a:cubicBezTo>
-                <a:cubicBezTo>
-                  <a:pt x="7763645" y="3127901"/>
-                  <a:pt x="7782577" y="3140251"/>
-                  <a:pt x="7746353" y="3137755"/>
-                </a:cubicBezTo>
-                <a:cubicBezTo>
-                  <a:pt x="7756261" y="3150042"/>
-                  <a:pt x="7702377" y="3130861"/>
-                  <a:pt x="7700395" y="3144729"/>
-                </a:cubicBezTo>
-                <a:cubicBezTo>
-                  <a:pt x="7693866" y="3143835"/>
-                  <a:pt x="7687603" y="3142532"/>
-                  <a:pt x="7681335" y="3141120"/>
-                </a:cubicBezTo>
-                <a:lnTo>
-                  <a:pt x="7678044" y="3140387"/>
+                  <a:pt x="5009344" y="3278130"/>
                 </a:lnTo>
                 <a:lnTo>
-                  <a:pt x="7664890" y="3139855"/>
+                  <a:pt x="5026770" y="3325671"/>
                 </a:lnTo>
                 <a:lnTo>
-                  <a:pt x="7661183" y="3136706"/>
+                  <a:pt x="5024571" y="3332072"/>
                 </a:lnTo>
                 <a:lnTo>
-                  <a:pt x="7641383" y="3133755"/>
-                </a:lnTo>
-                <a:cubicBezTo>
-                  <a:pt x="7633967" y="3133115"/>
-                  <a:pt x="7625987" y="3132967"/>
-                  <a:pt x="7617169" y="3133614"/>
-                </a:cubicBezTo>
-                <a:cubicBezTo>
-                  <a:pt x="7595475" y="3139109"/>
-                  <a:pt x="7561695" y="3132374"/>
-                  <a:pt x="7531143" y="3132781"/>
-                </a:cubicBezTo>
-                <a:lnTo>
-                  <a:pt x="7517113" y="3134483"/>
+                  <a:pt x="5041705" y="3362948"/>
                 </a:lnTo>
                 <a:lnTo>
-                  <a:pt x="7471320" y="3131645"/>
-                </a:lnTo>
-                <a:cubicBezTo>
-                  <a:pt x="7458285" y="3131095"/>
-                  <a:pt x="7444756" y="3130805"/>
-                  <a:pt x="7430512" y="3131007"/>
-                </a:cubicBezTo>
-                <a:lnTo>
-                  <a:pt x="7404071" y="3132361"/>
+                  <a:pt x="5047477" y="3378959"/>
                 </a:lnTo>
                 <a:lnTo>
-                  <a:pt x="7397140" y="3131239"/>
-                </a:lnTo>
-                <a:cubicBezTo>
-                  <a:pt x="7385068" y="3131364"/>
-                  <a:pt x="7369091" y="3135313"/>
-                  <a:pt x="7370514" y="3130516"/>
-                </a:cubicBezTo>
-                <a:lnTo>
-                  <a:pt x="7356953" y="3132179"/>
+                  <a:pt x="5060758" y="3407057"/>
                 </a:lnTo>
                 <a:lnTo>
-                  <a:pt x="7343567" y="3128350"/>
-                </a:lnTo>
-                <a:cubicBezTo>
-                  <a:pt x="7342101" y="3127461"/>
-                  <a:pt x="7340998" y="3126514"/>
-                  <a:pt x="7340295" y="3125545"/>
-                </a:cubicBezTo>
-                <a:lnTo>
-                  <a:pt x="7321348" y="3126804"/>
+                  <a:pt x="5058968" y="3409825"/>
                 </a:lnTo>
                 <a:lnTo>
-                  <a:pt x="7305815" y="3124063"/>
+                  <a:pt x="5062667" y="3415218"/>
                 </a:lnTo>
                 <a:lnTo>
-                  <a:pt x="7292274" y="3125855"/>
+                  <a:pt x="5060928" y="3419880"/>
                 </a:lnTo>
                 <a:lnTo>
-                  <a:pt x="7286654" y="3125451"/>
+                  <a:pt x="5062923" y="3424545"/>
+                </a:lnTo>
+                <a:cubicBezTo>
+                  <a:pt x="5063537" y="3433967"/>
+                  <a:pt x="5063494" y="3466028"/>
+                  <a:pt x="5064623" y="3476412"/>
+                </a:cubicBezTo>
+                <a:lnTo>
+                  <a:pt x="5069684" y="3486850"/>
                 </a:lnTo>
                 <a:lnTo>
-                  <a:pt x="7272685" y="3124094"/>
-                </a:lnTo>
-                <a:cubicBezTo>
-                  <a:pt x="7265523" y="3123143"/>
-                  <a:pt x="7257508" y="3121997"/>
-                  <a:pt x="7248584" y="3121080"/>
-                </a:cubicBezTo>
-                <a:lnTo>
-                  <a:pt x="7241065" y="3120661"/>
+                  <a:pt x="5063339" y="3496391"/>
                 </a:lnTo>
                 <a:lnTo>
-                  <a:pt x="7224696" y="3116051"/>
-                </a:lnTo>
-                <a:cubicBezTo>
-                  <a:pt x="7212786" y="3112566"/>
-                  <a:pt x="7203412" y="3110217"/>
-                  <a:pt x="7193009" y="3112108"/>
-                </a:cubicBezTo>
-                <a:cubicBezTo>
-                  <a:pt x="7175276" y="3107606"/>
-                  <a:pt x="7162888" y="3094987"/>
-                  <a:pt x="7137220" y="3098354"/>
-                </a:cubicBezTo>
-                <a:cubicBezTo>
-                  <a:pt x="7145010" y="3092637"/>
-                  <a:pt x="7108715" y="3097662"/>
-                  <a:pt x="7104427" y="3091790"/>
-                </a:cubicBezTo>
-                <a:cubicBezTo>
-                  <a:pt x="7102447" y="3087061"/>
-                  <a:pt x="7090976" y="3087484"/>
-                  <a:pt x="7082240" y="3085740"/>
-                </a:cubicBezTo>
-                <a:cubicBezTo>
-                  <a:pt x="7076014" y="3080911"/>
-                  <a:pt x="7032058" y="3076501"/>
-                  <a:pt x="7016754" y="3077196"/>
-                </a:cubicBezTo>
-                <a:cubicBezTo>
-                  <a:pt x="6973620" y="3082001"/>
-                  <a:pt x="6938923" y="3062558"/>
-                  <a:pt x="6904436" y="3065900"/>
-                </a:cubicBezTo>
-                <a:cubicBezTo>
-                  <a:pt x="6895406" y="3065445"/>
-                  <a:pt x="6887919" y="3064350"/>
-                  <a:pt x="6881434" y="3062865"/>
-                </a:cubicBezTo>
-                <a:lnTo>
-                  <a:pt x="6865273" y="3057749"/>
-                </a:lnTo>
-                <a:cubicBezTo>
-                  <a:pt x="6865072" y="3056626"/>
-                  <a:pt x="6864871" y="3055502"/>
-                  <a:pt x="6864671" y="3054378"/>
-                </a:cubicBezTo>
-                <a:lnTo>
-                  <a:pt x="6852599" y="3052306"/>
+                  <a:pt x="5070139" y="3531201"/>
                 </a:lnTo>
                 <a:lnTo>
-                  <a:pt x="6850143" y="3051232"/>
-                </a:lnTo>
-                <a:cubicBezTo>
-                  <a:pt x="6845470" y="3049168"/>
-                  <a:pt x="6840704" y="3047206"/>
-                  <a:pt x="6835301" y="3045593"/>
-                </a:cubicBezTo>
-                <a:cubicBezTo>
-                  <a:pt x="6820447" y="3058242"/>
-                  <a:pt x="6786888" y="3033956"/>
-                  <a:pt x="6784871" y="3046562"/>
-                </a:cubicBezTo>
-                <a:cubicBezTo>
-                  <a:pt x="6752593" y="3039899"/>
-                  <a:pt x="6759140" y="3053646"/>
-                  <a:pt x="6738245" y="3037055"/>
-                </a:cubicBezTo>
-                <a:cubicBezTo>
-                  <a:pt x="6671880" y="3034501"/>
-                  <a:pt x="6603220" y="3013245"/>
-                  <a:pt x="6537703" y="3017736"/>
-                </a:cubicBezTo>
-                <a:cubicBezTo>
-                  <a:pt x="6553051" y="3013722"/>
-                  <a:pt x="6541149" y="3004943"/>
-                  <a:pt x="6521858" y="3004158"/>
-                </a:cubicBezTo>
-                <a:cubicBezTo>
-                  <a:pt x="6580141" y="2987944"/>
-                  <a:pt x="6428765" y="3009117"/>
-                  <a:pt x="6445069" y="2992470"/>
-                </a:cubicBezTo>
-                <a:cubicBezTo>
-                  <a:pt x="6417897" y="3005060"/>
-                  <a:pt x="6310156" y="3011743"/>
-                  <a:pt x="6302447" y="2994274"/>
-                </a:cubicBezTo>
-                <a:cubicBezTo>
-                  <a:pt x="6252173" y="2986131"/>
-                  <a:pt x="6198382" y="2989085"/>
-                  <a:pt x="6160029" y="2973666"/>
-                </a:cubicBezTo>
-                <a:cubicBezTo>
-                  <a:pt x="6155014" y="2975022"/>
-                  <a:pt x="6149642" y="2975878"/>
-                  <a:pt x="6144046" y="2976380"/>
-                </a:cubicBezTo>
-                <a:lnTo>
-                  <a:pt x="6127670" y="2976929"/>
+                  <a:pt x="5079896" y="3542019"/>
                 </a:lnTo>
                 <a:lnTo>
-                  <a:pt x="6126155" y="2976245"/>
-                </a:lnTo>
-                <a:cubicBezTo>
-                  <a:pt x="6118509" y="2974369"/>
-                  <a:pt x="6113052" y="2974144"/>
-                  <a:pt x="6108575" y="2974651"/>
-                </a:cubicBezTo>
-                <a:lnTo>
-                  <a:pt x="6103746" y="2975803"/>
+                  <a:pt x="5087540" y="3552249"/>
                 </a:lnTo>
                 <a:lnTo>
-                  <a:pt x="6091377" y="2975180"/>
+                  <a:pt x="5087902" y="3553678"/>
                 </a:lnTo>
                 <a:lnTo>
-                  <a:pt x="6066183" y="2975222"/>
+                  <a:pt x="5091509" y="3568021"/>
                 </a:lnTo>
                 <a:lnTo>
-                  <a:pt x="6063287" y="2974353"/>
+                  <a:pt x="5091934" y="3569719"/>
                 </a:lnTo>
                 <a:lnTo>
-                  <a:pt x="6054813" y="2974911"/>
+                  <a:pt x="5089362" y="3586412"/>
                 </a:lnTo>
                 <a:lnTo>
-                  <a:pt x="6050809" y="2973985"/>
+                  <a:pt x="5092358" y="3597336"/>
                 </a:lnTo>
                 <a:lnTo>
-                  <a:pt x="6013979" y="2974553"/>
+                  <a:pt x="5084254" y="3606007"/>
                 </a:lnTo>
                 <a:cubicBezTo>
-                  <a:pt x="6013918" y="2974361"/>
-                  <a:pt x="6013860" y="2974167"/>
-                  <a:pt x="6013800" y="2973973"/>
-                </a:cubicBezTo>
-                <a:cubicBezTo>
-                  <a:pt x="6012565" y="2972689"/>
-                  <a:pt x="6010070" y="2971765"/>
-                  <a:pt x="6004866" y="2971570"/>
-                </a:cubicBezTo>
-                <a:cubicBezTo>
-                  <a:pt x="6017706" y="2963268"/>
-                  <a:pt x="6003515" y="2968156"/>
-                  <a:pt x="5987036" y="2968315"/>
-                </a:cubicBezTo>
-                <a:cubicBezTo>
-                  <a:pt x="6003302" y="2955458"/>
-                  <a:pt x="5953573" y="2961108"/>
-                  <a:pt x="5950027" y="2953546"/>
-                </a:cubicBezTo>
-                <a:cubicBezTo>
-                  <a:pt x="5937559" y="2953953"/>
-                  <a:pt x="5924668" y="2954151"/>
-                  <a:pt x="5911668" y="2954074"/>
+                  <a:pt x="5084262" y="3617747"/>
+                  <a:pt x="5084273" y="3629488"/>
+                  <a:pt x="5084281" y="3641228"/>
                 </a:cubicBezTo>
                 <a:lnTo>
-                  <a:pt x="5904110" y="2953861"/>
-                </a:lnTo>
-                <a:cubicBezTo>
-                  <a:pt x="5904082" y="2953815"/>
-                  <a:pt x="5904053" y="2953769"/>
-                  <a:pt x="5904026" y="2953724"/>
-                </a:cubicBezTo>
-                <a:cubicBezTo>
-                  <a:pt x="5902528" y="2953395"/>
-                  <a:pt x="5900097" y="2953219"/>
-                  <a:pt x="5896189" y="2953236"/>
-                </a:cubicBezTo>
-                <a:lnTo>
-                  <a:pt x="5890331" y="2953471"/>
+                  <a:pt x="5091848" y="3653088"/>
                 </a:lnTo>
                 <a:lnTo>
-                  <a:pt x="5875672" y="2953056"/>
+                  <a:pt x="5097436" y="3664114"/>
+                </a:lnTo>
+                <a:cubicBezTo>
+                  <a:pt x="5097463" y="3664599"/>
+                  <a:pt x="5097491" y="3665084"/>
+                  <a:pt x="5097518" y="3665569"/>
+                </a:cubicBezTo>
+                <a:cubicBezTo>
+                  <a:pt x="5097915" y="3672776"/>
+                  <a:pt x="5096966" y="3688591"/>
+                  <a:pt x="5099829" y="3707357"/>
+                </a:cubicBezTo>
+                <a:cubicBezTo>
+                  <a:pt x="5100505" y="3724716"/>
+                  <a:pt x="5118078" y="3760234"/>
+                  <a:pt x="5114696" y="3778166"/>
+                </a:cubicBezTo>
+                <a:cubicBezTo>
+                  <a:pt x="5141627" y="3845122"/>
+                  <a:pt x="5125427" y="3821305"/>
+                  <a:pt x="5135379" y="3878222"/>
+                </a:cubicBezTo>
+                <a:cubicBezTo>
+                  <a:pt x="5161519" y="3905047"/>
+                  <a:pt x="5125417" y="4015047"/>
+                  <a:pt x="5130138" y="4048117"/>
+                </a:cubicBezTo>
+                <a:cubicBezTo>
+                  <a:pt x="5081804" y="4192084"/>
+                  <a:pt x="5096262" y="4158987"/>
+                  <a:pt x="5090040" y="4219510"/>
+                </a:cubicBezTo>
+                <a:cubicBezTo>
+                  <a:pt x="5104553" y="4280033"/>
+                  <a:pt x="5065380" y="4345686"/>
+                  <a:pt x="5092812" y="4411258"/>
+                </a:cubicBezTo>
+                <a:cubicBezTo>
+                  <a:pt x="5090630" y="4437329"/>
+                  <a:pt x="5083878" y="4473140"/>
+                  <a:pt x="5084599" y="4488531"/>
+                </a:cubicBezTo>
+                <a:cubicBezTo>
+                  <a:pt x="5084423" y="4505410"/>
+                  <a:pt x="5084248" y="4522289"/>
+                  <a:pt x="5084072" y="4539168"/>
+                </a:cubicBezTo>
+                <a:cubicBezTo>
+                  <a:pt x="5072114" y="4567830"/>
+                  <a:pt x="5064305" y="4588197"/>
+                  <a:pt x="5068936" y="4625153"/>
+                </a:cubicBezTo>
+                <a:cubicBezTo>
+                  <a:pt x="5077433" y="4662889"/>
+                  <a:pt x="5065899" y="4679357"/>
+                  <a:pt x="5059114" y="4733115"/>
+                </a:cubicBezTo>
+                <a:cubicBezTo>
+                  <a:pt x="5068687" y="4752352"/>
+                  <a:pt x="5055370" y="4832308"/>
+                  <a:pt x="5037209" y="4844323"/>
+                </a:cubicBezTo>
+                <a:cubicBezTo>
+                  <a:pt x="5033444" y="4857054"/>
+                  <a:pt x="5040194" y="4871554"/>
+                  <a:pt x="5020638" y="4877992"/>
+                </a:cubicBezTo>
+                <a:cubicBezTo>
+                  <a:pt x="4997151" y="4888353"/>
+                  <a:pt x="5034418" y="4931200"/>
+                  <a:pt x="5006413" y="4925805"/>
+                </a:cubicBezTo>
+                <a:cubicBezTo>
+                  <a:pt x="5031964" y="4956261"/>
+                  <a:pt x="4982840" y="4982633"/>
+                  <a:pt x="4971037" y="5009272"/>
+                </a:cubicBezTo>
+                <a:cubicBezTo>
+                  <a:pt x="4973259" y="5034036"/>
+                  <a:pt x="4968375" y="5053859"/>
+                  <a:pt x="4963105" y="5111369"/>
+                </a:cubicBezTo>
+                <a:cubicBezTo>
+                  <a:pt x="4973224" y="5141336"/>
+                  <a:pt x="4937413" y="5161742"/>
+                  <a:pt x="4976341" y="5210876"/>
+                </a:cubicBezTo>
+                <a:cubicBezTo>
+                  <a:pt x="4972455" y="5212581"/>
+                  <a:pt x="4977054" y="5227501"/>
+                  <a:pt x="4980617" y="5269726"/>
+                </a:cubicBezTo>
+                <a:cubicBezTo>
+                  <a:pt x="4984182" y="5311951"/>
+                  <a:pt x="4990390" y="5400671"/>
+                  <a:pt x="4997733" y="5464225"/>
+                </a:cubicBezTo>
+                <a:cubicBezTo>
+                  <a:pt x="5001765" y="5536542"/>
+                  <a:pt x="4990225" y="5517959"/>
+                  <a:pt x="5001400" y="5594585"/>
+                </a:cubicBezTo>
+                <a:cubicBezTo>
+                  <a:pt x="4999908" y="5619318"/>
+                  <a:pt x="4974042" y="5647975"/>
+                  <a:pt x="4983700" y="5667896"/>
+                </a:cubicBezTo>
+                <a:cubicBezTo>
+                  <a:pt x="4976834" y="5696311"/>
+                  <a:pt x="4975579" y="5738356"/>
+                  <a:pt x="4968506" y="5769225"/>
+                </a:cubicBezTo>
+                <a:cubicBezTo>
+                  <a:pt x="4968926" y="5787258"/>
+                  <a:pt x="4969344" y="5805291"/>
+                  <a:pt x="4969765" y="5823324"/>
+                </a:cubicBezTo>
+                <a:cubicBezTo>
+                  <a:pt x="4966122" y="5853058"/>
+                  <a:pt x="4965608" y="5838948"/>
+                  <a:pt x="4966129" y="5862699"/>
+                </a:cubicBezTo>
+                <a:lnTo>
+                  <a:pt x="4970695" y="5906467"/>
                 </a:lnTo>
                 <a:lnTo>
-                  <a:pt x="5871070" y="2952035"/>
+                  <a:pt x="4991568" y="5939847"/>
+                </a:lnTo>
+                <a:cubicBezTo>
+                  <a:pt x="4998848" y="5955713"/>
+                  <a:pt x="4974731" y="5940131"/>
+                  <a:pt x="4986815" y="5973994"/>
+                </a:cubicBezTo>
+                <a:cubicBezTo>
+                  <a:pt x="4961187" y="5997051"/>
+                  <a:pt x="4983444" y="6032039"/>
+                  <a:pt x="4987776" y="6089693"/>
+                </a:cubicBezTo>
+                <a:lnTo>
+                  <a:pt x="4991621" y="6224938"/>
+                </a:lnTo>
+                <a:cubicBezTo>
+                  <a:pt x="4988442" y="6270972"/>
+                  <a:pt x="5008962" y="6317522"/>
+                  <a:pt x="5017157" y="6370251"/>
+                </a:cubicBezTo>
+                <a:cubicBezTo>
+                  <a:pt x="5025353" y="6422980"/>
+                  <a:pt x="5039938" y="6490855"/>
+                  <a:pt x="5040797" y="6541313"/>
+                </a:cubicBezTo>
+                <a:cubicBezTo>
+                  <a:pt x="5039898" y="6576319"/>
+                  <a:pt x="5031912" y="6591883"/>
+                  <a:pt x="5045375" y="6640957"/>
+                </a:cubicBezTo>
+                <a:cubicBezTo>
+                  <a:pt x="5057505" y="6669536"/>
+                  <a:pt x="5052276" y="6675394"/>
+                  <a:pt x="5058442" y="6705297"/>
+                </a:cubicBezTo>
+                <a:cubicBezTo>
+                  <a:pt x="5057367" y="6727133"/>
+                  <a:pt x="5067901" y="6732087"/>
+                  <a:pt x="5071125" y="6759582"/>
+                </a:cubicBezTo>
+                <a:cubicBezTo>
+                  <a:pt x="5055614" y="6796071"/>
+                  <a:pt x="5051656" y="6769544"/>
+                  <a:pt x="5069172" y="6817746"/>
+                </a:cubicBezTo>
+                <a:cubicBezTo>
+                  <a:pt x="5060956" y="6828354"/>
+                  <a:pt x="5064525" y="6836369"/>
+                  <a:pt x="5072322" y="6843646"/>
+                </a:cubicBezTo>
+                <a:lnTo>
+                  <a:pt x="5091388" y="6857998"/>
                 </a:lnTo>
                 <a:lnTo>
-                  <a:pt x="5869888" y="2950364"/>
+                  <a:pt x="6096000" y="6857998"/>
                 </a:lnTo>
                 <a:lnTo>
-                  <a:pt x="5868461" y="2950506"/>
-                </a:lnTo>
-                <a:cubicBezTo>
-                  <a:pt x="5857092" y="2953019"/>
-                  <a:pt x="5852416" y="2957005"/>
-                  <a:pt x="5843343" y="2945262"/>
-                </a:cubicBezTo>
-                <a:cubicBezTo>
-                  <a:pt x="5817989" y="2949116"/>
-                  <a:pt x="5815840" y="2942065"/>
-                  <a:pt x="5784331" y="2938531"/>
-                </a:cubicBezTo>
-                <a:cubicBezTo>
-                  <a:pt x="5769202" y="2942455"/>
-                  <a:pt x="5758885" y="2940521"/>
-                  <a:pt x="5749498" y="2936713"/>
-                </a:cubicBezTo>
-                <a:cubicBezTo>
-                  <a:pt x="5717228" y="2937683"/>
-                  <a:pt x="5690227" y="2931877"/>
-                  <a:pt x="5655214" y="2929503"/>
-                </a:cubicBezTo>
-                <a:cubicBezTo>
-                  <a:pt x="5614827" y="2933899"/>
-                  <a:pt x="5598877" y="2923069"/>
-                  <a:pt x="5561446" y="2920575"/>
-                </a:cubicBezTo>
-                <a:cubicBezTo>
-                  <a:pt x="5525084" y="2929276"/>
-                  <a:pt x="5537471" y="2911136"/>
-                  <a:pt x="5519456" y="2906631"/>
-                </a:cubicBezTo>
-                <a:lnTo>
-                  <a:pt x="5514099" y="2906097"/>
+                  <a:pt x="6096000" y="6858000"/>
                 </a:lnTo>
                 <a:lnTo>
-                  <a:pt x="5499273" y="2907057"/>
+                  <a:pt x="0" y="6858000"/>
                 </a:lnTo>
-                <a:lnTo>
-                  <a:pt x="5493664" y="2907817"/>
-                </a:lnTo>
-                <a:cubicBezTo>
-                  <a:pt x="5489815" y="2908191"/>
-                  <a:pt x="5487270" y="2908250"/>
-                  <a:pt x="5485530" y="2908080"/>
-                </a:cubicBezTo>
-                <a:lnTo>
-                  <a:pt x="5485337" y="2907959"/>
-                </a:lnTo>
-                <a:lnTo>
-                  <a:pt x="5477696" y="2908455"/>
-                </a:lnTo>
-                <a:cubicBezTo>
-                  <a:pt x="5464775" y="2909581"/>
-                  <a:pt x="5452182" y="2910951"/>
-                  <a:pt x="5440170" y="2912482"/>
-                </a:cubicBezTo>
-                <a:cubicBezTo>
-                  <a:pt x="5430698" y="2905718"/>
-                  <a:pt x="5385970" y="2915593"/>
-                  <a:pt x="5391911" y="2902040"/>
-                </a:cubicBezTo>
-                <a:cubicBezTo>
-                  <a:pt x="5375744" y="2903707"/>
-                  <a:pt x="5365560" y="2909594"/>
-                  <a:pt x="5371708" y="2900629"/>
-                </a:cubicBezTo>
-                <a:cubicBezTo>
-                  <a:pt x="5366408" y="2900926"/>
-                  <a:pt x="5363213" y="2900288"/>
-                  <a:pt x="5360976" y="2899197"/>
-                </a:cubicBezTo>
-                <a:lnTo>
-                  <a:pt x="5360345" y="2898671"/>
-                </a:lnTo>
-                <a:lnTo>
-                  <a:pt x="5324367" y="2902593"/>
-                </a:lnTo>
-                <a:lnTo>
-                  <a:pt x="5319673" y="2902094"/>
-                </a:lnTo>
-                <a:lnTo>
-                  <a:pt x="5296114" y="2905958"/>
-                </a:lnTo>
-                <a:lnTo>
-                  <a:pt x="5283999" y="2907258"/>
-                </a:lnTo>
-                <a:lnTo>
-                  <a:pt x="5280460" y="2909063"/>
-                </a:lnTo>
-                <a:cubicBezTo>
-                  <a:pt x="5276699" y="2910214"/>
-                  <a:pt x="5271395" y="2910834"/>
-                  <a:pt x="5262637" y="2910250"/>
-                </a:cubicBezTo>
-                <a:lnTo>
-                  <a:pt x="5260635" y="2909845"/>
-                </a:lnTo>
-                <a:lnTo>
-                  <a:pt x="5245770" y="2912842"/>
-                </a:lnTo>
-                <a:cubicBezTo>
-                  <a:pt x="5240955" y="2914159"/>
-                  <a:pt x="5236652" y="2915770"/>
-                  <a:pt x="5233108" y="2917794"/>
-                </a:cubicBezTo>
-                <a:cubicBezTo>
-                  <a:pt x="5184071" y="2909280"/>
-                  <a:pt x="5136210" y="2920197"/>
-                  <a:pt x="5082201" y="2920260"/>
-                </a:cubicBezTo>
-                <a:lnTo>
-                  <a:pt x="4939211" y="2931760"/>
-                </a:lnTo>
-                <a:cubicBezTo>
-                  <a:pt x="4920477" y="2933960"/>
-                  <a:pt x="4783353" y="2943291"/>
-                  <a:pt x="4794309" y="2937227"/>
-                </a:cubicBezTo>
-                <a:cubicBezTo>
-                  <a:pt x="4736776" y="2951353"/>
-                  <a:pt x="4701995" y="2938961"/>
-                  <a:pt x="4637676" y="2946666"/>
-                </a:cubicBezTo>
-                <a:cubicBezTo>
-                  <a:pt x="4603987" y="2934412"/>
-                  <a:pt x="4621816" y="2946201"/>
-                  <a:pt x="4585922" y="2944906"/>
-                </a:cubicBezTo>
-                <a:cubicBezTo>
-                  <a:pt x="4594760" y="2956935"/>
-                  <a:pt x="4542663" y="2939450"/>
-                  <a:pt x="4539516" y="2953466"/>
-                </a:cubicBezTo>
-                <a:cubicBezTo>
-                  <a:pt x="4533082" y="2952789"/>
-                  <a:pt x="4526953" y="2951687"/>
-                  <a:pt x="4520819" y="2950477"/>
-                </a:cubicBezTo>
-                <a:lnTo>
-                  <a:pt x="4517604" y="2949852"/>
-                </a:lnTo>
-                <a:lnTo>
-                  <a:pt x="4504537" y="2949759"/>
-                </a:lnTo>
-                <a:lnTo>
-                  <a:pt x="4501104" y="2946715"/>
-                </a:lnTo>
-                <a:lnTo>
-                  <a:pt x="4342695" y="2951638"/>
-                </a:lnTo>
-                <a:cubicBezTo>
-                  <a:pt x="4328954" y="2954609"/>
-                  <a:pt x="4284038" y="2957184"/>
-                  <a:pt x="4274096" y="2953640"/>
-                </a:cubicBezTo>
-                <a:cubicBezTo>
-                  <a:pt x="4264434" y="2953346"/>
-                  <a:pt x="4254047" y="2955481"/>
-                  <a:pt x="4248170" y="2951384"/>
-                </a:cubicBezTo>
-                <a:lnTo>
-                  <a:pt x="4147924" y="2945945"/>
-                </a:lnTo>
-                <a:cubicBezTo>
-                  <a:pt x="4131656" y="2952619"/>
-                  <a:pt x="4104816" y="2942907"/>
-                  <a:pt x="4061825" y="2944206"/>
-                </a:cubicBezTo>
-                <a:cubicBezTo>
-                  <a:pt x="4044045" y="2951860"/>
-                  <a:pt x="4032845" y="2944993"/>
-                  <a:pt x="3998557" y="2955821"/>
-                </a:cubicBezTo>
-                <a:cubicBezTo>
-                  <a:pt x="3997072" y="2955023"/>
-                  <a:pt x="3995237" y="2954313"/>
-                  <a:pt x="3993107" y="2953708"/>
-                </a:cubicBezTo>
-                <a:cubicBezTo>
-                  <a:pt x="3980729" y="2950196"/>
-                  <a:pt x="3961302" y="2950972"/>
-                  <a:pt x="3949713" y="2955441"/>
-                </a:cubicBezTo>
-                <a:cubicBezTo>
-                  <a:pt x="3894925" y="2970367"/>
-                  <a:pt x="3844508" y="2972262"/>
-                  <a:pt x="3797284" y="2977037"/>
-                </a:cubicBezTo>
-                <a:cubicBezTo>
-                  <a:pt x="3743822" y="2981057"/>
-                  <a:pt x="3778974" y="2965129"/>
-                  <a:pt x="3712498" y="2979996"/>
-                </a:cubicBezTo>
-                <a:cubicBezTo>
-                  <a:pt x="3705202" y="2975373"/>
-                  <a:pt x="3696720" y="2975524"/>
-                  <a:pt x="3682471" y="2978543"/>
-                </a:cubicBezTo>
-                <a:cubicBezTo>
-                  <a:pt x="3656488" y="2980127"/>
-                  <a:pt x="3658300" y="2967587"/>
-                  <a:pt x="3632163" y="2976264"/>
-                </a:cubicBezTo>
-                <a:cubicBezTo>
-                  <a:pt x="3636766" y="2969363"/>
-                  <a:pt x="3582819" y="2975892"/>
-                  <a:pt x="3594728" y="2968398"/>
-                </a:cubicBezTo>
-                <a:cubicBezTo>
-                  <a:pt x="3577705" y="2963064"/>
-                  <a:pt x="3569481" y="2973476"/>
-                  <a:pt x="3552594" y="2968934"/>
-                </a:cubicBezTo>
-                <a:cubicBezTo>
-                  <a:pt x="3533613" y="2968552"/>
-                  <a:pt x="3563577" y="2975594"/>
-                  <a:pt x="3542589" y="2977031"/>
-                </a:cubicBezTo>
-                <a:cubicBezTo>
-                  <a:pt x="3517131" y="2977564"/>
-                  <a:pt x="3517346" y="2989828"/>
-                  <a:pt x="3497591" y="2975018"/>
-                </a:cubicBezTo>
-                <a:lnTo>
-                  <a:pt x="3429352" y="2971090"/>
-                </a:lnTo>
-                <a:cubicBezTo>
-                  <a:pt x="3414141" y="2975624"/>
-                  <a:pt x="3401904" y="2974195"/>
-                  <a:pt x="3389938" y="2970884"/>
-                </a:cubicBezTo>
-                <a:cubicBezTo>
-                  <a:pt x="3354504" y="2973297"/>
-                  <a:pt x="3322178" y="2968827"/>
-                  <a:pt x="3282344" y="2968084"/>
-                </a:cubicBezTo>
-                <a:cubicBezTo>
-                  <a:pt x="3239277" y="2974224"/>
-                  <a:pt x="3217192" y="2964327"/>
-                  <a:pt x="3174624" y="2963576"/>
-                </a:cubicBezTo>
-                <a:cubicBezTo>
-                  <a:pt x="3132504" y="2975210"/>
-                  <a:pt x="3146911" y="2949576"/>
-                  <a:pt x="3111077" y="2951285"/>
-                </a:cubicBezTo>
-                <a:cubicBezTo>
-                  <a:pt x="3052732" y="2962418"/>
-                  <a:pt x="3112543" y="2942881"/>
-                  <a:pt x="3022501" y="2948619"/>
-                </a:cubicBezTo>
-                <a:cubicBezTo>
-                  <a:pt x="3017399" y="2950352"/>
-                  <a:pt x="3006521" y="2948989"/>
-                  <a:pt x="3007714" y="2946762"/>
-                </a:cubicBezTo>
-                <a:cubicBezTo>
-                  <a:pt x="2987987" y="2948105"/>
-                  <a:pt x="2931270" y="2937206"/>
-                  <a:pt x="2903098" y="2940576"/>
-                </a:cubicBezTo>
-                <a:cubicBezTo>
-                  <a:pt x="2848155" y="2935894"/>
-                  <a:pt x="2821430" y="2947095"/>
-                  <a:pt x="2781591" y="2946394"/>
-                </a:cubicBezTo>
-                <a:cubicBezTo>
-                  <a:pt x="2735559" y="2940279"/>
-                  <a:pt x="2708563" y="2934146"/>
-                  <a:pt x="2627942" y="2919996"/>
-                </a:cubicBezTo>
-                <a:lnTo>
-                  <a:pt x="2354959" y="2882080"/>
-                </a:lnTo>
-                <a:cubicBezTo>
-                  <a:pt x="2252426" y="2847776"/>
-                  <a:pt x="2124519" y="2878188"/>
-                  <a:pt x="2063184" y="2879109"/>
-                </a:cubicBezTo>
-                <a:cubicBezTo>
-                  <a:pt x="2038620" y="2892844"/>
-                  <a:pt x="2017217" y="2880735"/>
-                  <a:pt x="1986946" y="2887619"/>
-                </a:cubicBezTo>
-                <a:cubicBezTo>
-                  <a:pt x="1919067" y="2894646"/>
-                  <a:pt x="1852404" y="2912737"/>
-                  <a:pt x="1763479" y="2909077"/>
-                </a:cubicBezTo>
-                <a:cubicBezTo>
-                  <a:pt x="1726097" y="2949538"/>
-                  <a:pt x="1621108" y="2933327"/>
-                  <a:pt x="1537980" y="2960398"/>
-                </a:cubicBezTo>
-                <a:cubicBezTo>
-                  <a:pt x="1489205" y="2967965"/>
-                  <a:pt x="1410921" y="2954082"/>
-                  <a:pt x="1395229" y="2975625"/>
-                </a:cubicBezTo>
-                <a:cubicBezTo>
-                  <a:pt x="1371975" y="2964548"/>
-                  <a:pt x="1352259" y="2986116"/>
-                  <a:pt x="1327834" y="2989485"/>
-                </a:cubicBezTo>
-                <a:cubicBezTo>
-                  <a:pt x="1307734" y="2982782"/>
-                  <a:pt x="1298456" y="2990289"/>
-                  <a:pt x="1280757" y="2992959"/>
-                </a:cubicBezTo>
-                <a:cubicBezTo>
-                  <a:pt x="1272383" y="2988567"/>
-                  <a:pt x="1257337" y="2989790"/>
-                  <a:pt x="1252582" y="2995877"/>
-                </a:cubicBezTo>
-                <a:cubicBezTo>
-                  <a:pt x="1260705" y="3008688"/>
-                  <a:pt x="1207969" y="3005420"/>
-                  <a:pt x="1204670" y="3014826"/>
-                </a:cubicBezTo>
-                <a:cubicBezTo>
-                  <a:pt x="1174431" y="3018683"/>
-                  <a:pt x="1041848" y="3015513"/>
-                  <a:pt x="1020457" y="3031603"/>
-                </a:cubicBezTo>
-                <a:cubicBezTo>
-                  <a:pt x="959520" y="3042500"/>
-                  <a:pt x="869308" y="3024872"/>
-                  <a:pt x="843248" y="3026954"/>
-                </a:cubicBezTo>
-                <a:cubicBezTo>
-                  <a:pt x="815646" y="3001836"/>
-                  <a:pt x="694189" y="3080490"/>
-                  <a:pt x="583517" y="3089095"/>
-                </a:cubicBezTo>
-                <a:cubicBezTo>
-                  <a:pt x="568425" y="3087467"/>
-                  <a:pt x="560448" y="3088013"/>
-                  <a:pt x="556836" y="3094374"/>
-                </a:cubicBezTo>
-                <a:cubicBezTo>
-                  <a:pt x="528264" y="3099747"/>
-                  <a:pt x="471823" y="3109156"/>
-                  <a:pt x="412089" y="3121334"/>
-                </a:cubicBezTo>
-                <a:cubicBezTo>
-                  <a:pt x="367235" y="3131096"/>
-                  <a:pt x="143790" y="3139436"/>
-                  <a:pt x="83929" y="3150566"/>
-                </a:cubicBezTo>
                 <a:close/>
               </a:path>
             </a:pathLst>
@@ -13912,8 +13011,8 @@
         </p:nvSpPr>
         <p:spPr>
           <a:xfrm>
-            <a:off x="838200" y="3905833"/>
-            <a:ext cx="4215063" cy="2398713"/>
+            <a:off x="838200" y="609600"/>
+            <a:ext cx="3739341" cy="1330839"/>
           </a:xfrm>
         </p:spPr>
         <p:txBody>
@@ -13923,43 +13022,13 @@
           <a:lstStyle/>
           <a:p>
             <a:r>
-              <a:rPr lang="es-MX"/>
+              <a:rPr lang="es-MX" sz="3700"/>
               <a:t>Análisis del problema – Parte 2</a:t>
             </a:r>
-            <a:endParaRPr lang="es-PE" dirty="0"/>
+            <a:endParaRPr lang="es-PE" sz="3700"/>
           </a:p>
         </p:txBody>
       </p:sp>
-      <p:pic>
-        <p:nvPicPr>
-          <p:cNvPr id="5" name="Picture 4">
-            <a:extLst>
-              <a:ext uri="{FF2B5EF4-FFF2-40B4-BE49-F238E27FC236}">
-                <a16:creationId xmlns:a16="http://schemas.microsoft.com/office/drawing/2014/main" id="{A052B9C1-6D0A-2730-7C3C-6179DACBEC9F}"/>
-              </a:ext>
-            </a:extLst>
-          </p:cNvPr>
-          <p:cNvPicPr>
-            <a:picLocks noChangeAspect="1"/>
-          </p:cNvPicPr>
-          <p:nvPr/>
-        </p:nvPicPr>
-        <p:blipFill>
-          <a:blip r:embed="rId2"/>
-          <a:stretch>
-            <a:fillRect/>
-          </a:stretch>
-        </p:blipFill>
-        <p:spPr>
-          <a:xfrm>
-            <a:off x="1158955" y="553686"/>
-            <a:ext cx="9875259" cy="2468814"/>
-          </a:xfrm>
-          <a:prstGeom prst="rect">
-            <a:avLst/>
-          </a:prstGeom>
-        </p:spPr>
-      </p:pic>
       <p:sp>
         <p:nvSpPr>
           <p:cNvPr id="3" name="Content Placeholder 2">
@@ -13978,12 +13047,12 @@
         </p:nvSpPr>
         <p:spPr>
           <a:xfrm>
-            <a:off x="5630779" y="3884452"/>
-            <a:ext cx="5723021" cy="2398713"/>
+            <a:off x="862366" y="2194102"/>
+            <a:ext cx="3427001" cy="3908586"/>
           </a:xfrm>
         </p:spPr>
         <p:txBody>
-          <a:bodyPr anchor="ctr">
+          <a:bodyPr>
             <a:normAutofit/>
           </a:bodyPr>
           <a:lstStyle/>
@@ -13992,7 +13061,7 @@
               <a:buNone/>
             </a:pPr>
             <a:r>
-              <a:rPr lang="es-MX" sz="2000"/>
+              <a:rPr lang="es-MX" sz="1900"/>
               <a:t>Para poder tener una mejor percepción de los problemas con los cuales contaba Doña Cintia, hicimos uso del diagrama de Ishikawa para poder recolectar los problemas de forma concisa, asimismo, usamos otros elementos tales como matrices de trazabilidad y tablas de problemas para tener un lineamiento de todas las actividades realizadas en la bodega.</a:t>
             </a:r>
           </a:p>
@@ -14000,10 +13069,46 @@
             <a:pPr marL="0" indent="0">
               <a:buNone/>
             </a:pPr>
-            <a:endParaRPr lang="es-PE" sz="2000"/>
+            <a:endParaRPr lang="es-PE" sz="1900"/>
           </a:p>
         </p:txBody>
       </p:sp>
+      <p:pic>
+        <p:nvPicPr>
+          <p:cNvPr id="6" name="Picture 5">
+            <a:extLst>
+              <a:ext uri="{FF2B5EF4-FFF2-40B4-BE49-F238E27FC236}">
+                <a16:creationId xmlns:a16="http://schemas.microsoft.com/office/drawing/2014/main" id="{118C6962-71C0-9C13-55FA-A9C29F556D33}"/>
+              </a:ext>
+            </a:extLst>
+          </p:cNvPr>
+          <p:cNvPicPr>
+            <a:picLocks noChangeAspect="1"/>
+          </p:cNvPicPr>
+          <p:nvPr/>
+        </p:nvPicPr>
+        <p:blipFill>
+          <a:blip r:embed="rId2">
+            <a:extLst>
+              <a:ext uri="{28A0092B-C50C-407E-A947-70E740481C1C}">
+                <a14:useLocalDpi xmlns:a14="http://schemas.microsoft.com/office/drawing/2010/main" val="0"/>
+              </a:ext>
+            </a:extLst>
+          </a:blip>
+          <a:stretch>
+            <a:fillRect/>
+          </a:stretch>
+        </p:blipFill>
+        <p:spPr>
+          <a:xfrm>
+            <a:off x="5445457" y="1709737"/>
+            <a:ext cx="6155141" cy="3462266"/>
+          </a:xfrm>
+          <a:prstGeom prst="rect">
+            <a:avLst/>
+          </a:prstGeom>
+        </p:spPr>
+      </p:pic>
     </p:spTree>
     <p:extLst>
       <p:ext uri="{BB962C8B-B14F-4D97-AF65-F5344CB8AC3E}">
@@ -16756,7 +15861,7 @@
         <p:spPr>
           <a:xfrm>
             <a:off x="383458" y="4792958"/>
-            <a:ext cx="3154362" cy="369332"/>
+            <a:ext cx="3154362" cy="1754326"/>
           </a:xfrm>
           <a:prstGeom prst="rect">
             <a:avLst/>
@@ -16771,13 +15876,13 @@
           <a:p>
             <a:r>
               <a:rPr lang="es-MX" dirty="0"/>
-              <a:t>Pasamos al diagrama </a:t>
-            </a:r>
-            <a:r>
-              <a:rPr lang="es-MX"/>
-              <a:t>de flujo, </a:t>
-            </a:r>
-            <a:endParaRPr lang="es-PE"/>
+              <a:t>Pasamos al diagrama de flujo, como se menciono anteriormente, el diagrama de flujo nos permitirá saber todo el recorrido del usuario, donde en el </a:t>
+            </a:r>
+            <a:r>
+              <a:rPr lang="es-MX" dirty="0" err="1"/>
+              <a:t>login</a:t>
+            </a:r>
+            <a:endParaRPr lang="es-PE" dirty="0"/>
           </a:p>
         </p:txBody>
       </p:sp>

--- a/Caso de la bodega.pptx
+++ b/Caso de la bodega.pptx
@@ -276,7 +276,7 @@
           <a:p>
             <a:fld id="{F3B4D3E5-F004-4FA3-BAF8-303336792672}" type="datetimeFigureOut">
               <a:rPr lang="es-PE" smtClean="0"/>
-              <a:t>2/07/2026</a:t>
+              <a:t>9/07/2026</a:t>
             </a:fld>
             <a:endParaRPr lang="es-PE"/>
           </a:p>
@@ -476,7 +476,7 @@
           <a:p>
             <a:fld id="{F3B4D3E5-F004-4FA3-BAF8-303336792672}" type="datetimeFigureOut">
               <a:rPr lang="es-PE" smtClean="0"/>
-              <a:t>2/07/2026</a:t>
+              <a:t>9/07/2026</a:t>
             </a:fld>
             <a:endParaRPr lang="es-PE"/>
           </a:p>
@@ -686,7 +686,7 @@
           <a:p>
             <a:fld id="{F3B4D3E5-F004-4FA3-BAF8-303336792672}" type="datetimeFigureOut">
               <a:rPr lang="es-PE" smtClean="0"/>
-              <a:t>2/07/2026</a:t>
+              <a:t>9/07/2026</a:t>
             </a:fld>
             <a:endParaRPr lang="es-PE"/>
           </a:p>
@@ -886,7 +886,7 @@
           <a:p>
             <a:fld id="{F3B4D3E5-F004-4FA3-BAF8-303336792672}" type="datetimeFigureOut">
               <a:rPr lang="es-PE" smtClean="0"/>
-              <a:t>2/07/2026</a:t>
+              <a:t>9/07/2026</a:t>
             </a:fld>
             <a:endParaRPr lang="es-PE"/>
           </a:p>
@@ -1162,7 +1162,7 @@
           <a:p>
             <a:fld id="{F3B4D3E5-F004-4FA3-BAF8-303336792672}" type="datetimeFigureOut">
               <a:rPr lang="es-PE" smtClean="0"/>
-              <a:t>2/07/2026</a:t>
+              <a:t>9/07/2026</a:t>
             </a:fld>
             <a:endParaRPr lang="es-PE"/>
           </a:p>
@@ -1430,7 +1430,7 @@
           <a:p>
             <a:fld id="{F3B4D3E5-F004-4FA3-BAF8-303336792672}" type="datetimeFigureOut">
               <a:rPr lang="es-PE" smtClean="0"/>
-              <a:t>2/07/2026</a:t>
+              <a:t>9/07/2026</a:t>
             </a:fld>
             <a:endParaRPr lang="es-PE"/>
           </a:p>
@@ -1845,7 +1845,7 @@
           <a:p>
             <a:fld id="{F3B4D3E5-F004-4FA3-BAF8-303336792672}" type="datetimeFigureOut">
               <a:rPr lang="es-PE" smtClean="0"/>
-              <a:t>2/07/2026</a:t>
+              <a:t>9/07/2026</a:t>
             </a:fld>
             <a:endParaRPr lang="es-PE"/>
           </a:p>
@@ -1987,7 +1987,7 @@
           <a:p>
             <a:fld id="{F3B4D3E5-F004-4FA3-BAF8-303336792672}" type="datetimeFigureOut">
               <a:rPr lang="es-PE" smtClean="0"/>
-              <a:t>2/07/2026</a:t>
+              <a:t>9/07/2026</a:t>
             </a:fld>
             <a:endParaRPr lang="es-PE"/>
           </a:p>
@@ -2100,7 +2100,7 @@
           <a:p>
             <a:fld id="{F3B4D3E5-F004-4FA3-BAF8-303336792672}" type="datetimeFigureOut">
               <a:rPr lang="es-PE" smtClean="0"/>
-              <a:t>2/07/2026</a:t>
+              <a:t>9/07/2026</a:t>
             </a:fld>
             <a:endParaRPr lang="es-PE"/>
           </a:p>
@@ -2413,7 +2413,7 @@
           <a:p>
             <a:fld id="{F3B4D3E5-F004-4FA3-BAF8-303336792672}" type="datetimeFigureOut">
               <a:rPr lang="es-PE" smtClean="0"/>
-              <a:t>2/07/2026</a:t>
+              <a:t>9/07/2026</a:t>
             </a:fld>
             <a:endParaRPr lang="es-PE"/>
           </a:p>
@@ -2702,7 +2702,7 @@
           <a:p>
             <a:fld id="{F3B4D3E5-F004-4FA3-BAF8-303336792672}" type="datetimeFigureOut">
               <a:rPr lang="es-PE" smtClean="0"/>
-              <a:t>2/07/2026</a:t>
+              <a:t>9/07/2026</a:t>
             </a:fld>
             <a:endParaRPr lang="es-PE"/>
           </a:p>
@@ -2945,7 +2945,7 @@
           <a:p>
             <a:fld id="{F3B4D3E5-F004-4FA3-BAF8-303336792672}" type="datetimeFigureOut">
               <a:rPr lang="es-PE" smtClean="0"/>
-              <a:t>2/07/2026</a:t>
+              <a:t>9/07/2026</a:t>
             </a:fld>
             <a:endParaRPr lang="es-PE"/>
           </a:p>
@@ -6821,215 +6821,6 @@
           </a:custGeom>
         </p:spPr>
       </p:pic>
-      <p:pic>
-        <p:nvPicPr>
-          <p:cNvPr id="9" name="Content Placeholder 8">
-            <a:extLst>
-              <a:ext uri="{FF2B5EF4-FFF2-40B4-BE49-F238E27FC236}">
-                <a16:creationId xmlns:a16="http://schemas.microsoft.com/office/drawing/2014/main" id="{680975FA-19CB-F6FD-7FDD-0F021539F583}"/>
-              </a:ext>
-            </a:extLst>
-          </p:cNvPr>
-          <p:cNvPicPr>
-            <a:picLocks noGrp="1" noChangeAspect="1"/>
-          </p:cNvPicPr>
-          <p:nvPr>
-            <p:ph sz="half" idx="1"/>
-          </p:nvPr>
-        </p:nvPicPr>
-        <p:blipFill>
-          <a:blip r:embed="rId3"/>
-          <a:srcRect t="13656" b="14341"/>
-          <a:stretch>
-            <a:fillRect/>
-          </a:stretch>
-        </p:blipFill>
-        <p:spPr>
-          <a:xfrm>
-            <a:off x="6096000" y="10"/>
-            <a:ext cx="6096000" cy="3182262"/>
-          </a:xfrm>
-          <a:custGeom>
-            <a:avLst/>
-            <a:gdLst/>
-            <a:ahLst/>
-            <a:cxnLst/>
-            <a:rect l="l" t="t" r="r" b="b"/>
-            <a:pathLst>
-              <a:path w="6096000" h="3182272">
-                <a:moveTo>
-                  <a:pt x="0" y="0"/>
-                </a:moveTo>
-                <a:lnTo>
-                  <a:pt x="6096000" y="0"/>
-                </a:lnTo>
-                <a:lnTo>
-                  <a:pt x="6096000" y="2977881"/>
-                </a:lnTo>
-                <a:lnTo>
-                  <a:pt x="6089100" y="2979305"/>
-                </a:lnTo>
-                <a:cubicBezTo>
-                  <a:pt x="6033641" y="2989882"/>
-                  <a:pt x="5988719" y="2996128"/>
-                  <a:pt x="5963104" y="2993636"/>
-                </a:cubicBezTo>
-                <a:cubicBezTo>
-                  <a:pt x="5792949" y="3029182"/>
-                  <a:pt x="5730547" y="3002240"/>
-                  <a:pt x="5622676" y="2993454"/>
-                </a:cubicBezTo>
-                <a:cubicBezTo>
-                  <a:pt x="5358705" y="2975083"/>
-                  <a:pt x="5242862" y="2994654"/>
-                  <a:pt x="5115732" y="2989671"/>
-                </a:cubicBezTo>
-                <a:cubicBezTo>
-                  <a:pt x="4988602" y="2984687"/>
-                  <a:pt x="5029567" y="2975639"/>
-                  <a:pt x="4859897" y="2963549"/>
-                </a:cubicBezTo>
-                <a:lnTo>
-                  <a:pt x="4391870" y="2926580"/>
-                </a:lnTo>
-                <a:cubicBezTo>
-                  <a:pt x="4327296" y="2956949"/>
-                  <a:pt x="4071930" y="2902434"/>
-                  <a:pt x="4051327" y="2902384"/>
-                </a:cubicBezTo>
-                <a:cubicBezTo>
-                  <a:pt x="3968352" y="2908170"/>
-                  <a:pt x="3882315" y="2886803"/>
-                  <a:pt x="3767876" y="2899218"/>
-                </a:cubicBezTo>
-                <a:cubicBezTo>
-                  <a:pt x="3761563" y="2910695"/>
-                  <a:pt x="3759706" y="2886579"/>
-                  <a:pt x="3607318" y="2887826"/>
-                </a:cubicBezTo>
-                <a:cubicBezTo>
-                  <a:pt x="3517854" y="2911862"/>
-                  <a:pt x="3239059" y="2908898"/>
-                  <a:pt x="3200813" y="2916134"/>
-                </a:cubicBezTo>
-                <a:cubicBezTo>
-                  <a:pt x="3125330" y="2921689"/>
-                  <a:pt x="3104585" y="2900825"/>
-                  <a:pt x="3048226" y="2903616"/>
-                </a:cubicBezTo>
-                <a:cubicBezTo>
-                  <a:pt x="3047198" y="2905512"/>
-                  <a:pt x="2972947" y="2922104"/>
-                  <a:pt x="2930185" y="2925795"/>
-                </a:cubicBezTo>
-                <a:cubicBezTo>
-                  <a:pt x="2887423" y="2929486"/>
-                  <a:pt x="2826842" y="2932273"/>
-                  <a:pt x="2791651" y="2925762"/>
-                </a:cubicBezTo>
-                <a:cubicBezTo>
-                  <a:pt x="2641026" y="2907373"/>
-                  <a:pt x="2577392" y="2897262"/>
-                  <a:pt x="2468125" y="2897565"/>
-                </a:cubicBezTo>
-                <a:cubicBezTo>
-                  <a:pt x="2347953" y="2900676"/>
-                  <a:pt x="2483169" y="2941985"/>
-                  <a:pt x="2308652" y="2926146"/>
-                </a:cubicBezTo>
-                <a:cubicBezTo>
-                  <a:pt x="2305401" y="2936895"/>
-                  <a:pt x="2265130" y="2921533"/>
-                  <a:pt x="2228153" y="2918475"/>
-                </a:cubicBezTo>
-                <a:cubicBezTo>
-                  <a:pt x="2170686" y="2920724"/>
-                  <a:pt x="2206286" y="2945386"/>
-                  <a:pt x="2130469" y="2933502"/>
-                </a:cubicBezTo>
-                <a:lnTo>
-                  <a:pt x="2051835" y="2955169"/>
-                </a:lnTo>
-                <a:cubicBezTo>
-                  <a:pt x="2052153" y="2950872"/>
-                  <a:pt x="1934201" y="3004193"/>
-                  <a:pt x="1910793" y="3004946"/>
-                </a:cubicBezTo>
-                <a:lnTo>
-                  <a:pt x="1758332" y="3027886"/>
-                </a:lnTo>
-                <a:cubicBezTo>
-                  <a:pt x="1709235" y="3044665"/>
-                  <a:pt x="1700383" y="3043257"/>
-                  <a:pt x="1649704" y="3051307"/>
-                </a:cubicBezTo>
-                <a:cubicBezTo>
-                  <a:pt x="1599024" y="3059359"/>
-                  <a:pt x="1520412" y="3098900"/>
-                  <a:pt x="1454257" y="3076192"/>
-                </a:cubicBezTo>
-                <a:cubicBezTo>
-                  <a:pt x="1407884" y="3090545"/>
-                  <a:pt x="1414359" y="3062092"/>
-                  <a:pt x="1323176" y="3081187"/>
-                </a:cubicBezTo>
-                <a:cubicBezTo>
-                  <a:pt x="1269270" y="3084300"/>
-                  <a:pt x="1246499" y="3082073"/>
-                  <a:pt x="1231798" y="3083652"/>
-                </a:cubicBezTo>
-                <a:lnTo>
-                  <a:pt x="1128386" y="3096270"/>
-                </a:lnTo>
-                <a:lnTo>
-                  <a:pt x="1087572" y="3101257"/>
-                </a:lnTo>
-                <a:lnTo>
-                  <a:pt x="1075937" y="3104255"/>
-                </a:lnTo>
-                <a:lnTo>
-                  <a:pt x="992872" y="3105385"/>
-                </a:lnTo>
-                <a:cubicBezTo>
-                  <a:pt x="955021" y="3105296"/>
-                  <a:pt x="904630" y="3125038"/>
-                  <a:pt x="891882" y="3122691"/>
-                </a:cubicBezTo>
-                <a:cubicBezTo>
-                  <a:pt x="784087" y="3112356"/>
-                  <a:pt x="829281" y="3133000"/>
-                  <a:pt x="715888" y="3127380"/>
-                </a:cubicBezTo>
-                <a:cubicBezTo>
-                  <a:pt x="637116" y="3116268"/>
-                  <a:pt x="537472" y="3131012"/>
-                  <a:pt x="399964" y="3152096"/>
-                </a:cubicBezTo>
-                <a:lnTo>
-                  <a:pt x="310170" y="3146040"/>
-                </a:lnTo>
-                <a:lnTo>
-                  <a:pt x="251771" y="3165636"/>
-                </a:lnTo>
-                <a:cubicBezTo>
-                  <a:pt x="208442" y="3181313"/>
-                  <a:pt x="136178" y="3149360"/>
-                  <a:pt x="104780" y="3166182"/>
-                </a:cubicBezTo>
-                <a:cubicBezTo>
-                  <a:pt x="55782" y="3185117"/>
-                  <a:pt x="29223" y="3184417"/>
-                  <a:pt x="8274" y="3178809"/>
-                </a:cubicBezTo>
-                <a:lnTo>
-                  <a:pt x="0" y="3175916"/>
-                </a:lnTo>
-                <a:close/>
-              </a:path>
-            </a:pathLst>
-          </a:custGeom>
-        </p:spPr>
-      </p:pic>
       <p:sp>
         <p:nvSpPr>
           <p:cNvPr id="7" name="TextBox 6">
@@ -7081,6 +6872,44 @@
           </a:p>
         </p:txBody>
       </p:sp>
+      <p:pic>
+        <p:nvPicPr>
+          <p:cNvPr id="17" name="Content Placeholder 16">
+            <a:extLst>
+              <a:ext uri="{FF2B5EF4-FFF2-40B4-BE49-F238E27FC236}">
+                <a16:creationId xmlns:a16="http://schemas.microsoft.com/office/drawing/2014/main" id="{E7E809D7-2A3D-87C9-2724-3E1975B5A988}"/>
+              </a:ext>
+            </a:extLst>
+          </p:cNvPr>
+          <p:cNvPicPr>
+            <a:picLocks noGrp="1" noChangeAspect="1"/>
+          </p:cNvPicPr>
+          <p:nvPr>
+            <p:ph sz="half" idx="1"/>
+          </p:nvPr>
+        </p:nvPicPr>
+        <p:blipFill>
+          <a:blip r:embed="rId3">
+            <a:extLst>
+              <a:ext uri="{28A0092B-C50C-407E-A947-70E740481C1C}">
+                <a14:useLocalDpi xmlns:a14="http://schemas.microsoft.com/office/drawing/2010/main" val="0"/>
+              </a:ext>
+            </a:extLst>
+          </a:blip>
+          <a:stretch>
+            <a:fillRect/>
+          </a:stretch>
+        </p:blipFill>
+        <p:spPr>
+          <a:xfrm>
+            <a:off x="6096001" y="1"/>
+            <a:ext cx="5813948" cy="3175906"/>
+          </a:xfrm>
+          <a:prstGeom prst="rect">
+            <a:avLst/>
+          </a:prstGeom>
+        </p:spPr>
+      </p:pic>
     </p:spTree>
     <p:extLst>
       <p:ext uri="{BB962C8B-B14F-4D97-AF65-F5344CB8AC3E}">
@@ -15756,6 +15585,144 @@
           <a:chExt cx="0" cy="0"/>
         </a:xfrm>
       </p:grpSpPr>
+      <p:sp>
+        <p:nvSpPr>
+          <p:cNvPr id="10" name="Rectangle: Rounded Corners 9">
+            <a:extLst>
+              <a:ext uri="{FF2B5EF4-FFF2-40B4-BE49-F238E27FC236}">
+                <a16:creationId xmlns:a16="http://schemas.microsoft.com/office/drawing/2014/main" id="{5A8DBCF5-BD31-D471-896C-8B92EE4F878D}"/>
+              </a:ext>
+            </a:extLst>
+          </p:cNvPr>
+          <p:cNvSpPr/>
+          <p:nvPr/>
+        </p:nvSpPr>
+        <p:spPr>
+          <a:xfrm>
+            <a:off x="8200679" y="801311"/>
+            <a:ext cx="3627619" cy="4277552"/>
+          </a:xfrm>
+          <a:prstGeom prst="roundRect">
+            <a:avLst/>
+          </a:prstGeom>
+        </p:spPr>
+        <p:style>
+          <a:lnRef idx="2">
+            <a:schemeClr val="accent1">
+              <a:shade val="15000"/>
+            </a:schemeClr>
+          </a:lnRef>
+          <a:fillRef idx="1">
+            <a:schemeClr val="accent1"/>
+          </a:fillRef>
+          <a:effectRef idx="0">
+            <a:schemeClr val="accent1"/>
+          </a:effectRef>
+          <a:fontRef idx="minor">
+            <a:schemeClr val="lt1"/>
+          </a:fontRef>
+        </p:style>
+        <p:txBody>
+          <a:bodyPr rtlCol="0" anchor="ctr"/>
+          <a:lstStyle/>
+          <a:p>
+            <a:pPr algn="ctr"/>
+            <a:endParaRPr lang="es-PE"/>
+          </a:p>
+        </p:txBody>
+      </p:sp>
+      <p:sp>
+        <p:nvSpPr>
+          <p:cNvPr id="7" name="Rectangle: Rounded Corners 6">
+            <a:extLst>
+              <a:ext uri="{FF2B5EF4-FFF2-40B4-BE49-F238E27FC236}">
+                <a16:creationId xmlns:a16="http://schemas.microsoft.com/office/drawing/2014/main" id="{2127C4DA-FD41-43DA-2E97-EDA8ABE5A33F}"/>
+              </a:ext>
+            </a:extLst>
+          </p:cNvPr>
+          <p:cNvSpPr/>
+          <p:nvPr/>
+        </p:nvSpPr>
+        <p:spPr>
+          <a:xfrm>
+            <a:off x="4020220" y="639222"/>
+            <a:ext cx="4189603" cy="4933225"/>
+          </a:xfrm>
+          <a:prstGeom prst="roundRect">
+            <a:avLst/>
+          </a:prstGeom>
+        </p:spPr>
+        <p:style>
+          <a:lnRef idx="2">
+            <a:schemeClr val="accent1">
+              <a:shade val="15000"/>
+            </a:schemeClr>
+          </a:lnRef>
+          <a:fillRef idx="1">
+            <a:schemeClr val="accent1"/>
+          </a:fillRef>
+          <a:effectRef idx="0">
+            <a:schemeClr val="accent1"/>
+          </a:effectRef>
+          <a:fontRef idx="minor">
+            <a:schemeClr val="lt1"/>
+          </a:fontRef>
+        </p:style>
+        <p:txBody>
+          <a:bodyPr rtlCol="0" anchor="ctr"/>
+          <a:lstStyle/>
+          <a:p>
+            <a:pPr algn="ctr"/>
+            <a:endParaRPr lang="es-PE"/>
+          </a:p>
+        </p:txBody>
+      </p:sp>
+      <p:sp>
+        <p:nvSpPr>
+          <p:cNvPr id="2" name="Rectangle: Rounded Corners 1">
+            <a:extLst>
+              <a:ext uri="{FF2B5EF4-FFF2-40B4-BE49-F238E27FC236}">
+                <a16:creationId xmlns:a16="http://schemas.microsoft.com/office/drawing/2014/main" id="{16C2EB67-D891-35C7-4F8E-CBF314BE191A}"/>
+              </a:ext>
+            </a:extLst>
+          </p:cNvPr>
+          <p:cNvSpPr/>
+          <p:nvPr/>
+        </p:nvSpPr>
+        <p:spPr>
+          <a:xfrm>
+            <a:off x="146829" y="639222"/>
+            <a:ext cx="3627619" cy="4277552"/>
+          </a:xfrm>
+          <a:prstGeom prst="roundRect">
+            <a:avLst/>
+          </a:prstGeom>
+        </p:spPr>
+        <p:style>
+          <a:lnRef idx="2">
+            <a:schemeClr val="accent1">
+              <a:shade val="15000"/>
+            </a:schemeClr>
+          </a:lnRef>
+          <a:fillRef idx="1">
+            <a:schemeClr val="accent1"/>
+          </a:fillRef>
+          <a:effectRef idx="0">
+            <a:schemeClr val="accent1"/>
+          </a:effectRef>
+          <a:fontRef idx="minor">
+            <a:schemeClr val="lt1"/>
+          </a:fontRef>
+        </p:style>
+        <p:txBody>
+          <a:bodyPr rtlCol="0" anchor="ctr"/>
+          <a:lstStyle/>
+          <a:p>
+            <a:pPr algn="ctr"/>
+            <a:endParaRPr lang="es-PE"/>
+          </a:p>
+        </p:txBody>
+      </p:sp>
       <p:pic>
         <p:nvPicPr>
           <p:cNvPr id="5" name="Content Placeholder 4">
@@ -15808,7 +15775,7 @@
         </p:blipFill>
         <p:spPr>
           <a:xfrm>
-            <a:off x="3992563" y="1096837"/>
+            <a:off x="4266114" y="1072079"/>
             <a:ext cx="3753374" cy="4172532"/>
           </a:xfrm>
           <a:prstGeom prst="rect">
@@ -15838,7 +15805,7 @@
         </p:blipFill>
         <p:spPr>
           <a:xfrm>
-            <a:off x="8200680" y="1087216"/>
+            <a:off x="8209823" y="1087216"/>
             <a:ext cx="3381847" cy="3705742"/>
           </a:xfrm>
           <a:prstGeom prst="rect">
@@ -15860,8 +15827,8 @@
         </p:nvSpPr>
         <p:spPr>
           <a:xfrm>
-            <a:off x="383458" y="4792958"/>
-            <a:ext cx="3154362" cy="1754326"/>
+            <a:off x="383458" y="5572447"/>
+            <a:ext cx="11199069" cy="646331"/>
           </a:xfrm>
           <a:prstGeom prst="rect">
             <a:avLst/>
@@ -15876,11 +15843,7 @@
           <a:p>
             <a:r>
               <a:rPr lang="es-MX" dirty="0"/>
-              <a:t>Pasamos al diagrama de flujo, como se menciono anteriormente, el diagrama de flujo nos permitirá saber todo el recorrido del usuario, donde en el </a:t>
-            </a:r>
-            <a:r>
-              <a:rPr lang="es-MX" dirty="0" err="1"/>
-              <a:t>login</a:t>
+              <a:t>Pasamos al diagrama de flujo, como se menciono anteriormente, el diagrama de flujo nos permitirá saber todo el recorrido del usuario, que errores se podrían prevenir del usuario, entre otras cosas.</a:t>
             </a:r>
             <a:endParaRPr lang="es-PE" dirty="0"/>
           </a:p>
